--- a/Qiskit_Fall_Fest_2025_Meetup_Oct_25.pptx
+++ b/Qiskit_Fall_Fest_2025_Meetup_Oct_25.pptx
@@ -5,28 +5,32 @@
     <p:sldMasterId id="2147483962" r:id="rId1"/>
   </p:sldMasterIdLst>
   <p:notesMasterIdLst>
-    <p:notesMasterId r:id="rId18"/>
+    <p:notesMasterId r:id="rId22"/>
   </p:notesMasterIdLst>
   <p:handoutMasterIdLst>
-    <p:handoutMasterId r:id="rId19"/>
+    <p:handoutMasterId r:id="rId23"/>
   </p:handoutMasterIdLst>
   <p:sldIdLst>
     <p:sldId id="257" r:id="rId2"/>
     <p:sldId id="405" r:id="rId3"/>
-    <p:sldId id="421" r:id="rId4"/>
-    <p:sldId id="410" r:id="rId5"/>
-    <p:sldId id="627" r:id="rId6"/>
-    <p:sldId id="625" r:id="rId7"/>
-    <p:sldId id="626" r:id="rId8"/>
-    <p:sldId id="470" r:id="rId9"/>
-    <p:sldId id="630" r:id="rId10"/>
-    <p:sldId id="634" r:id="rId11"/>
-    <p:sldId id="635" r:id="rId12"/>
-    <p:sldId id="631" r:id="rId13"/>
-    <p:sldId id="633" r:id="rId14"/>
-    <p:sldId id="629" r:id="rId15"/>
-    <p:sldId id="632" r:id="rId16"/>
-    <p:sldId id="624" r:id="rId17"/>
+    <p:sldId id="637" r:id="rId4"/>
+    <p:sldId id="636" r:id="rId5"/>
+    <p:sldId id="638" r:id="rId6"/>
+    <p:sldId id="421" r:id="rId7"/>
+    <p:sldId id="410" r:id="rId8"/>
+    <p:sldId id="627" r:id="rId9"/>
+    <p:sldId id="625" r:id="rId10"/>
+    <p:sldId id="626" r:id="rId11"/>
+    <p:sldId id="470" r:id="rId12"/>
+    <p:sldId id="630" r:id="rId13"/>
+    <p:sldId id="634" r:id="rId14"/>
+    <p:sldId id="635" r:id="rId15"/>
+    <p:sldId id="631" r:id="rId16"/>
+    <p:sldId id="633" r:id="rId17"/>
+    <p:sldId id="629" r:id="rId18"/>
+    <p:sldId id="639" r:id="rId19"/>
+    <p:sldId id="632" r:id="rId20"/>
+    <p:sldId id="624" r:id="rId21"/>
   </p:sldIdLst>
   <p:sldSz cx="24387175" cy="13716000"/>
   <p:notesSz cx="6858000" cy="9144000"/>
@@ -135,6 +139,9 @@
           <p14:sldIdLst>
             <p14:sldId id="257"/>
             <p14:sldId id="405"/>
+            <p14:sldId id="637"/>
+            <p14:sldId id="636"/>
+            <p14:sldId id="638"/>
             <p14:sldId id="421"/>
             <p14:sldId id="410"/>
             <p14:sldId id="627"/>
@@ -147,6 +154,7 @@
             <p14:sldId id="631"/>
             <p14:sldId id="633"/>
             <p14:sldId id="629"/>
+            <p14:sldId id="639"/>
             <p14:sldId id="632"/>
             <p14:sldId id="624"/>
           </p14:sldIdLst>
@@ -850,7 +858,7 @@
             <a:fld id="{6E2E38B8-B0B4-AD41-AC6E-B781F46A9FD3}" type="slidenum">
               <a:rPr lang="en-US" smtClean="0"/>
               <a:pPr/>
-              <a:t>4</a:t>
+              <a:t>7</a:t>
             </a:fld>
             <a:endParaRPr lang="en-US"/>
           </a:p>
@@ -23222,7 +23230,7 @@
           <a:p>
             <a:fld id="{1D8BD707-D9CF-40AE-B4C6-C98DA3205C09}" type="datetimeFigureOut">
               <a:rPr lang="en-US"/>
-              <a:t>10/22/2025</a:t>
+              <a:t>10/25/2025</a:t>
             </a:fld>
             <a:endParaRPr lang="en-US"/>
           </a:p>
@@ -24632,7 +24640,7 @@
           </a:ln>
           <a:extLst>
             <a:ext uri="{C572A759-6A51-4108-AA02-DFA0A04FC94B}">
-              <ma14:wrappingTextBoxFlag xmlns:ma14="http://schemas.microsoft.com/office/mac/drawingml/2011/main" xmlns:a14="http://schemas.microsoft.com/office/drawing/2010/main" xmlns:m="http://schemas.openxmlformats.org/officeDocument/2006/math" xmlns="" val="1"/>
+              <ma14:wrappingTextBoxFlag xmlns="" xmlns:m="http://schemas.openxmlformats.org/officeDocument/2006/math" xmlns:a14="http://schemas.microsoft.com/office/drawing/2010/main" xmlns:ma14="http://schemas.microsoft.com/office/mac/drawingml/2011/main" val="1"/>
             </a:ext>
           </a:extLst>
         </p:spPr>
@@ -24670,7 +24678,7 @@
           </a:ln>
           <a:extLst>
             <a:ext uri="{C572A759-6A51-4108-AA02-DFA0A04FC94B}">
-              <ma14:wrappingTextBoxFlag xmlns:ma14="http://schemas.microsoft.com/office/mac/drawingml/2011/main" xmlns:a14="http://schemas.microsoft.com/office/drawing/2010/main" xmlns:m="http://schemas.openxmlformats.org/officeDocument/2006/math" xmlns="" val="1"/>
+              <ma14:wrappingTextBoxFlag xmlns="" xmlns:m="http://schemas.openxmlformats.org/officeDocument/2006/math" xmlns:a14="http://schemas.microsoft.com/office/drawing/2010/main" xmlns:ma14="http://schemas.microsoft.com/office/mac/drawingml/2011/main" val="1"/>
             </a:ext>
           </a:extLst>
         </p:spPr>
@@ -26300,7 +26308,7 @@
                   <a:schemeClr val="tx1"/>
                 </a:solidFill>
               </a:rPr>
-              <a:t> Beginner Challenge, plus Revisits</a:t>
+              <a:t> Beginner Challenge, plus Question Revisits</a:t>
             </a:r>
             <a:br>
               <a:rPr lang="en-US" kern="0" dirty="0">
@@ -26499,6 +26507,1750 @@
 </file>
 
 <file path=ppt/slides/slide10.xml><?xml version="1.0" encoding="utf-8"?>
+<p:sld xmlns:a="http://schemas.openxmlformats.org/drawingml/2006/main" xmlns:r="http://schemas.openxmlformats.org/officeDocument/2006/relationships" xmlns:p="http://schemas.openxmlformats.org/presentationml/2006/main">
+  <p:cSld>
+    <p:spTree>
+      <p:nvGrpSpPr>
+        <p:cNvPr id="1" name="">
+          <a:extLst>
+            <a:ext uri="{FF2B5EF4-FFF2-40B4-BE49-F238E27FC236}">
+              <a16:creationId xmlns:a16="http://schemas.microsoft.com/office/drawing/2014/main" id="{62E53FF9-84C5-FE89-226E-DA1330A7BB38}"/>
+            </a:ext>
+          </a:extLst>
+        </p:cNvPr>
+        <p:cNvGrpSpPr/>
+        <p:nvPr/>
+      </p:nvGrpSpPr>
+      <p:grpSpPr>
+        <a:xfrm>
+          <a:off x="0" y="0"/>
+          <a:ext cx="0" cy="0"/>
+          <a:chOff x="0" y="0"/>
+          <a:chExt cx="0" cy="0"/>
+        </a:xfrm>
+      </p:grpSpPr>
+      <p:sp>
+        <p:nvSpPr>
+          <p:cNvPr id="2" name="Title 1">
+            <a:extLst>
+              <a:ext uri="{FF2B5EF4-FFF2-40B4-BE49-F238E27FC236}">
+                <a16:creationId xmlns:a16="http://schemas.microsoft.com/office/drawing/2014/main" id="{77CEAA65-CAF1-8E70-9466-12F60369FDA9}"/>
+              </a:ext>
+            </a:extLst>
+          </p:cNvPr>
+          <p:cNvSpPr>
+            <a:spLocks noGrp="1"/>
+          </p:cNvSpPr>
+          <p:nvPr>
+            <p:ph type="title"/>
+          </p:nvPr>
+        </p:nvSpPr>
+        <p:spPr/>
+        <p:txBody>
+          <a:bodyPr/>
+          <a:lstStyle/>
+          <a:p>
+            <a:r>
+              <a:rPr lang="en-US" dirty="0"/>
+              <a:t>Revisit Previous Questions</a:t>
+            </a:r>
+          </a:p>
+        </p:txBody>
+      </p:sp>
+      <p:cxnSp>
+        <p:nvCxnSpPr>
+          <p:cNvPr id="10" name="Straight Connector 9" descr="Horizontal row divider">
+            <a:extLst>
+              <a:ext uri="{FF2B5EF4-FFF2-40B4-BE49-F238E27FC236}">
+                <a16:creationId xmlns:a16="http://schemas.microsoft.com/office/drawing/2014/main" id="{D7EEC640-DB22-1222-288C-EE4A4EE4A48B}"/>
+              </a:ext>
+            </a:extLst>
+          </p:cNvPr>
+          <p:cNvCxnSpPr/>
+          <p:nvPr/>
+        </p:nvCxnSpPr>
+        <p:spPr bwMode="auto">
+          <a:xfrm>
+            <a:off x="568325" y="6096000"/>
+            <a:ext cx="23244175" cy="0"/>
+          </a:xfrm>
+          <a:prstGeom prst="line">
+            <a:avLst/>
+          </a:prstGeom>
+          <a:ln w="12700">
+            <a:solidFill>
+              <a:schemeClr val="tx1"/>
+            </a:solidFill>
+            <a:headEnd type="none" w="med" len="med"/>
+            <a:tailEnd type="none" w="med" len="med"/>
+          </a:ln>
+          <a:effectLst/>
+        </p:spPr>
+        <p:style>
+          <a:lnRef idx="1">
+            <a:schemeClr val="dk1"/>
+          </a:lnRef>
+          <a:fillRef idx="0">
+            <a:schemeClr val="dk1"/>
+          </a:fillRef>
+          <a:effectRef idx="0">
+            <a:schemeClr val="dk1"/>
+          </a:effectRef>
+          <a:fontRef idx="minor">
+            <a:schemeClr val="tx1"/>
+          </a:fontRef>
+        </p:style>
+      </p:cxnSp>
+      <p:sp>
+        <p:nvSpPr>
+          <p:cNvPr id="3" name="Text Placeholder 2">
+            <a:extLst>
+              <a:ext uri="{FF2B5EF4-FFF2-40B4-BE49-F238E27FC236}">
+                <a16:creationId xmlns:a16="http://schemas.microsoft.com/office/drawing/2014/main" id="{6BF29E3B-841E-12BC-B949-545152983CED}"/>
+              </a:ext>
+            </a:extLst>
+          </p:cNvPr>
+          <p:cNvSpPr>
+            <a:spLocks noGrp="1"/>
+          </p:cNvSpPr>
+          <p:nvPr>
+            <p:ph type="body" sz="quarter" idx="11"/>
+          </p:nvPr>
+        </p:nvSpPr>
+        <p:spPr/>
+        <p:txBody>
+          <a:bodyPr/>
+          <a:lstStyle/>
+          <a:p>
+            <a:r>
+              <a:rPr lang="en-US" sz="6400" dirty="0">
+                <a:solidFill>
+                  <a:srgbClr val="EE5396"/>
+                </a:solidFill>
+              </a:rPr>
+              <a:t>1</a:t>
+            </a:r>
+          </a:p>
+          <a:p>
+            <a:br>
+              <a:rPr lang="en-US" dirty="0"/>
+            </a:br>
+            <a:r>
+              <a:rPr lang="en-US" b="1" dirty="0">
+                <a:solidFill>
+                  <a:schemeClr val="accent2"/>
+                </a:solidFill>
+              </a:rPr>
+              <a:t>Greek Alphabet</a:t>
+            </a:r>
+            <a:endParaRPr lang="en-US" dirty="0"/>
+          </a:p>
+        </p:txBody>
+      </p:sp>
+      <p:cxnSp>
+        <p:nvCxnSpPr>
+          <p:cNvPr id="11" name="Straight Connector 10" descr="Vertical column divider">
+            <a:extLst>
+              <a:ext uri="{FF2B5EF4-FFF2-40B4-BE49-F238E27FC236}">
+                <a16:creationId xmlns:a16="http://schemas.microsoft.com/office/drawing/2014/main" id="{59806C2C-36FE-845B-F725-9D3ED52B1E6B}"/>
+              </a:ext>
+            </a:extLst>
+          </p:cNvPr>
+          <p:cNvCxnSpPr>
+            <a:cxnSpLocks/>
+          </p:cNvCxnSpPr>
+          <p:nvPr/>
+        </p:nvCxnSpPr>
+        <p:spPr bwMode="auto">
+          <a:xfrm>
+            <a:off x="6096000" y="6096000"/>
+            <a:ext cx="0" cy="5870448"/>
+          </a:xfrm>
+          <a:prstGeom prst="line">
+            <a:avLst/>
+          </a:prstGeom>
+          <a:ln w="12700">
+            <a:solidFill>
+              <a:schemeClr val="tx1"/>
+            </a:solidFill>
+            <a:headEnd type="none" w="med" len="med"/>
+            <a:tailEnd type="none" w="med" len="med"/>
+          </a:ln>
+          <a:effectLst/>
+        </p:spPr>
+        <p:style>
+          <a:lnRef idx="1">
+            <a:schemeClr val="dk1"/>
+          </a:lnRef>
+          <a:fillRef idx="0">
+            <a:schemeClr val="dk1"/>
+          </a:fillRef>
+          <a:effectRef idx="0">
+            <a:schemeClr val="dk1"/>
+          </a:effectRef>
+          <a:fontRef idx="minor">
+            <a:schemeClr val="tx1"/>
+          </a:fontRef>
+        </p:style>
+      </p:cxnSp>
+      <p:sp>
+        <p:nvSpPr>
+          <p:cNvPr id="4" name="Text Placeholder 3">
+            <a:extLst>
+              <a:ext uri="{FF2B5EF4-FFF2-40B4-BE49-F238E27FC236}">
+                <a16:creationId xmlns:a16="http://schemas.microsoft.com/office/drawing/2014/main" id="{C50E3709-A825-DEC2-1914-28BB3B0E5530}"/>
+              </a:ext>
+            </a:extLst>
+          </p:cNvPr>
+          <p:cNvSpPr>
+            <a:spLocks noGrp="1"/>
+          </p:cNvSpPr>
+          <p:nvPr>
+            <p:ph type="body" sz="quarter" idx="12"/>
+          </p:nvPr>
+        </p:nvSpPr>
+        <p:spPr>
+          <a:xfrm>
+            <a:off x="6669591" y="6667501"/>
+            <a:ext cx="5136327" cy="6245859"/>
+          </a:xfrm>
+        </p:spPr>
+        <p:txBody>
+          <a:bodyPr/>
+          <a:lstStyle/>
+          <a:p>
+            <a:r>
+              <a:rPr lang="en-US" sz="6400" dirty="0">
+                <a:solidFill>
+                  <a:srgbClr val="EE5396"/>
+                </a:solidFill>
+              </a:rPr>
+              <a:t>2</a:t>
+            </a:r>
+          </a:p>
+          <a:p>
+            <a:br>
+              <a:rPr lang="en-US" dirty="0"/>
+            </a:br>
+            <a:r>
+              <a:rPr lang="en-US" b="1" dirty="0">
+                <a:solidFill>
+                  <a:schemeClr val="accent2"/>
+                </a:solidFill>
+              </a:rPr>
+              <a:t>Data and Quantum Computers</a:t>
+            </a:r>
+          </a:p>
+          <a:p>
+            <a:endParaRPr lang="en-US" b="1" dirty="0">
+              <a:solidFill>
+                <a:schemeClr val="accent2"/>
+              </a:solidFill>
+            </a:endParaRPr>
+          </a:p>
+          <a:p>
+            <a:pPr marL="457200" indent="-457200">
+              <a:buFontTx/>
+              <a:buChar char="-"/>
+            </a:pPr>
+            <a:r>
+              <a:rPr lang="en-US" dirty="0"/>
+              <a:t>Data Loading Project</a:t>
+            </a:r>
+          </a:p>
+          <a:p>
+            <a:pPr marL="457200" indent="-457200">
+              <a:buFontTx/>
+              <a:buChar char="-"/>
+            </a:pPr>
+            <a:r>
+              <a:rPr lang="en-US" dirty="0"/>
+              <a:t>Watch out for Bad Articles, written by AI or humans</a:t>
+            </a:r>
+          </a:p>
+          <a:p>
+            <a:pPr marL="457200" indent="-457200">
+              <a:buFontTx/>
+              <a:buChar char="-"/>
+            </a:pPr>
+            <a:r>
+              <a:rPr lang="en-US" dirty="0"/>
+              <a:t>Small Data, Big Solution Space (Medium: J Krupansky)</a:t>
+            </a:r>
+          </a:p>
+          <a:p>
+            <a:pPr marL="457200" indent="-457200">
+              <a:buFontTx/>
+              <a:buChar char="-"/>
+            </a:pPr>
+            <a:r>
+              <a:rPr lang="en-US" dirty="0"/>
+              <a:t>Now-</a:t>
+            </a:r>
+            <a:r>
+              <a:rPr lang="en-US" dirty="0" err="1"/>
+              <a:t>ish</a:t>
+            </a:r>
+            <a:r>
+              <a:rPr lang="en-US" dirty="0"/>
+              <a:t> vs. Later-</a:t>
+            </a:r>
+            <a:r>
+              <a:rPr lang="en-US" dirty="0" err="1"/>
+              <a:t>ish</a:t>
+            </a:r>
+            <a:r>
+              <a:rPr lang="en-US" dirty="0"/>
+              <a:t> (FTQC, </a:t>
+            </a:r>
+            <a:r>
+              <a:rPr lang="en-US" dirty="0" err="1"/>
+              <a:t>qRAM</a:t>
+            </a:r>
+            <a:r>
+              <a:rPr lang="en-US" dirty="0"/>
+              <a:t>)</a:t>
+            </a:r>
+          </a:p>
+          <a:p>
+            <a:endParaRPr lang="en-US" b="1" dirty="0">
+              <a:solidFill>
+                <a:schemeClr val="accent2"/>
+              </a:solidFill>
+            </a:endParaRPr>
+          </a:p>
+        </p:txBody>
+      </p:sp>
+      <p:cxnSp>
+        <p:nvCxnSpPr>
+          <p:cNvPr id="12" name="Straight Connector 11" descr="Vertical column divider">
+            <a:extLst>
+              <a:ext uri="{FF2B5EF4-FFF2-40B4-BE49-F238E27FC236}">
+                <a16:creationId xmlns:a16="http://schemas.microsoft.com/office/drawing/2014/main" id="{97BEC58A-ACFB-7905-1B35-CD1CB0CE862B}"/>
+              </a:ext>
+            </a:extLst>
+          </p:cNvPr>
+          <p:cNvCxnSpPr>
+            <a:cxnSpLocks/>
+          </p:cNvCxnSpPr>
+          <p:nvPr/>
+        </p:nvCxnSpPr>
+        <p:spPr bwMode="auto">
+          <a:xfrm>
+            <a:off x="12188952" y="6099048"/>
+            <a:ext cx="0" cy="5890632"/>
+          </a:xfrm>
+          <a:prstGeom prst="line">
+            <a:avLst/>
+          </a:prstGeom>
+          <a:ln w="12700">
+            <a:solidFill>
+              <a:schemeClr val="tx1"/>
+            </a:solidFill>
+            <a:headEnd type="none" w="med" len="med"/>
+            <a:tailEnd type="none" w="med" len="med"/>
+          </a:ln>
+          <a:effectLst/>
+        </p:spPr>
+        <p:style>
+          <a:lnRef idx="1">
+            <a:schemeClr val="dk1"/>
+          </a:lnRef>
+          <a:fillRef idx="0">
+            <a:schemeClr val="dk1"/>
+          </a:fillRef>
+          <a:effectRef idx="0">
+            <a:schemeClr val="dk1"/>
+          </a:effectRef>
+          <a:fontRef idx="minor">
+            <a:schemeClr val="tx1"/>
+          </a:fontRef>
+        </p:style>
+      </p:cxnSp>
+      <p:sp>
+        <p:nvSpPr>
+          <p:cNvPr id="5" name="Text Placeholder 4">
+            <a:extLst>
+              <a:ext uri="{FF2B5EF4-FFF2-40B4-BE49-F238E27FC236}">
+                <a16:creationId xmlns:a16="http://schemas.microsoft.com/office/drawing/2014/main" id="{89C85353-0B79-90E0-3C7F-BD9B7838D58C}"/>
+              </a:ext>
+            </a:extLst>
+          </p:cNvPr>
+          <p:cNvSpPr>
+            <a:spLocks noGrp="1"/>
+          </p:cNvSpPr>
+          <p:nvPr>
+            <p:ph type="body" sz="quarter" idx="13"/>
+          </p:nvPr>
+        </p:nvSpPr>
+        <p:spPr/>
+        <p:txBody>
+          <a:bodyPr/>
+          <a:lstStyle/>
+          <a:p>
+            <a:r>
+              <a:rPr lang="en-US" sz="6400" dirty="0">
+                <a:solidFill>
+                  <a:srgbClr val="EE5396"/>
+                </a:solidFill>
+              </a:rPr>
+              <a:t>3</a:t>
+            </a:r>
+          </a:p>
+          <a:p>
+            <a:br>
+              <a:rPr lang="en-US" dirty="0"/>
+            </a:br>
+            <a:r>
+              <a:rPr lang="en-US" b="1" dirty="0">
+                <a:solidFill>
+                  <a:schemeClr val="accent2"/>
+                </a:solidFill>
+              </a:rPr>
+              <a:t>AI + Quantum, Quantum + AI </a:t>
+            </a:r>
+          </a:p>
+          <a:p>
+            <a:endParaRPr lang="en-US" dirty="0"/>
+          </a:p>
+          <a:p>
+            <a:pPr marL="457200" indent="-457200">
+              <a:buFontTx/>
+              <a:buChar char="-"/>
+            </a:pPr>
+            <a:r>
+              <a:rPr lang="en-US" dirty="0" err="1"/>
+              <a:t>Qiskit</a:t>
+            </a:r>
+            <a:r>
+              <a:rPr lang="en-US" dirty="0"/>
+              <a:t> Code Assistant</a:t>
+            </a:r>
+          </a:p>
+          <a:p>
+            <a:pPr marL="457200" indent="-457200">
+              <a:buFontTx/>
+              <a:buChar char="-"/>
+            </a:pPr>
+            <a:r>
+              <a:rPr lang="en-US" dirty="0"/>
+              <a:t>AI Software Survey (TensorFlow?)</a:t>
+            </a:r>
+          </a:p>
+          <a:p>
+            <a:pPr marL="457200" indent="-457200">
+              <a:buFontTx/>
+              <a:buChar char="-"/>
+            </a:pPr>
+            <a:r>
+              <a:rPr lang="en-US" dirty="0"/>
+              <a:t>Quantum Software Survey (TensorFlow Quantum?)</a:t>
+            </a:r>
+          </a:p>
+        </p:txBody>
+      </p:sp>
+      <p:cxnSp>
+        <p:nvCxnSpPr>
+          <p:cNvPr id="13" name="Straight Connector 12" descr="Vertical column divider">
+            <a:extLst>
+              <a:ext uri="{FF2B5EF4-FFF2-40B4-BE49-F238E27FC236}">
+                <a16:creationId xmlns:a16="http://schemas.microsoft.com/office/drawing/2014/main" id="{D39143F9-9D22-4FFE-7FEB-846D8767F6FE}"/>
+              </a:ext>
+            </a:extLst>
+          </p:cNvPr>
+          <p:cNvCxnSpPr>
+            <a:cxnSpLocks/>
+          </p:cNvCxnSpPr>
+          <p:nvPr/>
+        </p:nvCxnSpPr>
+        <p:spPr bwMode="auto">
+          <a:xfrm>
+            <a:off x="18288000" y="6096000"/>
+            <a:ext cx="0" cy="5868329"/>
+          </a:xfrm>
+          <a:prstGeom prst="line">
+            <a:avLst/>
+          </a:prstGeom>
+          <a:ln w="12700">
+            <a:solidFill>
+              <a:schemeClr val="tx1"/>
+            </a:solidFill>
+            <a:headEnd type="none" w="med" len="med"/>
+            <a:tailEnd type="none" w="med" len="med"/>
+          </a:ln>
+          <a:effectLst/>
+        </p:spPr>
+        <p:style>
+          <a:lnRef idx="1">
+            <a:schemeClr val="dk1"/>
+          </a:lnRef>
+          <a:fillRef idx="0">
+            <a:schemeClr val="dk1"/>
+          </a:fillRef>
+          <a:effectRef idx="0">
+            <a:schemeClr val="dk1"/>
+          </a:effectRef>
+          <a:fontRef idx="minor">
+            <a:schemeClr val="tx1"/>
+          </a:fontRef>
+        </p:style>
+      </p:cxnSp>
+      <p:sp>
+        <p:nvSpPr>
+          <p:cNvPr id="6" name="Text Placeholder 5">
+            <a:extLst>
+              <a:ext uri="{FF2B5EF4-FFF2-40B4-BE49-F238E27FC236}">
+                <a16:creationId xmlns:a16="http://schemas.microsoft.com/office/drawing/2014/main" id="{D6F64ADF-2B97-69B3-05B3-4C70A1995F7B}"/>
+              </a:ext>
+            </a:extLst>
+          </p:cNvPr>
+          <p:cNvSpPr>
+            <a:spLocks noGrp="1"/>
+          </p:cNvSpPr>
+          <p:nvPr>
+            <p:ph type="body" sz="quarter" idx="14"/>
+          </p:nvPr>
+        </p:nvSpPr>
+        <p:spPr>
+          <a:xfrm>
+            <a:off x="18859500" y="6667501"/>
+            <a:ext cx="4949825" cy="6515099"/>
+          </a:xfrm>
+        </p:spPr>
+        <p:txBody>
+          <a:bodyPr/>
+          <a:lstStyle/>
+          <a:p>
+            <a:r>
+              <a:rPr lang="en-US" sz="6400" dirty="0">
+                <a:solidFill>
+                  <a:srgbClr val="EE5396"/>
+                </a:solidFill>
+              </a:rPr>
+              <a:t>4</a:t>
+            </a:r>
+          </a:p>
+          <a:p>
+            <a:br>
+              <a:rPr lang="en-US" dirty="0"/>
+            </a:br>
+            <a:r>
+              <a:rPr lang="en-US" b="1" dirty="0">
+                <a:solidFill>
+                  <a:schemeClr val="accent2"/>
+                </a:solidFill>
+              </a:rPr>
+              <a:t>Computer Chips</a:t>
+            </a:r>
+          </a:p>
+          <a:p>
+            <a:endParaRPr lang="en-US" b="1" dirty="0">
+              <a:solidFill>
+                <a:schemeClr val="accent2"/>
+              </a:solidFill>
+            </a:endParaRPr>
+          </a:p>
+          <a:p>
+            <a:pPr marL="457200" indent="-457200">
+              <a:buFontTx/>
+              <a:buChar char="-"/>
+            </a:pPr>
+            <a:r>
+              <a:rPr lang="en-US" dirty="0"/>
+              <a:t>How SC qubits work, </a:t>
+            </a:r>
+          </a:p>
+          <a:p>
+            <a:r>
+              <a:rPr lang="en-US" dirty="0"/>
+              <a:t>     </a:t>
+            </a:r>
+            <a:r>
+              <a:rPr lang="en-US" dirty="0" err="1"/>
+              <a:t>Qiskit</a:t>
+            </a:r>
+            <a:r>
+              <a:rPr lang="en-US" dirty="0"/>
+              <a:t> Channel, Zlatko’s talk,     </a:t>
+            </a:r>
+          </a:p>
+          <a:p>
+            <a:r>
+              <a:rPr lang="en-US" dirty="0"/>
+              <a:t>     Parts 1 and 2, </a:t>
+            </a:r>
+          </a:p>
+          <a:p>
+            <a:r>
+              <a:rPr lang="en-US" dirty="0"/>
+              <a:t>     Lectures 16-21, (~6 </a:t>
+            </a:r>
+            <a:r>
+              <a:rPr lang="en-US" dirty="0" err="1"/>
+              <a:t>hrs</a:t>
+            </a:r>
+            <a:r>
+              <a:rPr lang="en-US" dirty="0"/>
+              <a:t>)</a:t>
+            </a:r>
+          </a:p>
+          <a:p>
+            <a:pPr marL="457200" indent="-457200">
+              <a:buFontTx/>
+              <a:buChar char="-"/>
+            </a:pPr>
+            <a:endParaRPr lang="en-US" dirty="0"/>
+          </a:p>
+          <a:p>
+            <a:pPr marL="457200" indent="-457200">
+              <a:buFontTx/>
+              <a:buChar char="-"/>
+            </a:pPr>
+            <a:r>
+              <a:rPr lang="en-US" dirty="0"/>
+              <a:t>How QPUs and CPUs are made </a:t>
+            </a:r>
+          </a:p>
+          <a:p>
+            <a:pPr marL="457200" indent="-457200">
+              <a:buFontTx/>
+              <a:buChar char="-"/>
+            </a:pPr>
+            <a:endParaRPr lang="en-US" dirty="0"/>
+          </a:p>
+        </p:txBody>
+      </p:sp>
+      <p:sp>
+        <p:nvSpPr>
+          <p:cNvPr id="7" name="Footer Placeholder 6">
+            <a:extLst>
+              <a:ext uri="{FF2B5EF4-FFF2-40B4-BE49-F238E27FC236}">
+                <a16:creationId xmlns:a16="http://schemas.microsoft.com/office/drawing/2014/main" id="{6BAE6F33-C175-5EF2-42E5-8386FD36E878}"/>
+              </a:ext>
+            </a:extLst>
+          </p:cNvPr>
+          <p:cNvSpPr>
+            <a:spLocks noGrp="1"/>
+          </p:cNvSpPr>
+          <p:nvPr>
+            <p:ph type="ftr" sz="quarter" idx="15"/>
+          </p:nvPr>
+        </p:nvSpPr>
+        <p:spPr>
+          <a:xfrm>
+            <a:off x="576072" y="12801600"/>
+            <a:ext cx="4956176" cy="381000"/>
+          </a:xfrm>
+        </p:spPr>
+        <p:txBody>
+          <a:bodyPr/>
+          <a:lstStyle/>
+          <a:p>
+            <a:r>
+              <a:rPr lang="en-US" dirty="0" err="1"/>
+              <a:t>Qiskit</a:t>
+            </a:r>
+            <a:r>
+              <a:rPr lang="en-US" dirty="0"/>
+              <a:t> Fall Fest 2025</a:t>
+            </a:r>
+          </a:p>
+        </p:txBody>
+      </p:sp>
+      <p:pic>
+        <p:nvPicPr>
+          <p:cNvPr id="14" name="Picture 13">
+            <a:extLst>
+              <a:ext uri="{FF2B5EF4-FFF2-40B4-BE49-F238E27FC236}">
+                <a16:creationId xmlns:a16="http://schemas.microsoft.com/office/drawing/2014/main" id="{EB39F395-8B85-7448-124C-9811CE740583}"/>
+              </a:ext>
+            </a:extLst>
+          </p:cNvPr>
+          <p:cNvPicPr>
+            <a:picLocks noChangeAspect="1"/>
+          </p:cNvPicPr>
+          <p:nvPr/>
+        </p:nvPicPr>
+        <p:blipFill>
+          <a:blip r:embed="rId2">
+            <a:extLst>
+              <a:ext uri="{96DAC541-7B7A-43D3-8B79-37D633B846F1}">
+                <asvg:svgBlip xmlns:asvg="http://schemas.microsoft.com/office/drawing/2016/SVG/main" r:embed="rId3"/>
+              </a:ext>
+            </a:extLst>
+          </a:blip>
+          <a:srcRect/>
+          <a:stretch/>
+        </p:blipFill>
+        <p:spPr>
+          <a:xfrm>
+            <a:off x="21912263" y="532124"/>
+            <a:ext cx="1892300" cy="1892300"/>
+          </a:xfrm>
+          <a:prstGeom prst="rect">
+            <a:avLst/>
+          </a:prstGeom>
+        </p:spPr>
+      </p:pic>
+    </p:spTree>
+    <p:extLst>
+      <p:ext uri="{BB962C8B-B14F-4D97-AF65-F5344CB8AC3E}">
+        <p14:creationId xmlns:p14="http://schemas.microsoft.com/office/powerpoint/2010/main" val="1886029350"/>
+      </p:ext>
+    </p:extLst>
+  </p:cSld>
+  <p:clrMapOvr>
+    <a:masterClrMapping/>
+  </p:clrMapOvr>
+  <p:transition spd="med"/>
+</p:sld>
+</file>
+
+<file path=ppt/slides/slide11.xml><?xml version="1.0" encoding="utf-8"?>
+<p:sld xmlns:a="http://schemas.openxmlformats.org/drawingml/2006/main" xmlns:r="http://schemas.openxmlformats.org/officeDocument/2006/relationships" xmlns:p="http://schemas.openxmlformats.org/presentationml/2006/main">
+  <p:cSld>
+    <p:spTree>
+      <p:nvGrpSpPr>
+        <p:cNvPr id="1" name=""/>
+        <p:cNvGrpSpPr/>
+        <p:nvPr/>
+      </p:nvGrpSpPr>
+      <p:grpSpPr>
+        <a:xfrm>
+          <a:off x="0" y="0"/>
+          <a:ext cx="0" cy="0"/>
+          <a:chOff x="0" y="0"/>
+          <a:chExt cx="0" cy="0"/>
+        </a:xfrm>
+      </p:grpSpPr>
+      <p:sp>
+        <p:nvSpPr>
+          <p:cNvPr id="2" name="Title 1">
+            <a:extLst>
+              <a:ext uri="{FF2B5EF4-FFF2-40B4-BE49-F238E27FC236}">
+                <a16:creationId xmlns:a16="http://schemas.microsoft.com/office/drawing/2014/main" id="{D39052BC-A31A-3AFD-FA62-5B081B61CDCC}"/>
+              </a:ext>
+            </a:extLst>
+          </p:cNvPr>
+          <p:cNvSpPr>
+            <a:spLocks noGrp="1"/>
+          </p:cNvSpPr>
+          <p:nvPr>
+            <p:ph type="title"/>
+          </p:nvPr>
+        </p:nvSpPr>
+        <p:spPr/>
+        <p:txBody>
+          <a:bodyPr/>
+          <a:lstStyle/>
+          <a:p>
+            <a:r>
+              <a:rPr lang="en-US" sz="4400" dirty="0"/>
+              <a:t>Greek Alphabet</a:t>
+            </a:r>
+          </a:p>
+        </p:txBody>
+      </p:sp>
+      <p:sp>
+        <p:nvSpPr>
+          <p:cNvPr id="4" name="Text Placeholder 3">
+            <a:extLst>
+              <a:ext uri="{FF2B5EF4-FFF2-40B4-BE49-F238E27FC236}">
+                <a16:creationId xmlns:a16="http://schemas.microsoft.com/office/drawing/2014/main" id="{4D61F429-A819-1589-FBA7-B0AB71D7DF20}"/>
+              </a:ext>
+            </a:extLst>
+          </p:cNvPr>
+          <p:cNvSpPr>
+            <a:spLocks noGrp="1"/>
+          </p:cNvSpPr>
+          <p:nvPr>
+            <p:ph type="body" sz="quarter" idx="12"/>
+          </p:nvPr>
+        </p:nvSpPr>
+        <p:spPr/>
+        <p:txBody>
+          <a:bodyPr/>
+          <a:lstStyle/>
+          <a:p>
+            <a:r>
+              <a:rPr lang="en-US" b="1" dirty="0">
+                <a:solidFill>
+                  <a:schemeClr val="accent2"/>
+                </a:solidFill>
+              </a:rPr>
+              <a:t>Phi </a:t>
+            </a:r>
+            <a:r>
+              <a:rPr lang="en-US" dirty="0"/>
+              <a:t>and</a:t>
+            </a:r>
+            <a:r>
+              <a:rPr lang="en-US" b="1" dirty="0">
+                <a:solidFill>
+                  <a:schemeClr val="accent2"/>
+                </a:solidFill>
+              </a:rPr>
+              <a:t> Psi </a:t>
+            </a:r>
+            <a:r>
+              <a:rPr lang="en-US" dirty="0"/>
+              <a:t>are used a lot, also Alpha, Beta, Pi, and Theta, and, well, the others too!</a:t>
+            </a:r>
+          </a:p>
+          <a:p>
+            <a:endParaRPr lang="en-US" dirty="0"/>
+          </a:p>
+          <a:p>
+            <a:endParaRPr lang="en-US" dirty="0"/>
+          </a:p>
+          <a:p>
+            <a:endParaRPr lang="en-US" dirty="0"/>
+          </a:p>
+          <a:p>
+            <a:endParaRPr lang="en-US" dirty="0"/>
+          </a:p>
+          <a:p>
+            <a:endParaRPr lang="en-US" dirty="0"/>
+          </a:p>
+          <a:p>
+            <a:r>
+              <a:rPr lang="en-US" dirty="0"/>
+              <a:t>https://en.wikipedia.org/wiki/Greek_alphabet</a:t>
+            </a:r>
+          </a:p>
+          <a:p>
+            <a:endParaRPr lang="en-US" dirty="0"/>
+          </a:p>
+        </p:txBody>
+      </p:sp>
+      <p:sp>
+        <p:nvSpPr>
+          <p:cNvPr id="5" name="Text Placeholder 4">
+            <a:extLst>
+              <a:ext uri="{FF2B5EF4-FFF2-40B4-BE49-F238E27FC236}">
+                <a16:creationId xmlns:a16="http://schemas.microsoft.com/office/drawing/2014/main" id="{5D00F604-0481-AD77-9049-C690DC1A4437}"/>
+              </a:ext>
+            </a:extLst>
+          </p:cNvPr>
+          <p:cNvSpPr>
+            <a:spLocks noGrp="1"/>
+          </p:cNvSpPr>
+          <p:nvPr>
+            <p:ph type="body" sz="quarter" idx="13"/>
+          </p:nvPr>
+        </p:nvSpPr>
+        <p:spPr/>
+        <p:txBody>
+          <a:bodyPr/>
+          <a:lstStyle/>
+          <a:p>
+            <a:r>
+              <a:rPr lang="en-US" dirty="0"/>
+              <a:t>.</a:t>
+            </a:r>
+          </a:p>
+        </p:txBody>
+      </p:sp>
+      <p:sp>
+        <p:nvSpPr>
+          <p:cNvPr id="7" name="Picture Placeholder 10" descr="Place imagery here">
+            <a:extLst>
+              <a:ext uri="{FF2B5EF4-FFF2-40B4-BE49-F238E27FC236}">
+                <a16:creationId xmlns:a16="http://schemas.microsoft.com/office/drawing/2014/main" id="{77A7CC8A-F8D4-01B6-C299-15983476AE0E}"/>
+              </a:ext>
+            </a:extLst>
+          </p:cNvPr>
+          <p:cNvSpPr>
+            <a:spLocks noGrp="1"/>
+          </p:cNvSpPr>
+          <p:nvPr>
+            <p:ph type="pic" sz="quarter" idx="15" hasCustomPrompt="1"/>
+          </p:nvPr>
+        </p:nvSpPr>
+        <p:spPr>
+          <a:xfrm>
+            <a:off x="12763500" y="569913"/>
+            <a:ext cx="11049000" cy="12574587"/>
+          </a:xfrm>
+          <a:solidFill>
+            <a:schemeClr val="bg1"/>
+          </a:solidFill>
+        </p:spPr>
+        <p:txBody>
+          <a:bodyPr anchor="ctr"/>
+          <a:lstStyle>
+            <a:lvl1pPr algn="ctr">
+              <a:defRPr>
+                <a:solidFill>
+                  <a:schemeClr val="accent5"/>
+                </a:solidFill>
+              </a:defRPr>
+            </a:lvl1pPr>
+          </a:lstStyle>
+          <a:p>
+            <a:r>
+              <a:rPr lang="en-US"/>
+              <a:t>Place imagery here</a:t>
+            </a:r>
+          </a:p>
+        </p:txBody>
+      </p:sp>
+      <p:sp>
+        <p:nvSpPr>
+          <p:cNvPr id="6" name="Footer Placeholder 5">
+            <a:extLst>
+              <a:ext uri="{FF2B5EF4-FFF2-40B4-BE49-F238E27FC236}">
+                <a16:creationId xmlns:a16="http://schemas.microsoft.com/office/drawing/2014/main" id="{A1B75C6E-9935-614F-FDDF-F1F6697CD61D}"/>
+              </a:ext>
+            </a:extLst>
+          </p:cNvPr>
+          <p:cNvSpPr>
+            <a:spLocks noGrp="1"/>
+          </p:cNvSpPr>
+          <p:nvPr>
+            <p:ph type="ftr" sz="quarter" idx="14"/>
+          </p:nvPr>
+        </p:nvSpPr>
+        <p:spPr>
+          <a:xfrm>
+            <a:off x="576072" y="12801600"/>
+            <a:ext cx="4956176" cy="381000"/>
+          </a:xfrm>
+        </p:spPr>
+        <p:txBody>
+          <a:bodyPr/>
+          <a:lstStyle/>
+          <a:p>
+            <a:r>
+              <a:rPr lang="en-US"/>
+              <a:t>Qiskit Fall Fest 2025</a:t>
+            </a:r>
+            <a:endParaRPr lang="en-US" dirty="0"/>
+          </a:p>
+        </p:txBody>
+      </p:sp>
+      <p:pic>
+        <p:nvPicPr>
+          <p:cNvPr id="8" name="Picture 7">
+            <a:extLst>
+              <a:ext uri="{FF2B5EF4-FFF2-40B4-BE49-F238E27FC236}">
+                <a16:creationId xmlns:a16="http://schemas.microsoft.com/office/drawing/2014/main" id="{A0307671-4424-C753-1DC8-469EFBE61EE3}"/>
+              </a:ext>
+            </a:extLst>
+          </p:cNvPr>
+          <p:cNvPicPr>
+            <a:picLocks noChangeAspect="1"/>
+          </p:cNvPicPr>
+          <p:nvPr/>
+        </p:nvPicPr>
+        <p:blipFill>
+          <a:blip r:embed="rId2">
+            <a:extLst>
+              <a:ext uri="{96DAC541-7B7A-43D3-8B79-37D633B846F1}">
+                <asvg:svgBlip xmlns:asvg="http://schemas.microsoft.com/office/drawing/2016/SVG/main" r:embed="rId3"/>
+              </a:ext>
+            </a:extLst>
+          </a:blip>
+          <a:srcRect/>
+          <a:stretch/>
+        </p:blipFill>
+        <p:spPr>
+          <a:xfrm>
+            <a:off x="6682597" y="11237101"/>
+            <a:ext cx="1892302" cy="1892302"/>
+          </a:xfrm>
+          <a:prstGeom prst="rect">
+            <a:avLst/>
+          </a:prstGeom>
+        </p:spPr>
+      </p:pic>
+      <p:pic>
+        <p:nvPicPr>
+          <p:cNvPr id="9" name="Picture 8" descr="A close-up of a chart&#10;&#10;AI-generated content may be incorrect.">
+            <a:extLst>
+              <a:ext uri="{FF2B5EF4-FFF2-40B4-BE49-F238E27FC236}">
+                <a16:creationId xmlns:a16="http://schemas.microsoft.com/office/drawing/2014/main" id="{DFACAEC0-9B77-5E93-D60C-ABC3DE988C1A}"/>
+              </a:ext>
+            </a:extLst>
+          </p:cNvPr>
+          <p:cNvPicPr>
+            <a:picLocks noChangeAspect="1"/>
+          </p:cNvPicPr>
+          <p:nvPr/>
+        </p:nvPicPr>
+        <p:blipFill>
+          <a:blip r:embed="rId4"/>
+          <a:stretch>
+            <a:fillRect/>
+          </a:stretch>
+        </p:blipFill>
+        <p:spPr>
+          <a:xfrm>
+            <a:off x="12769850" y="821425"/>
+            <a:ext cx="11058334" cy="12071561"/>
+          </a:xfrm>
+          <a:prstGeom prst="rect">
+            <a:avLst/>
+          </a:prstGeom>
+        </p:spPr>
+      </p:pic>
+    </p:spTree>
+    <p:extLst>
+      <p:ext uri="{BB962C8B-B14F-4D97-AF65-F5344CB8AC3E}">
+        <p14:creationId xmlns:p14="http://schemas.microsoft.com/office/powerpoint/2010/main" val="579239392"/>
+      </p:ext>
+    </p:extLst>
+  </p:cSld>
+  <p:clrMapOvr>
+    <a:masterClrMapping/>
+  </p:clrMapOvr>
+  <p:transition spd="med"/>
+</p:sld>
+</file>
+
+<file path=ppt/slides/slide12.xml><?xml version="1.0" encoding="utf-8"?>
+<p:sld xmlns:a="http://schemas.openxmlformats.org/drawingml/2006/main" xmlns:r="http://schemas.openxmlformats.org/officeDocument/2006/relationships" xmlns:p="http://schemas.openxmlformats.org/presentationml/2006/main">
+  <p:cSld>
+    <p:spTree>
+      <p:nvGrpSpPr>
+        <p:cNvPr id="1" name="">
+          <a:extLst>
+            <a:ext uri="{FF2B5EF4-FFF2-40B4-BE49-F238E27FC236}">
+              <a16:creationId xmlns:a16="http://schemas.microsoft.com/office/drawing/2014/main" id="{77966EAA-4307-E39C-32C9-16E7F6DEBA8F}"/>
+            </a:ext>
+          </a:extLst>
+        </p:cNvPr>
+        <p:cNvGrpSpPr/>
+        <p:nvPr/>
+      </p:nvGrpSpPr>
+      <p:grpSpPr>
+        <a:xfrm>
+          <a:off x="0" y="0"/>
+          <a:ext cx="0" cy="0"/>
+          <a:chOff x="0" y="0"/>
+          <a:chExt cx="0" cy="0"/>
+        </a:xfrm>
+      </p:grpSpPr>
+      <p:sp>
+        <p:nvSpPr>
+          <p:cNvPr id="9" name="Text Placeholder 8">
+            <a:extLst>
+              <a:ext uri="{FF2B5EF4-FFF2-40B4-BE49-F238E27FC236}">
+                <a16:creationId xmlns:a16="http://schemas.microsoft.com/office/drawing/2014/main" id="{CF1CC963-BA9B-5D98-5EFE-46B9D4509B4F}"/>
+              </a:ext>
+            </a:extLst>
+          </p:cNvPr>
+          <p:cNvSpPr>
+            <a:spLocks noGrp="1"/>
+          </p:cNvSpPr>
+          <p:nvPr>
+            <p:ph type="body" sz="quarter" idx="21"/>
+          </p:nvPr>
+        </p:nvSpPr>
+        <p:spPr/>
+        <p:txBody>
+          <a:bodyPr/>
+          <a:lstStyle/>
+          <a:p>
+            <a:r>
+              <a:rPr lang="en-US" dirty="0"/>
+              <a:t>Software Development</a:t>
+            </a:r>
+          </a:p>
+        </p:txBody>
+      </p:sp>
+      <p:sp>
+        <p:nvSpPr>
+          <p:cNvPr id="2" name="Title 1">
+            <a:extLst>
+              <a:ext uri="{FF2B5EF4-FFF2-40B4-BE49-F238E27FC236}">
+                <a16:creationId xmlns:a16="http://schemas.microsoft.com/office/drawing/2014/main" id="{2081CE3A-9122-2A26-15BF-69912DDCB911}"/>
+              </a:ext>
+            </a:extLst>
+          </p:cNvPr>
+          <p:cNvSpPr>
+            <a:spLocks noGrp="1"/>
+          </p:cNvSpPr>
+          <p:nvPr>
+            <p:ph type="title"/>
+          </p:nvPr>
+        </p:nvSpPr>
+        <p:spPr>
+          <a:xfrm>
+            <a:off x="576072" y="1527048"/>
+            <a:ext cx="11044239" cy="2276856"/>
+          </a:xfrm>
+        </p:spPr>
+        <p:txBody>
+          <a:bodyPr/>
+          <a:lstStyle/>
+          <a:p>
+            <a:r>
+              <a:rPr lang="en-US" dirty="0"/>
+              <a:t>AI and Quantum Computers</a:t>
+            </a:r>
+          </a:p>
+        </p:txBody>
+      </p:sp>
+      <p:cxnSp>
+        <p:nvCxnSpPr>
+          <p:cNvPr id="11" name="Straight Connector 10" descr="Vertical column divider">
+            <a:extLst>
+              <a:ext uri="{FF2B5EF4-FFF2-40B4-BE49-F238E27FC236}">
+                <a16:creationId xmlns:a16="http://schemas.microsoft.com/office/drawing/2014/main" id="{293E34D8-F756-3A25-2F68-A47EB8E2ACFD}"/>
+              </a:ext>
+              <a:ext uri="{C183D7F6-B498-43B3-948B-1728B52AA6E4}">
+                <adec:decorative xmlns:adec="http://schemas.microsoft.com/office/drawing/2017/decorative" val="0"/>
+              </a:ext>
+            </a:extLst>
+          </p:cNvPr>
+          <p:cNvCxnSpPr/>
+          <p:nvPr/>
+        </p:nvCxnSpPr>
+        <p:spPr bwMode="auto">
+          <a:xfrm>
+            <a:off x="12192000" y="569913"/>
+            <a:ext cx="0" cy="11431587"/>
+          </a:xfrm>
+          <a:prstGeom prst="line">
+            <a:avLst/>
+          </a:prstGeom>
+          <a:ln w="12700">
+            <a:solidFill>
+              <a:schemeClr val="tx1"/>
+            </a:solidFill>
+            <a:headEnd type="none" w="med" len="med"/>
+            <a:tailEnd type="none" w="med" len="med"/>
+          </a:ln>
+          <a:effectLst/>
+        </p:spPr>
+        <p:style>
+          <a:lnRef idx="1">
+            <a:schemeClr val="dk1"/>
+          </a:lnRef>
+          <a:fillRef idx="0">
+            <a:schemeClr val="dk1"/>
+          </a:fillRef>
+          <a:effectRef idx="0">
+            <a:schemeClr val="dk1"/>
+          </a:effectRef>
+          <a:fontRef idx="minor">
+            <a:schemeClr val="tx1"/>
+          </a:fontRef>
+        </p:style>
+      </p:cxnSp>
+      <p:sp>
+        <p:nvSpPr>
+          <p:cNvPr id="4" name="Text Placeholder 3">
+            <a:extLst>
+              <a:ext uri="{FF2B5EF4-FFF2-40B4-BE49-F238E27FC236}">
+                <a16:creationId xmlns:a16="http://schemas.microsoft.com/office/drawing/2014/main" id="{91841D25-7EE9-8F35-7A51-EF0F802866C1}"/>
+              </a:ext>
+            </a:extLst>
+          </p:cNvPr>
+          <p:cNvSpPr>
+            <a:spLocks noGrp="1"/>
+          </p:cNvSpPr>
+          <p:nvPr>
+            <p:ph type="body" sz="quarter" idx="16"/>
+          </p:nvPr>
+        </p:nvSpPr>
+        <p:spPr/>
+        <p:txBody>
+          <a:bodyPr/>
+          <a:lstStyle/>
+          <a:p>
+            <a:r>
+              <a:rPr lang="en-US" dirty="0" err="1">
+                <a:solidFill>
+                  <a:srgbClr val="8A3FFC"/>
+                </a:solidFill>
+              </a:rPr>
+              <a:t>Qiskit</a:t>
+            </a:r>
+            <a:r>
+              <a:rPr lang="en-US" dirty="0">
+                <a:solidFill>
+                  <a:srgbClr val="8A3FFC"/>
+                </a:solidFill>
+              </a:rPr>
+              <a:t> Code Assistant</a:t>
+            </a:r>
+          </a:p>
+          <a:p>
+            <a:endParaRPr lang="en-US" dirty="0"/>
+          </a:p>
+          <a:p>
+            <a:pPr marL="457200" indent="-457200">
+              <a:buFontTx/>
+              <a:buChar char="-"/>
+            </a:pPr>
+            <a:r>
+              <a:rPr lang="en-US" dirty="0"/>
+              <a:t>IBM Quantum has one</a:t>
+            </a:r>
+          </a:p>
+          <a:p>
+            <a:pPr marL="457200" indent="-457200">
+              <a:buFontTx/>
+              <a:buChar char="-"/>
+            </a:pPr>
+            <a:r>
+              <a:rPr lang="en-US" dirty="0"/>
+              <a:t>Available via a Premium Plan</a:t>
+            </a:r>
+          </a:p>
+          <a:p>
+            <a:pPr marL="457200" indent="-457200">
+              <a:buFontTx/>
+              <a:buChar char="-"/>
+            </a:pPr>
+            <a:r>
+              <a:rPr lang="en-US" dirty="0"/>
+              <a:t>Designed to create </a:t>
+            </a:r>
+            <a:r>
+              <a:rPr lang="en-US" dirty="0" err="1"/>
+              <a:t>Qiskit</a:t>
+            </a:r>
+            <a:r>
+              <a:rPr lang="en-US" dirty="0"/>
+              <a:t> 2 code</a:t>
+            </a:r>
+          </a:p>
+          <a:p>
+            <a:pPr marL="457200" indent="-457200">
+              <a:buFontTx/>
+              <a:buChar char="-"/>
+            </a:pPr>
+            <a:r>
+              <a:rPr lang="en-US" dirty="0"/>
+              <a:t>https://quantum.cloud.ibm.com/docs/en/guides/qiskit-code-assistant</a:t>
+            </a:r>
+          </a:p>
+        </p:txBody>
+      </p:sp>
+      <p:cxnSp>
+        <p:nvCxnSpPr>
+          <p:cNvPr id="12" name="Straight Connector 11" descr="Vertical column divider">
+            <a:extLst>
+              <a:ext uri="{FF2B5EF4-FFF2-40B4-BE49-F238E27FC236}">
+                <a16:creationId xmlns:a16="http://schemas.microsoft.com/office/drawing/2014/main" id="{BC628E82-73DC-D874-316F-EF53FC92206C}"/>
+              </a:ext>
+              <a:ext uri="{C183D7F6-B498-43B3-948B-1728B52AA6E4}">
+                <adec:decorative xmlns:adec="http://schemas.microsoft.com/office/drawing/2017/decorative" val="0"/>
+              </a:ext>
+            </a:extLst>
+          </p:cNvPr>
+          <p:cNvCxnSpPr/>
+          <p:nvPr/>
+        </p:nvCxnSpPr>
+        <p:spPr bwMode="auto">
+          <a:xfrm>
+            <a:off x="18288000" y="569913"/>
+            <a:ext cx="0" cy="11431587"/>
+          </a:xfrm>
+          <a:prstGeom prst="line">
+            <a:avLst/>
+          </a:prstGeom>
+          <a:ln w="12700">
+            <a:solidFill>
+              <a:schemeClr val="tx1"/>
+            </a:solidFill>
+            <a:headEnd type="none" w="med" len="med"/>
+            <a:tailEnd type="none" w="med" len="med"/>
+          </a:ln>
+          <a:effectLst/>
+        </p:spPr>
+        <p:style>
+          <a:lnRef idx="1">
+            <a:schemeClr val="dk1"/>
+          </a:lnRef>
+          <a:fillRef idx="0">
+            <a:schemeClr val="dk1"/>
+          </a:fillRef>
+          <a:effectRef idx="0">
+            <a:schemeClr val="dk1"/>
+          </a:effectRef>
+          <a:fontRef idx="minor">
+            <a:schemeClr val="tx1"/>
+          </a:fontRef>
+        </p:style>
+      </p:cxnSp>
+      <p:sp>
+        <p:nvSpPr>
+          <p:cNvPr id="5" name="Text Placeholder 4">
+            <a:extLst>
+              <a:ext uri="{FF2B5EF4-FFF2-40B4-BE49-F238E27FC236}">
+                <a16:creationId xmlns:a16="http://schemas.microsoft.com/office/drawing/2014/main" id="{C820CC36-4760-4097-72F9-C8AC9926C4A8}"/>
+              </a:ext>
+            </a:extLst>
+          </p:cNvPr>
+          <p:cNvSpPr>
+            <a:spLocks noGrp="1"/>
+          </p:cNvSpPr>
+          <p:nvPr>
+            <p:ph type="body" sz="quarter" idx="17"/>
+          </p:nvPr>
+        </p:nvSpPr>
+        <p:spPr/>
+        <p:txBody>
+          <a:bodyPr/>
+          <a:lstStyle/>
+          <a:p>
+            <a:r>
+              <a:rPr lang="en-US" dirty="0">
+                <a:solidFill>
+                  <a:srgbClr val="8A3FFC"/>
+                </a:solidFill>
+              </a:rPr>
+              <a:t>AI Software Survey</a:t>
+            </a:r>
+          </a:p>
+          <a:p>
+            <a:endParaRPr lang="en-US" dirty="0"/>
+          </a:p>
+          <a:p>
+            <a:pPr marL="457200" indent="-457200">
+              <a:buFontTx/>
+              <a:buChar char="-"/>
+            </a:pPr>
+            <a:r>
+              <a:rPr lang="en-US" dirty="0"/>
+              <a:t>O’Reilly Tech Trends Report (from Jan 6 ‘25: based on ‘24, ‘23)</a:t>
+            </a:r>
+          </a:p>
+          <a:p>
+            <a:pPr marL="457200" indent="-457200">
+              <a:buFontTx/>
+              <a:buChar char="-"/>
+            </a:pPr>
+            <a:r>
+              <a:rPr lang="en-US" dirty="0"/>
+              <a:t>Look for TensorFlow </a:t>
+            </a:r>
+          </a:p>
+          <a:p>
+            <a:endParaRPr lang="en-US" dirty="0"/>
+          </a:p>
+          <a:p>
+            <a:pPr marL="457200" indent="-457200">
+              <a:buFontTx/>
+              <a:buChar char="-"/>
+            </a:pPr>
+            <a:r>
+              <a:rPr lang="en-US" dirty="0"/>
+              <a:t>https://www.oreilly.com/pub/pr/3465</a:t>
+            </a:r>
+          </a:p>
+          <a:p>
+            <a:endParaRPr lang="en-US" dirty="0"/>
+          </a:p>
+        </p:txBody>
+      </p:sp>
+      <p:cxnSp>
+        <p:nvCxnSpPr>
+          <p:cNvPr id="10" name="Straight Connector 9" descr="Horizontal row divider">
+            <a:extLst>
+              <a:ext uri="{FF2B5EF4-FFF2-40B4-BE49-F238E27FC236}">
+                <a16:creationId xmlns:a16="http://schemas.microsoft.com/office/drawing/2014/main" id="{273380DE-F433-958C-6706-072ACA2E1C63}"/>
+              </a:ext>
+              <a:ext uri="{C183D7F6-B498-43B3-948B-1728B52AA6E4}">
+                <adec:decorative xmlns:adec="http://schemas.microsoft.com/office/drawing/2017/decorative" val="0"/>
+              </a:ext>
+            </a:extLst>
+          </p:cNvPr>
+          <p:cNvCxnSpPr/>
+          <p:nvPr/>
+        </p:nvCxnSpPr>
+        <p:spPr bwMode="auto">
+          <a:xfrm>
+            <a:off x="12192000" y="6096000"/>
+            <a:ext cx="11622024" cy="0"/>
+          </a:xfrm>
+          <a:prstGeom prst="line">
+            <a:avLst/>
+          </a:prstGeom>
+          <a:ln w="12700">
+            <a:solidFill>
+              <a:schemeClr val="tx1"/>
+            </a:solidFill>
+            <a:headEnd type="none" w="med" len="med"/>
+            <a:tailEnd type="none" w="med" len="med"/>
+          </a:ln>
+          <a:effectLst/>
+        </p:spPr>
+        <p:style>
+          <a:lnRef idx="1">
+            <a:schemeClr val="dk1"/>
+          </a:lnRef>
+          <a:fillRef idx="0">
+            <a:schemeClr val="dk1"/>
+          </a:fillRef>
+          <a:effectRef idx="0">
+            <a:schemeClr val="dk1"/>
+          </a:effectRef>
+          <a:fontRef idx="minor">
+            <a:schemeClr val="tx1"/>
+          </a:fontRef>
+        </p:style>
+      </p:cxnSp>
+      <p:sp>
+        <p:nvSpPr>
+          <p:cNvPr id="6" name="Text Placeholder 5">
+            <a:extLst>
+              <a:ext uri="{FF2B5EF4-FFF2-40B4-BE49-F238E27FC236}">
+                <a16:creationId xmlns:a16="http://schemas.microsoft.com/office/drawing/2014/main" id="{33B2DAA9-CBE9-FB81-2F5D-B7601029E55D}"/>
+              </a:ext>
+            </a:extLst>
+          </p:cNvPr>
+          <p:cNvSpPr>
+            <a:spLocks noGrp="1"/>
+          </p:cNvSpPr>
+          <p:nvPr>
+            <p:ph type="body" sz="quarter" idx="18"/>
+          </p:nvPr>
+        </p:nvSpPr>
+        <p:spPr>
+          <a:xfrm>
+            <a:off x="12763500" y="6667499"/>
+            <a:ext cx="4953000" cy="5981699"/>
+          </a:xfrm>
+        </p:spPr>
+        <p:txBody>
+          <a:bodyPr/>
+          <a:lstStyle/>
+          <a:p>
+            <a:r>
+              <a:rPr lang="en-US" dirty="0">
+                <a:solidFill>
+                  <a:srgbClr val="8A3FFC"/>
+                </a:solidFill>
+              </a:rPr>
+              <a:t>Quantum Open-Source Software Survey</a:t>
+            </a:r>
+          </a:p>
+          <a:p>
+            <a:endParaRPr lang="en-US" dirty="0"/>
+          </a:p>
+          <a:p>
+            <a:pPr marL="457200" indent="-457200">
+              <a:buFontTx/>
+              <a:buChar char="-"/>
+            </a:pPr>
+            <a:r>
+              <a:rPr lang="en-US" dirty="0"/>
+              <a:t>See the Unitary Foundation’s annual survey </a:t>
+            </a:r>
+          </a:p>
+          <a:p>
+            <a:endParaRPr lang="en-US" b="1" dirty="0"/>
+          </a:p>
+          <a:p>
+            <a:r>
+              <a:rPr lang="en-US" b="1" dirty="0"/>
+              <a:t>https://unitaryfoundation.github.io/survey-2024/</a:t>
+            </a:r>
+          </a:p>
+          <a:p>
+            <a:pPr marL="457200" indent="-457200">
+              <a:buFontTx/>
+              <a:buChar char="-"/>
+            </a:pPr>
+            <a:endParaRPr lang="en-US" dirty="0"/>
+          </a:p>
+          <a:p>
+            <a:pPr marL="457200" indent="-457200">
+              <a:buFontTx/>
+              <a:buChar char="-"/>
+            </a:pPr>
+            <a:r>
+              <a:rPr lang="en-US" dirty="0"/>
+              <a:t>Look for TensorFlow Quantum in the results</a:t>
+            </a:r>
+          </a:p>
+          <a:p>
+            <a:pPr marL="457200" indent="-457200">
+              <a:buFontTx/>
+              <a:buChar char="-"/>
+            </a:pPr>
+            <a:r>
+              <a:rPr lang="en-US" dirty="0"/>
+              <a:t>Look for CUDA-Q</a:t>
+            </a:r>
+          </a:p>
+          <a:p>
+            <a:pPr marL="457200" indent="-457200">
+              <a:buFontTx/>
+              <a:buChar char="-"/>
+            </a:pPr>
+            <a:endParaRPr lang="en-US" dirty="0"/>
+          </a:p>
+        </p:txBody>
+      </p:sp>
+      <p:sp>
+        <p:nvSpPr>
+          <p:cNvPr id="7" name="Text Placeholder 6">
+            <a:extLst>
+              <a:ext uri="{FF2B5EF4-FFF2-40B4-BE49-F238E27FC236}">
+                <a16:creationId xmlns:a16="http://schemas.microsoft.com/office/drawing/2014/main" id="{FB5CD3D3-5184-CAB7-B8A5-7659AA0E5E37}"/>
+              </a:ext>
+            </a:extLst>
+          </p:cNvPr>
+          <p:cNvSpPr>
+            <a:spLocks noGrp="1"/>
+          </p:cNvSpPr>
+          <p:nvPr>
+            <p:ph type="body" sz="quarter" idx="19"/>
+          </p:nvPr>
+        </p:nvSpPr>
+        <p:spPr>
+          <a:xfrm>
+            <a:off x="18859500" y="6667499"/>
+            <a:ext cx="5280660" cy="6478587"/>
+          </a:xfrm>
+        </p:spPr>
+        <p:txBody>
+          <a:bodyPr/>
+          <a:lstStyle/>
+          <a:p>
+            <a:r>
+              <a:rPr lang="en-US" dirty="0">
+                <a:solidFill>
+                  <a:srgbClr val="8A3FFC"/>
+                </a:solidFill>
+              </a:rPr>
+              <a:t>AI + Q, Q + AI</a:t>
+            </a:r>
+          </a:p>
+          <a:p>
+            <a:r>
+              <a:rPr lang="en-US" dirty="0">
+                <a:solidFill>
+                  <a:srgbClr val="8A3FFC"/>
+                </a:solidFill>
+              </a:rPr>
+              <a:t> </a:t>
+            </a:r>
+            <a:endParaRPr lang="en-US" dirty="0"/>
+          </a:p>
+          <a:p>
+            <a:pPr marL="457200" indent="-457200">
+              <a:buFontTx/>
+              <a:buChar char="-"/>
+            </a:pPr>
+            <a:r>
+              <a:rPr lang="en-US" dirty="0"/>
+              <a:t>AI helping Quantum</a:t>
+            </a:r>
+          </a:p>
+          <a:p>
+            <a:pPr marL="457200" indent="-457200">
+              <a:buFontTx/>
+              <a:buChar char="-"/>
+            </a:pPr>
+            <a:r>
+              <a:rPr lang="en-US" dirty="0"/>
+              <a:t>Quantum helping AI</a:t>
+            </a:r>
+          </a:p>
+          <a:p>
+            <a:pPr marL="457200" indent="-457200">
+              <a:buFontTx/>
+              <a:buChar char="-"/>
+            </a:pPr>
+            <a:r>
+              <a:rPr lang="en-US" dirty="0"/>
+              <a:t>Conference Q+AI</a:t>
+            </a:r>
+          </a:p>
+          <a:p>
+            <a:pPr marL="457200" indent="-457200">
+              <a:buFontTx/>
+              <a:buChar char="-"/>
+            </a:pPr>
+            <a:r>
+              <a:rPr lang="en-US" dirty="0"/>
+              <a:t>Company: e.g. Sandbox AQ</a:t>
+            </a:r>
+          </a:p>
+          <a:p>
+            <a:pPr marL="457200" indent="-457200">
+              <a:buFontTx/>
+              <a:buChar char="-"/>
+            </a:pPr>
+            <a:endParaRPr lang="en-US" dirty="0"/>
+          </a:p>
+          <a:p>
+            <a:pPr marL="457200" indent="-457200">
+              <a:buFontTx/>
+              <a:buChar char="-"/>
+            </a:pPr>
+            <a:r>
+              <a:rPr lang="en-US" dirty="0"/>
+              <a:t>IEEE Quantum Week 2025, </a:t>
+            </a:r>
+            <a:r>
+              <a:rPr lang="en-US" i="1" dirty="0"/>
+              <a:t>can still register for on-demand content (~$200) </a:t>
+            </a:r>
+          </a:p>
+          <a:p>
+            <a:endParaRPr lang="en-US" dirty="0"/>
+          </a:p>
+          <a:p>
+            <a:pPr marL="457200" indent="-457200">
+              <a:buFontTx/>
+              <a:buChar char="-"/>
+            </a:pPr>
+            <a:r>
+              <a:rPr lang="en-US" dirty="0"/>
+              <a:t>https://web.cvent.com/event/3f8c3754-761c-4db5-a3f5-20003fcc785c/summary</a:t>
+            </a:r>
+          </a:p>
+          <a:p>
+            <a:endParaRPr lang="en-US" dirty="0"/>
+          </a:p>
+        </p:txBody>
+      </p:sp>
+      <p:sp>
+        <p:nvSpPr>
+          <p:cNvPr id="8" name="Footer Placeholder 7">
+            <a:extLst>
+              <a:ext uri="{FF2B5EF4-FFF2-40B4-BE49-F238E27FC236}">
+                <a16:creationId xmlns:a16="http://schemas.microsoft.com/office/drawing/2014/main" id="{BE085E42-FF5D-D2A4-81C1-C83A6A419B20}"/>
+              </a:ext>
+            </a:extLst>
+          </p:cNvPr>
+          <p:cNvSpPr>
+            <a:spLocks noGrp="1"/>
+          </p:cNvSpPr>
+          <p:nvPr>
+            <p:ph type="ftr" sz="quarter" idx="20"/>
+          </p:nvPr>
+        </p:nvSpPr>
+        <p:spPr>
+          <a:xfrm>
+            <a:off x="576072" y="12801600"/>
+            <a:ext cx="4956176" cy="381000"/>
+          </a:xfrm>
+        </p:spPr>
+        <p:txBody>
+          <a:bodyPr/>
+          <a:lstStyle/>
+          <a:p>
+            <a:r>
+              <a:rPr lang="en-US"/>
+              <a:t>Qiskit Fall Fest 2025</a:t>
+            </a:r>
+            <a:endParaRPr lang="en-US" dirty="0"/>
+          </a:p>
+        </p:txBody>
+      </p:sp>
+      <p:sp>
+        <p:nvSpPr>
+          <p:cNvPr id="14" name="TextBox 13">
+            <a:extLst>
+              <a:ext uri="{FF2B5EF4-FFF2-40B4-BE49-F238E27FC236}">
+                <a16:creationId xmlns:a16="http://schemas.microsoft.com/office/drawing/2014/main" id="{7CFCBCCB-5166-EF19-E01D-6149687A197F}"/>
+              </a:ext>
+            </a:extLst>
+          </p:cNvPr>
+          <p:cNvSpPr txBox="1"/>
+          <p:nvPr/>
+        </p:nvSpPr>
+        <p:spPr>
+          <a:xfrm>
+            <a:off x="26273760" y="12649200"/>
+            <a:ext cx="0" cy="0"/>
+          </a:xfrm>
+          <a:prstGeom prst="rect">
+            <a:avLst/>
+          </a:prstGeom>
+          <a:ln w="12700">
+            <a:miter lim="400000"/>
+          </a:ln>
+          <a:extLst>
+            <a:ext uri="{C572A759-6A51-4108-AA02-DFA0A04FC94B}">
+              <ma14:wrappingTextBoxFlag xmlns:ma14="http://schemas.microsoft.com/office/mac/drawingml/2011/main" xmlns:a14="http://schemas.microsoft.com/office/drawing/2010/main" xmlns:m="http://schemas.openxmlformats.org/officeDocument/2006/math" xmlns="" val="1"/>
+            </a:ext>
+          </a:extLst>
+        </p:spPr>
+        <p:txBody>
+          <a:bodyPr wrap="none" lIns="0" tIns="0" rIns="0" bIns="0" rtlCol="0">
+            <a:noAutofit/>
+          </a:bodyPr>
+          <a:lstStyle/>
+          <a:p>
+            <a:pPr marL="444465" indent="-446749" algn="l" defTabSz="2438400">
+              <a:spcBef>
+                <a:spcPts val="2900"/>
+              </a:spcBef>
+              <a:buSzPct val="100000"/>
+              <a:buFontTx/>
+              <a:buChar char="–"/>
+            </a:pPr>
+            <a:endParaRPr lang="en-US" kern="0" dirty="0">
+              <a:solidFill>
+                <a:srgbClr val="000000"/>
+              </a:solidFill>
+              <a:ea typeface="+mj-ea"/>
+              <a:cs typeface="+mj-cs"/>
+              <a:sym typeface="IBM Plex Sans Light"/>
+            </a:endParaRPr>
+          </a:p>
+        </p:txBody>
+      </p:sp>
+      <p:pic>
+        <p:nvPicPr>
+          <p:cNvPr id="16" name="Picture 15">
+            <a:extLst>
+              <a:ext uri="{FF2B5EF4-FFF2-40B4-BE49-F238E27FC236}">
+                <a16:creationId xmlns:a16="http://schemas.microsoft.com/office/drawing/2014/main" id="{63766459-86B1-A0B0-8A95-BAC810E734F8}"/>
+              </a:ext>
+            </a:extLst>
+          </p:cNvPr>
+          <p:cNvPicPr>
+            <a:picLocks noChangeAspect="1"/>
+          </p:cNvPicPr>
+          <p:nvPr/>
+        </p:nvPicPr>
+        <p:blipFill>
+          <a:blip r:embed="rId2">
+            <a:extLst>
+              <a:ext uri="{96DAC541-7B7A-43D3-8B79-37D633B846F1}">
+                <asvg:svgBlip xmlns:asvg="http://schemas.microsoft.com/office/drawing/2016/SVG/main" r:embed="rId3"/>
+              </a:ext>
+            </a:extLst>
+          </a:blip>
+          <a:srcRect/>
+          <a:stretch/>
+        </p:blipFill>
+        <p:spPr>
+          <a:xfrm>
+            <a:off x="574675" y="10109200"/>
+            <a:ext cx="1892300" cy="1892300"/>
+          </a:xfrm>
+          <a:prstGeom prst="rect">
+            <a:avLst/>
+          </a:prstGeom>
+        </p:spPr>
+      </p:pic>
+    </p:spTree>
+    <p:extLst>
+      <p:ext uri="{BB962C8B-B14F-4D97-AF65-F5344CB8AC3E}">
+        <p14:creationId xmlns:p14="http://schemas.microsoft.com/office/powerpoint/2010/main" val="1050914756"/>
+      </p:ext>
+    </p:extLst>
+  </p:cSld>
+  <p:clrMapOvr>
+    <a:masterClrMapping/>
+  </p:clrMapOvr>
+  <p:transition spd="med"/>
+</p:sld>
+</file>
+
+<file path=ppt/slides/slide13.xml><?xml version="1.0" encoding="utf-8"?>
 <p:sld xmlns:a="http://schemas.openxmlformats.org/drawingml/2006/main" xmlns:r="http://schemas.openxmlformats.org/officeDocument/2006/relationships" xmlns:p="http://schemas.openxmlformats.org/presentationml/2006/main">
   <p:cSld>
     <p:spTree>
@@ -26897,7 +28649,7 @@
 </p:sld>
 </file>
 
-<file path=ppt/slides/slide11.xml><?xml version="1.0" encoding="utf-8"?>
+<file path=ppt/slides/slide14.xml><?xml version="1.0" encoding="utf-8"?>
 <p:sld xmlns:a="http://schemas.openxmlformats.org/drawingml/2006/main" xmlns:r="http://schemas.openxmlformats.org/officeDocument/2006/relationships" xmlns:p="http://schemas.openxmlformats.org/presentationml/2006/main">
   <p:cSld>
     <p:spTree>
@@ -27294,7 +29046,7 @@
 </p:sld>
 </file>
 
-<file path=ppt/slides/slide12.xml><?xml version="1.0" encoding="utf-8"?>
+<file path=ppt/slides/slide15.xml><?xml version="1.0" encoding="utf-8"?>
 <p:sld xmlns:a="http://schemas.openxmlformats.org/drawingml/2006/main" xmlns:r="http://schemas.openxmlformats.org/officeDocument/2006/relationships" xmlns:p="http://schemas.openxmlformats.org/presentationml/2006/main">
   <p:cSld>
     <p:spTree>
@@ -28104,7 +29856,7 @@
           </a:ln>
           <a:extLst>
             <a:ext uri="{C572A759-6A51-4108-AA02-DFA0A04FC94B}">
-              <ma14:wrappingTextBoxFlag xmlns="" xmlns:m="http://schemas.openxmlformats.org/officeDocument/2006/math" xmlns:a14="http://schemas.microsoft.com/office/drawing/2010/main" xmlns:ma14="http://schemas.microsoft.com/office/mac/drawingml/2011/main" val="1"/>
+              <ma14:wrappingTextBoxFlag xmlns:ma14="http://schemas.microsoft.com/office/mac/drawingml/2011/main" xmlns:a14="http://schemas.microsoft.com/office/drawing/2010/main" xmlns:m="http://schemas.openxmlformats.org/officeDocument/2006/math" xmlns="" val="1"/>
             </a:ext>
           </a:extLst>
         </p:spPr>
@@ -28152,6 +29904,647 @@
           <a:xfrm>
             <a:off x="12915900" y="728473"/>
             <a:ext cx="4953000" cy="612648"/>
+          </a:xfrm>
+          <a:prstGeom prst="rect">
+            <a:avLst/>
+          </a:prstGeom>
+          <a:ln w="12700">
+            <a:miter lim="400000"/>
+          </a:ln>
+          <a:extLst>
+            <a:ext uri="{C572A759-6A51-4108-AA02-DFA0A04FC94B}">
+              <ma14:wrappingTextBoxFlag xmlns="" xmlns:m="http://schemas.openxmlformats.org/officeDocument/2006/math" xmlns:a14="http://schemas.microsoft.com/office/drawing/2010/main" xmlns:ma14="http://schemas.microsoft.com/office/mac/drawingml/2011/main" val="1"/>
+            </a:ext>
+          </a:extLst>
+        </p:spPr>
+        <p:txBody>
+          <a:bodyPr lIns="0" tIns="0" rIns="0" bIns="0"/>
+          <a:lstStyle>
+            <a:lvl1pPr marL="0" marR="0" indent="0" algn="l" defTabSz="2438400" rtl="0" eaLnBrk="1" latinLnBrk="0" hangingPunct="1">
+              <a:lnSpc>
+                <a:spcPct val="110000"/>
+              </a:lnSpc>
+              <a:spcBef>
+                <a:spcPts val="0"/>
+              </a:spcBef>
+              <a:spcAft>
+                <a:spcPts val="0"/>
+              </a:spcAft>
+              <a:buClrTx/>
+              <a:buSzTx/>
+              <a:buFontTx/>
+              <a:buNone/>
+              <a:tabLst/>
+              <a:defRPr sz="2800" b="0" i="0" u="none" strike="noStrike" cap="none" spc="0" baseline="0">
+                <a:solidFill>
+                  <a:schemeClr val="tx1"/>
+                </a:solidFill>
+                <a:uFillTx/>
+                <a:latin typeface="+mj-lt"/>
+                <a:ea typeface="+mj-ea"/>
+                <a:cs typeface="+mj-cs"/>
+                <a:sym typeface="IBM Plex Sans Light"/>
+              </a:defRPr>
+            </a:lvl1pPr>
+            <a:lvl2pPr marL="256032" marR="0" indent="-256032" algn="l" defTabSz="2438400" rtl="0" eaLnBrk="1" latinLnBrk="0" hangingPunct="1">
+              <a:lnSpc>
+                <a:spcPct val="110000"/>
+              </a:lnSpc>
+              <a:spcBef>
+                <a:spcPts val="0"/>
+              </a:spcBef>
+              <a:spcAft>
+                <a:spcPts val="0"/>
+              </a:spcAft>
+              <a:buClrTx/>
+              <a:buSzPct val="100000"/>
+              <a:buFontTx/>
+              <a:buChar char="–"/>
+              <a:tabLst/>
+              <a:defRPr sz="2800" b="0" i="0" u="none" strike="noStrike" cap="none" spc="0" baseline="0">
+                <a:solidFill>
+                  <a:schemeClr val="tx1"/>
+                </a:solidFill>
+                <a:uFillTx/>
+                <a:latin typeface="+mj-lt"/>
+                <a:ea typeface="+mj-ea"/>
+                <a:cs typeface="+mj-cs"/>
+                <a:sym typeface="IBM Plex Sans Light"/>
+              </a:defRPr>
+            </a:lvl2pPr>
+            <a:lvl3pPr marL="512064" marR="0" indent="-256032" algn="l" defTabSz="2438400" rtl="0" eaLnBrk="1" latinLnBrk="0" hangingPunct="1">
+              <a:lnSpc>
+                <a:spcPct val="110000"/>
+              </a:lnSpc>
+              <a:spcBef>
+                <a:spcPts val="0"/>
+              </a:spcBef>
+              <a:spcAft>
+                <a:spcPts val="0"/>
+              </a:spcAft>
+              <a:buClrTx/>
+              <a:buSzPct val="100000"/>
+              <a:buFontTx/>
+              <a:buChar char="•"/>
+              <a:tabLst/>
+              <a:defRPr sz="2800" b="0" i="0" u="none" strike="noStrike" cap="none" spc="0" baseline="0">
+                <a:solidFill>
+                  <a:schemeClr val="tx1"/>
+                </a:solidFill>
+                <a:uFillTx/>
+                <a:latin typeface="+mj-lt"/>
+                <a:ea typeface="+mj-ea"/>
+                <a:cs typeface="+mj-cs"/>
+                <a:sym typeface="IBM Plex Sans Light"/>
+              </a:defRPr>
+            </a:lvl3pPr>
+            <a:lvl4pPr marL="768096" marR="0" indent="-256032" algn="l" defTabSz="2438400" rtl="0" eaLnBrk="1" latinLnBrk="0" hangingPunct="1">
+              <a:lnSpc>
+                <a:spcPct val="110000"/>
+              </a:lnSpc>
+              <a:spcBef>
+                <a:spcPts val="0"/>
+              </a:spcBef>
+              <a:spcAft>
+                <a:spcPts val="0"/>
+              </a:spcAft>
+              <a:buClrTx/>
+              <a:buSzPct val="100000"/>
+              <a:buFontTx/>
+              <a:buChar char="–"/>
+              <a:tabLst/>
+              <a:defRPr sz="2800" b="0" i="0" u="none" strike="noStrike" cap="none" spc="0" baseline="0">
+                <a:solidFill>
+                  <a:schemeClr val="tx1"/>
+                </a:solidFill>
+                <a:uFillTx/>
+                <a:latin typeface="+mj-lt"/>
+                <a:ea typeface="+mj-ea"/>
+                <a:cs typeface="+mj-cs"/>
+                <a:sym typeface="IBM Plex Sans Light"/>
+              </a:defRPr>
+            </a:lvl4pPr>
+            <a:lvl5pPr marL="1143000" marR="0" indent="-457200" algn="l" defTabSz="2438400" rtl="0" eaLnBrk="1" latinLnBrk="0" hangingPunct="1">
+              <a:lnSpc>
+                <a:spcPct val="110000"/>
+              </a:lnSpc>
+              <a:spcBef>
+                <a:spcPts val="0"/>
+              </a:spcBef>
+              <a:spcAft>
+                <a:spcPts val="0"/>
+              </a:spcAft>
+              <a:buClrTx/>
+              <a:buSzPct val="100000"/>
+              <a:buFont typeface="Arial" panose="020B0604020202020204" pitchFamily="34" charset="0"/>
+              <a:buChar char="•"/>
+              <a:tabLst/>
+              <a:defRPr sz="2800" b="0" i="0" u="none" strike="noStrike" cap="none" spc="0" baseline="0">
+                <a:solidFill>
+                  <a:schemeClr val="tx1"/>
+                </a:solidFill>
+                <a:uFillTx/>
+                <a:latin typeface="+mj-lt"/>
+                <a:ea typeface="+mj-ea"/>
+                <a:cs typeface="+mj-cs"/>
+                <a:sym typeface="IBM Plex Sans Light"/>
+              </a:defRPr>
+            </a:lvl5pPr>
+            <a:lvl6pPr marL="1843060" marR="0" indent="-389009" algn="l" defTabSz="2438400" rtl="0" eaLnBrk="1" latinLnBrk="0" hangingPunct="1">
+              <a:lnSpc>
+                <a:spcPct val="100000"/>
+              </a:lnSpc>
+              <a:spcBef>
+                <a:spcPts val="2900"/>
+              </a:spcBef>
+              <a:spcAft>
+                <a:spcPts val="0"/>
+              </a:spcAft>
+              <a:buClrTx/>
+              <a:buSzPct val="100000"/>
+              <a:buFontTx/>
+              <a:buChar char="»"/>
+              <a:tabLst/>
+              <a:defRPr sz="3600" b="0" i="0" u="none" strike="noStrike" cap="none" spc="0" baseline="0">
+                <a:solidFill>
+                  <a:srgbClr val="000000"/>
+                </a:solidFill>
+                <a:uFillTx/>
+                <a:latin typeface="+mj-lt"/>
+                <a:ea typeface="+mj-ea"/>
+                <a:cs typeface="+mj-cs"/>
+                <a:sym typeface="IBM Plex Sans Light"/>
+              </a:defRPr>
+            </a:lvl6pPr>
+            <a:lvl7pPr marL="2205631" marR="0" indent="-389009" algn="l" defTabSz="2438400" rtl="0" eaLnBrk="1" latinLnBrk="0" hangingPunct="1">
+              <a:lnSpc>
+                <a:spcPct val="100000"/>
+              </a:lnSpc>
+              <a:spcBef>
+                <a:spcPts val="2900"/>
+              </a:spcBef>
+              <a:spcAft>
+                <a:spcPts val="0"/>
+              </a:spcAft>
+              <a:buClrTx/>
+              <a:buSzPct val="100000"/>
+              <a:buFontTx/>
+              <a:buChar char="»"/>
+              <a:tabLst/>
+              <a:defRPr sz="3600" b="0" i="0" u="none" strike="noStrike" cap="none" spc="0" baseline="0">
+                <a:solidFill>
+                  <a:srgbClr val="000000"/>
+                </a:solidFill>
+                <a:uFillTx/>
+                <a:latin typeface="+mj-lt"/>
+                <a:ea typeface="+mj-ea"/>
+                <a:cs typeface="+mj-cs"/>
+                <a:sym typeface="IBM Plex Sans Light"/>
+              </a:defRPr>
+            </a:lvl7pPr>
+            <a:lvl8pPr marL="2568200" marR="0" indent="-389009" algn="l" defTabSz="2438400" rtl="0" eaLnBrk="1" latinLnBrk="0" hangingPunct="1">
+              <a:lnSpc>
+                <a:spcPct val="100000"/>
+              </a:lnSpc>
+              <a:spcBef>
+                <a:spcPts val="2900"/>
+              </a:spcBef>
+              <a:spcAft>
+                <a:spcPts val="0"/>
+              </a:spcAft>
+              <a:buClrTx/>
+              <a:buSzPct val="100000"/>
+              <a:buFontTx/>
+              <a:buChar char="»"/>
+              <a:tabLst/>
+              <a:defRPr sz="3600" b="0" i="0" u="none" strike="noStrike" cap="none" spc="0" baseline="0">
+                <a:solidFill>
+                  <a:srgbClr val="000000"/>
+                </a:solidFill>
+                <a:uFillTx/>
+                <a:latin typeface="+mj-lt"/>
+                <a:ea typeface="+mj-ea"/>
+                <a:cs typeface="+mj-cs"/>
+                <a:sym typeface="IBM Plex Sans Light"/>
+              </a:defRPr>
+            </a:lvl8pPr>
+            <a:lvl9pPr marL="2930769" marR="0" indent="-389009" algn="l" defTabSz="2438400" rtl="0" eaLnBrk="1" latinLnBrk="0" hangingPunct="1">
+              <a:lnSpc>
+                <a:spcPct val="100000"/>
+              </a:lnSpc>
+              <a:spcBef>
+                <a:spcPts val="2900"/>
+              </a:spcBef>
+              <a:spcAft>
+                <a:spcPts val="0"/>
+              </a:spcAft>
+              <a:buClrTx/>
+              <a:buSzPct val="100000"/>
+              <a:buFontTx/>
+              <a:buChar char="»"/>
+              <a:tabLst/>
+              <a:defRPr sz="3600" b="0" i="0" u="none" strike="noStrike" cap="none" spc="0" baseline="0">
+                <a:solidFill>
+                  <a:srgbClr val="000000"/>
+                </a:solidFill>
+                <a:uFillTx/>
+                <a:latin typeface="+mj-lt"/>
+                <a:ea typeface="+mj-ea"/>
+                <a:cs typeface="+mj-cs"/>
+                <a:sym typeface="IBM Plex Sans Light"/>
+              </a:defRPr>
+            </a:lvl9pPr>
+          </a:lstStyle>
+          <a:p>
+            <a:r>
+              <a:rPr lang="en-US" kern="0" dirty="0">
+                <a:solidFill>
+                  <a:srgbClr val="8A3FFC"/>
+                </a:solidFill>
+              </a:rPr>
+              <a:t>Quantum State Preparation</a:t>
+            </a:r>
+          </a:p>
+          <a:p>
+            <a:endParaRPr lang="en-US" kern="0" dirty="0"/>
+          </a:p>
+        </p:txBody>
+      </p:sp>
+      <p:sp>
+        <p:nvSpPr>
+          <p:cNvPr id="21" name="Text Placeholder 4">
+            <a:extLst>
+              <a:ext uri="{FF2B5EF4-FFF2-40B4-BE49-F238E27FC236}">
+                <a16:creationId xmlns:a16="http://schemas.microsoft.com/office/drawing/2014/main" id="{EB883DB6-A9C9-8C34-729B-145A5E45D865}"/>
+              </a:ext>
+            </a:extLst>
+          </p:cNvPr>
+          <p:cNvSpPr txBox="1">
+            <a:spLocks/>
+          </p:cNvSpPr>
+          <p:nvPr/>
+        </p:nvSpPr>
+        <p:spPr>
+          <a:xfrm>
+            <a:off x="12763500" y="8180134"/>
+            <a:ext cx="4953000" cy="4955590"/>
+          </a:xfrm>
+          <a:prstGeom prst="rect">
+            <a:avLst/>
+          </a:prstGeom>
+          <a:ln w="12700">
+            <a:miter lim="400000"/>
+          </a:ln>
+          <a:extLst>
+            <a:ext uri="{C572A759-6A51-4108-AA02-DFA0A04FC94B}">
+              <ma14:wrappingTextBoxFlag xmlns="" xmlns:m="http://schemas.openxmlformats.org/officeDocument/2006/math" xmlns:a14="http://schemas.microsoft.com/office/drawing/2010/main" xmlns:ma14="http://schemas.microsoft.com/office/mac/drawingml/2011/main" val="1"/>
+            </a:ext>
+          </a:extLst>
+        </p:spPr>
+        <p:txBody>
+          <a:bodyPr lIns="0" tIns="0" rIns="0" bIns="0"/>
+          <a:lstStyle>
+            <a:lvl1pPr marL="0" marR="0" indent="0" algn="l" defTabSz="2438400" rtl="0" eaLnBrk="1" latinLnBrk="0" hangingPunct="1">
+              <a:lnSpc>
+                <a:spcPct val="110000"/>
+              </a:lnSpc>
+              <a:spcBef>
+                <a:spcPts val="0"/>
+              </a:spcBef>
+              <a:spcAft>
+                <a:spcPts val="0"/>
+              </a:spcAft>
+              <a:buClrTx/>
+              <a:buSzTx/>
+              <a:buFontTx/>
+              <a:buNone/>
+              <a:tabLst/>
+              <a:defRPr sz="2000" b="0" i="0" u="none" strike="noStrike" cap="none" spc="0" baseline="0">
+                <a:solidFill>
+                  <a:schemeClr val="tx1"/>
+                </a:solidFill>
+                <a:uFillTx/>
+                <a:latin typeface="IBM Plex Sans" panose="020B0503050203000203" pitchFamily="34" charset="0"/>
+                <a:ea typeface="+mj-ea"/>
+                <a:cs typeface="+mj-cs"/>
+                <a:sym typeface="IBM Plex Sans Light"/>
+              </a:defRPr>
+            </a:lvl1pPr>
+            <a:lvl2pPr marL="182880" marR="0" indent="-182880" algn="l" defTabSz="2438400" rtl="0" eaLnBrk="1" latinLnBrk="0" hangingPunct="1">
+              <a:lnSpc>
+                <a:spcPct val="110000"/>
+              </a:lnSpc>
+              <a:spcBef>
+                <a:spcPts val="0"/>
+              </a:spcBef>
+              <a:spcAft>
+                <a:spcPts val="0"/>
+              </a:spcAft>
+              <a:buClrTx/>
+              <a:buSzPct val="100000"/>
+              <a:buFontTx/>
+              <a:buChar char="–"/>
+              <a:tabLst/>
+              <a:defRPr sz="2000" b="0" i="0" u="none" strike="noStrike" cap="none" spc="0" baseline="0">
+                <a:solidFill>
+                  <a:schemeClr val="tx1"/>
+                </a:solidFill>
+                <a:uFillTx/>
+                <a:latin typeface="IBM Plex Sans" panose="020B0503050203000203" pitchFamily="34" charset="0"/>
+                <a:ea typeface="+mj-ea"/>
+                <a:cs typeface="+mj-cs"/>
+                <a:sym typeface="IBM Plex Sans Light"/>
+              </a:defRPr>
+            </a:lvl2pPr>
+            <a:lvl3pPr marL="365760" marR="0" indent="-182880" algn="l" defTabSz="2438400" rtl="0" eaLnBrk="1" latinLnBrk="0" hangingPunct="1">
+              <a:lnSpc>
+                <a:spcPct val="110000"/>
+              </a:lnSpc>
+              <a:spcBef>
+                <a:spcPts val="0"/>
+              </a:spcBef>
+              <a:spcAft>
+                <a:spcPts val="0"/>
+              </a:spcAft>
+              <a:buClrTx/>
+              <a:buSzPct val="100000"/>
+              <a:buFontTx/>
+              <a:buChar char="•"/>
+              <a:tabLst/>
+              <a:defRPr sz="2000" b="0" i="0" u="none" strike="noStrike" cap="none" spc="0" baseline="0">
+                <a:solidFill>
+                  <a:schemeClr val="tx1"/>
+                </a:solidFill>
+                <a:uFillTx/>
+                <a:latin typeface="IBM Plex Sans" panose="020B0503050203000203" pitchFamily="34" charset="0"/>
+                <a:ea typeface="+mj-ea"/>
+                <a:cs typeface="+mj-cs"/>
+                <a:sym typeface="IBM Plex Sans Light"/>
+              </a:defRPr>
+            </a:lvl3pPr>
+            <a:lvl4pPr marL="548640" marR="0" indent="-182880" algn="l" defTabSz="2438400" rtl="0" eaLnBrk="1" latinLnBrk="0" hangingPunct="1">
+              <a:lnSpc>
+                <a:spcPct val="110000"/>
+              </a:lnSpc>
+              <a:spcBef>
+                <a:spcPts val="0"/>
+              </a:spcBef>
+              <a:spcAft>
+                <a:spcPts val="0"/>
+              </a:spcAft>
+              <a:buClrTx/>
+              <a:buSzPct val="100000"/>
+              <a:buFontTx/>
+              <a:buChar char="–"/>
+              <a:tabLst/>
+              <a:defRPr sz="2000" b="0" i="0" u="none" strike="noStrike" cap="none" spc="0" baseline="0">
+                <a:solidFill>
+                  <a:schemeClr val="tx1"/>
+                </a:solidFill>
+                <a:uFillTx/>
+                <a:latin typeface="IBM Plex Sans" panose="020B0503050203000203" pitchFamily="34" charset="0"/>
+                <a:ea typeface="+mj-ea"/>
+                <a:cs typeface="+mj-cs"/>
+                <a:sym typeface="IBM Plex Sans Light"/>
+              </a:defRPr>
+            </a:lvl4pPr>
+            <a:lvl5pPr marL="1143000" marR="0" indent="-457200" algn="l" defTabSz="2438400" rtl="0" eaLnBrk="1" latinLnBrk="0" hangingPunct="1">
+              <a:lnSpc>
+                <a:spcPct val="110000"/>
+              </a:lnSpc>
+              <a:spcBef>
+                <a:spcPts val="0"/>
+              </a:spcBef>
+              <a:spcAft>
+                <a:spcPts val="0"/>
+              </a:spcAft>
+              <a:buClrTx/>
+              <a:buSzPct val="100000"/>
+              <a:buFont typeface="Arial" panose="020B0604020202020204" pitchFamily="34" charset="0"/>
+              <a:buChar char="•"/>
+              <a:tabLst/>
+              <a:defRPr sz="2000" b="0" i="0" u="none" strike="noStrike" cap="none" spc="0" baseline="0">
+                <a:solidFill>
+                  <a:schemeClr val="tx1"/>
+                </a:solidFill>
+                <a:uFillTx/>
+                <a:latin typeface="IBM Plex Sans" panose="020B0503050203000203" pitchFamily="34" charset="0"/>
+                <a:ea typeface="+mj-ea"/>
+                <a:cs typeface="+mj-cs"/>
+                <a:sym typeface="IBM Plex Sans Light"/>
+              </a:defRPr>
+            </a:lvl5pPr>
+            <a:lvl6pPr marL="1843060" marR="0" indent="-389009" algn="l" defTabSz="2438400" rtl="0" eaLnBrk="1" latinLnBrk="0" hangingPunct="1">
+              <a:lnSpc>
+                <a:spcPct val="100000"/>
+              </a:lnSpc>
+              <a:spcBef>
+                <a:spcPts val="2900"/>
+              </a:spcBef>
+              <a:spcAft>
+                <a:spcPts val="0"/>
+              </a:spcAft>
+              <a:buClrTx/>
+              <a:buSzPct val="100000"/>
+              <a:buFontTx/>
+              <a:buChar char="»"/>
+              <a:tabLst/>
+              <a:defRPr sz="3600" b="0" i="0" u="none" strike="noStrike" cap="none" spc="0" baseline="0">
+                <a:solidFill>
+                  <a:srgbClr val="000000"/>
+                </a:solidFill>
+                <a:uFillTx/>
+                <a:latin typeface="+mj-lt"/>
+                <a:ea typeface="+mj-ea"/>
+                <a:cs typeface="+mj-cs"/>
+                <a:sym typeface="IBM Plex Sans Light"/>
+              </a:defRPr>
+            </a:lvl6pPr>
+            <a:lvl7pPr marL="2205631" marR="0" indent="-389009" algn="l" defTabSz="2438400" rtl="0" eaLnBrk="1" latinLnBrk="0" hangingPunct="1">
+              <a:lnSpc>
+                <a:spcPct val="100000"/>
+              </a:lnSpc>
+              <a:spcBef>
+                <a:spcPts val="2900"/>
+              </a:spcBef>
+              <a:spcAft>
+                <a:spcPts val="0"/>
+              </a:spcAft>
+              <a:buClrTx/>
+              <a:buSzPct val="100000"/>
+              <a:buFontTx/>
+              <a:buChar char="»"/>
+              <a:tabLst/>
+              <a:defRPr sz="3600" b="0" i="0" u="none" strike="noStrike" cap="none" spc="0" baseline="0">
+                <a:solidFill>
+                  <a:srgbClr val="000000"/>
+                </a:solidFill>
+                <a:uFillTx/>
+                <a:latin typeface="+mj-lt"/>
+                <a:ea typeface="+mj-ea"/>
+                <a:cs typeface="+mj-cs"/>
+                <a:sym typeface="IBM Plex Sans Light"/>
+              </a:defRPr>
+            </a:lvl7pPr>
+            <a:lvl8pPr marL="2568200" marR="0" indent="-389009" algn="l" defTabSz="2438400" rtl="0" eaLnBrk="1" latinLnBrk="0" hangingPunct="1">
+              <a:lnSpc>
+                <a:spcPct val="100000"/>
+              </a:lnSpc>
+              <a:spcBef>
+                <a:spcPts val="2900"/>
+              </a:spcBef>
+              <a:spcAft>
+                <a:spcPts val="0"/>
+              </a:spcAft>
+              <a:buClrTx/>
+              <a:buSzPct val="100000"/>
+              <a:buFontTx/>
+              <a:buChar char="»"/>
+              <a:tabLst/>
+              <a:defRPr sz="3600" b="0" i="0" u="none" strike="noStrike" cap="none" spc="0" baseline="0">
+                <a:solidFill>
+                  <a:srgbClr val="000000"/>
+                </a:solidFill>
+                <a:uFillTx/>
+                <a:latin typeface="+mj-lt"/>
+                <a:ea typeface="+mj-ea"/>
+                <a:cs typeface="+mj-cs"/>
+                <a:sym typeface="IBM Plex Sans Light"/>
+              </a:defRPr>
+            </a:lvl8pPr>
+            <a:lvl9pPr marL="2930769" marR="0" indent="-389009" algn="l" defTabSz="2438400" rtl="0" eaLnBrk="1" latinLnBrk="0" hangingPunct="1">
+              <a:lnSpc>
+                <a:spcPct val="100000"/>
+              </a:lnSpc>
+              <a:spcBef>
+                <a:spcPts val="2900"/>
+              </a:spcBef>
+              <a:spcAft>
+                <a:spcPts val="0"/>
+              </a:spcAft>
+              <a:buClrTx/>
+              <a:buSzPct val="100000"/>
+              <a:buFontTx/>
+              <a:buChar char="»"/>
+              <a:tabLst/>
+              <a:defRPr sz="3600" b="0" i="0" u="none" strike="noStrike" cap="none" spc="0" baseline="0">
+                <a:solidFill>
+                  <a:srgbClr val="000000"/>
+                </a:solidFill>
+                <a:uFillTx/>
+                <a:latin typeface="+mj-lt"/>
+                <a:ea typeface="+mj-ea"/>
+                <a:cs typeface="+mj-cs"/>
+                <a:sym typeface="IBM Plex Sans Light"/>
+              </a:defRPr>
+            </a:lvl9pPr>
+          </a:lstStyle>
+          <a:p>
+            <a:r>
+              <a:rPr lang="en-US" dirty="0"/>
+              <a:t>“No, quantum computers are not appropriate for </a:t>
+            </a:r>
+            <a:r>
+              <a:rPr lang="en-US" i="1" dirty="0"/>
+              <a:t>big data</a:t>
+            </a:r>
+            <a:r>
+              <a:rPr lang="en-US" dirty="0"/>
+              <a:t> problems. Rather, they are best for problems with a fairly small amount of data which has a very large solution space — so called </a:t>
+            </a:r>
+            <a:r>
+              <a:rPr lang="en-US" i="1" dirty="0"/>
+              <a:t>combinatorial explosions</a:t>
+            </a:r>
+            <a:r>
+              <a:rPr lang="en-US" dirty="0"/>
+              <a:t>. So, rather than call it </a:t>
+            </a:r>
+            <a:r>
+              <a:rPr lang="en-US" i="1" dirty="0"/>
+              <a:t>Big Data</a:t>
+            </a:r>
+            <a:r>
+              <a:rPr lang="en-US" dirty="0"/>
+              <a:t>, I call it </a:t>
+            </a:r>
+            <a:r>
+              <a:rPr lang="en-US" i="1" dirty="0"/>
+              <a:t>Little Data</a:t>
+            </a:r>
+            <a:r>
+              <a:rPr lang="en-US" dirty="0"/>
+              <a:t> with a </a:t>
+            </a:r>
+            <a:r>
+              <a:rPr lang="en-US" i="1" dirty="0"/>
+              <a:t>Big Solution Space</a:t>
+            </a:r>
+            <a:r>
+              <a:rPr lang="en-US" dirty="0"/>
+              <a:t>. This informal paper introduces the notions of </a:t>
+            </a:r>
+            <a:r>
+              <a:rPr lang="en-US" i="1" dirty="0"/>
+              <a:t>Little Data with a Big Solution Space</a:t>
+            </a:r>
+            <a:r>
+              <a:rPr lang="en-US" dirty="0"/>
+              <a:t>.”</a:t>
+            </a:r>
+          </a:p>
+          <a:p>
+            <a:endParaRPr lang="en-US" dirty="0"/>
+          </a:p>
+          <a:p>
+            <a:r>
+              <a:rPr lang="en-US" dirty="0"/>
+              <a:t>https://jackkrupansky.medium.com/little-data-with-a-big-solution-space-the-sweet-spot-for-quantum-computing-b6c6d76ada6d</a:t>
+            </a:r>
+          </a:p>
+          <a:p>
+            <a:endParaRPr lang="en-US" kern="0" dirty="0"/>
+          </a:p>
+          <a:p>
+            <a:endParaRPr lang="en-US" kern="0" dirty="0"/>
+          </a:p>
+          <a:p>
+            <a:endParaRPr lang="en-US" kern="0" dirty="0"/>
+          </a:p>
+          <a:p>
+            <a:endParaRPr lang="en-US" kern="0" dirty="0">
+              <a:solidFill>
+                <a:srgbClr val="8A3FFC"/>
+              </a:solidFill>
+            </a:endParaRPr>
+          </a:p>
+          <a:p>
+            <a:endParaRPr lang="en-US" kern="0" dirty="0"/>
+          </a:p>
+          <a:p>
+            <a:endParaRPr lang="en-US" kern="0" dirty="0"/>
+          </a:p>
+          <a:p>
+            <a:endParaRPr lang="en-US" kern="0" dirty="0"/>
+          </a:p>
+        </p:txBody>
+      </p:sp>
+      <p:sp>
+        <p:nvSpPr>
+          <p:cNvPr id="2" name="TextBox 1">
+            <a:extLst>
+              <a:ext uri="{FF2B5EF4-FFF2-40B4-BE49-F238E27FC236}">
+                <a16:creationId xmlns:a16="http://schemas.microsoft.com/office/drawing/2014/main" id="{8DA58DB6-890A-D444-F950-ABC0CA920D38}"/>
+              </a:ext>
+            </a:extLst>
+          </p:cNvPr>
+          <p:cNvSpPr txBox="1"/>
+          <p:nvPr/>
+        </p:nvSpPr>
+        <p:spPr>
+          <a:xfrm>
+            <a:off x="3590354" y="10106213"/>
+            <a:ext cx="7478395" cy="2661920"/>
           </a:xfrm>
           <a:prstGeom prst="rect">
             <a:avLst/>
@@ -28166,614 +30559,29 @@
           </a:extLst>
         </p:spPr>
         <p:txBody>
-          <a:bodyPr lIns="0" tIns="0" rIns="0" bIns="0"/>
-          <a:lstStyle>
-            <a:lvl1pPr marL="0" marR="0" indent="0" algn="l" defTabSz="2438400" rtl="0" eaLnBrk="1" latinLnBrk="0" hangingPunct="1">
-              <a:lnSpc>
-                <a:spcPct val="110000"/>
-              </a:lnSpc>
-              <a:spcBef>
-                <a:spcPts val="0"/>
-              </a:spcBef>
-              <a:spcAft>
-                <a:spcPts val="0"/>
-              </a:spcAft>
-              <a:buClrTx/>
-              <a:buSzTx/>
-              <a:buFontTx/>
-              <a:buNone/>
-              <a:tabLst/>
-              <a:defRPr sz="2800" b="0" i="0" u="none" strike="noStrike" cap="none" spc="0" baseline="0">
-                <a:solidFill>
-                  <a:schemeClr val="tx1"/>
-                </a:solidFill>
-                <a:uFillTx/>
-                <a:latin typeface="+mj-lt"/>
-                <a:ea typeface="+mj-ea"/>
-                <a:cs typeface="+mj-cs"/>
-                <a:sym typeface="IBM Plex Sans Light"/>
-              </a:defRPr>
-            </a:lvl1pPr>
-            <a:lvl2pPr marL="256032" marR="0" indent="-256032" algn="l" defTabSz="2438400" rtl="0" eaLnBrk="1" latinLnBrk="0" hangingPunct="1">
-              <a:lnSpc>
-                <a:spcPct val="110000"/>
-              </a:lnSpc>
-              <a:spcBef>
-                <a:spcPts val="0"/>
-              </a:spcBef>
-              <a:spcAft>
-                <a:spcPts val="0"/>
-              </a:spcAft>
-              <a:buClrTx/>
+          <a:bodyPr wrap="square" lIns="0" tIns="0" rIns="0" bIns="0" rtlCol="0">
+            <a:noAutofit/>
+          </a:bodyPr>
+          <a:lstStyle/>
+          <a:p>
+            <a:pPr defTabSz="2438400">
+              <a:spcBef>
+                <a:spcPts val="2900"/>
+              </a:spcBef>
               <a:buSzPct val="100000"/>
-              <a:buFontTx/>
-              <a:buChar char="–"/>
-              <a:tabLst/>
-              <a:defRPr sz="2800" b="0" i="0" u="none" strike="noStrike" cap="none" spc="0" baseline="0">
-                <a:solidFill>
-                  <a:schemeClr val="tx1"/>
-                </a:solidFill>
-                <a:uFillTx/>
-                <a:latin typeface="+mj-lt"/>
-                <a:ea typeface="+mj-ea"/>
-                <a:cs typeface="+mj-cs"/>
-                <a:sym typeface="IBM Plex Sans Light"/>
-              </a:defRPr>
-            </a:lvl2pPr>
-            <a:lvl3pPr marL="512064" marR="0" indent="-256032" algn="l" defTabSz="2438400" rtl="0" eaLnBrk="1" latinLnBrk="0" hangingPunct="1">
-              <a:lnSpc>
-                <a:spcPct val="110000"/>
-              </a:lnSpc>
-              <a:spcBef>
-                <a:spcPts val="0"/>
-              </a:spcBef>
-              <a:spcAft>
-                <a:spcPts val="0"/>
-              </a:spcAft>
-              <a:buClrTx/>
-              <a:buSzPct val="100000"/>
-              <a:buFontTx/>
-              <a:buChar char="•"/>
-              <a:tabLst/>
-              <a:defRPr sz="2800" b="0" i="0" u="none" strike="noStrike" cap="none" spc="0" baseline="0">
-                <a:solidFill>
-                  <a:schemeClr val="tx1"/>
-                </a:solidFill>
-                <a:uFillTx/>
-                <a:latin typeface="+mj-lt"/>
-                <a:ea typeface="+mj-ea"/>
-                <a:cs typeface="+mj-cs"/>
-                <a:sym typeface="IBM Plex Sans Light"/>
-              </a:defRPr>
-            </a:lvl3pPr>
-            <a:lvl4pPr marL="768096" marR="0" indent="-256032" algn="l" defTabSz="2438400" rtl="0" eaLnBrk="1" latinLnBrk="0" hangingPunct="1">
-              <a:lnSpc>
-                <a:spcPct val="110000"/>
-              </a:lnSpc>
-              <a:spcBef>
-                <a:spcPts val="0"/>
-              </a:spcBef>
-              <a:spcAft>
-                <a:spcPts val="0"/>
-              </a:spcAft>
-              <a:buClrTx/>
-              <a:buSzPct val="100000"/>
-              <a:buFontTx/>
-              <a:buChar char="–"/>
-              <a:tabLst/>
-              <a:defRPr sz="2800" b="0" i="0" u="none" strike="noStrike" cap="none" spc="0" baseline="0">
-                <a:solidFill>
-                  <a:schemeClr val="tx1"/>
-                </a:solidFill>
-                <a:uFillTx/>
-                <a:latin typeface="+mj-lt"/>
-                <a:ea typeface="+mj-ea"/>
-                <a:cs typeface="+mj-cs"/>
-                <a:sym typeface="IBM Plex Sans Light"/>
-              </a:defRPr>
-            </a:lvl4pPr>
-            <a:lvl5pPr marL="1143000" marR="0" indent="-457200" algn="l" defTabSz="2438400" rtl="0" eaLnBrk="1" latinLnBrk="0" hangingPunct="1">
-              <a:lnSpc>
-                <a:spcPct val="110000"/>
-              </a:lnSpc>
-              <a:spcBef>
-                <a:spcPts val="0"/>
-              </a:spcBef>
-              <a:spcAft>
-                <a:spcPts val="0"/>
-              </a:spcAft>
-              <a:buClrTx/>
-              <a:buSzPct val="100000"/>
-              <a:buFont typeface="Arial" panose="020B0604020202020204" pitchFamily="34" charset="0"/>
-              <a:buChar char="•"/>
-              <a:tabLst/>
-              <a:defRPr sz="2800" b="0" i="0" u="none" strike="noStrike" cap="none" spc="0" baseline="0">
-                <a:solidFill>
-                  <a:schemeClr val="tx1"/>
-                </a:solidFill>
-                <a:uFillTx/>
-                <a:latin typeface="+mj-lt"/>
-                <a:ea typeface="+mj-ea"/>
-                <a:cs typeface="+mj-cs"/>
-                <a:sym typeface="IBM Plex Sans Light"/>
-              </a:defRPr>
-            </a:lvl5pPr>
-            <a:lvl6pPr marL="1843060" marR="0" indent="-389009" algn="l" defTabSz="2438400" rtl="0" eaLnBrk="1" latinLnBrk="0" hangingPunct="1">
-              <a:lnSpc>
-                <a:spcPct val="100000"/>
-              </a:lnSpc>
-              <a:spcBef>
-                <a:spcPts val="2900"/>
-              </a:spcBef>
-              <a:spcAft>
-                <a:spcPts val="0"/>
-              </a:spcAft>
-              <a:buClrTx/>
-              <a:buSzPct val="100000"/>
-              <a:buFontTx/>
-              <a:buChar char="»"/>
-              <a:tabLst/>
-              <a:defRPr sz="3600" b="0" i="0" u="none" strike="noStrike" cap="none" spc="0" baseline="0">
-                <a:solidFill>
-                  <a:srgbClr val="000000"/>
-                </a:solidFill>
-                <a:uFillTx/>
-                <a:latin typeface="+mj-lt"/>
-                <a:ea typeface="+mj-ea"/>
-                <a:cs typeface="+mj-cs"/>
-                <a:sym typeface="IBM Plex Sans Light"/>
-              </a:defRPr>
-            </a:lvl6pPr>
-            <a:lvl7pPr marL="2205631" marR="0" indent="-389009" algn="l" defTabSz="2438400" rtl="0" eaLnBrk="1" latinLnBrk="0" hangingPunct="1">
-              <a:lnSpc>
-                <a:spcPct val="100000"/>
-              </a:lnSpc>
-              <a:spcBef>
-                <a:spcPts val="2900"/>
-              </a:spcBef>
-              <a:spcAft>
-                <a:spcPts val="0"/>
-              </a:spcAft>
-              <a:buClrTx/>
-              <a:buSzPct val="100000"/>
-              <a:buFontTx/>
-              <a:buChar char="»"/>
-              <a:tabLst/>
-              <a:defRPr sz="3600" b="0" i="0" u="none" strike="noStrike" cap="none" spc="0" baseline="0">
-                <a:solidFill>
-                  <a:srgbClr val="000000"/>
-                </a:solidFill>
-                <a:uFillTx/>
-                <a:latin typeface="+mj-lt"/>
-                <a:ea typeface="+mj-ea"/>
-                <a:cs typeface="+mj-cs"/>
-                <a:sym typeface="IBM Plex Sans Light"/>
-              </a:defRPr>
-            </a:lvl7pPr>
-            <a:lvl8pPr marL="2568200" marR="0" indent="-389009" algn="l" defTabSz="2438400" rtl="0" eaLnBrk="1" latinLnBrk="0" hangingPunct="1">
-              <a:lnSpc>
-                <a:spcPct val="100000"/>
-              </a:lnSpc>
-              <a:spcBef>
-                <a:spcPts val="2900"/>
-              </a:spcBef>
-              <a:spcAft>
-                <a:spcPts val="0"/>
-              </a:spcAft>
-              <a:buClrTx/>
-              <a:buSzPct val="100000"/>
-              <a:buFontTx/>
-              <a:buChar char="»"/>
-              <a:tabLst/>
-              <a:defRPr sz="3600" b="0" i="0" u="none" strike="noStrike" cap="none" spc="0" baseline="0">
-                <a:solidFill>
-                  <a:srgbClr val="000000"/>
-                </a:solidFill>
-                <a:uFillTx/>
-                <a:latin typeface="+mj-lt"/>
-                <a:ea typeface="+mj-ea"/>
-                <a:cs typeface="+mj-cs"/>
-                <a:sym typeface="IBM Plex Sans Light"/>
-              </a:defRPr>
-            </a:lvl8pPr>
-            <a:lvl9pPr marL="2930769" marR="0" indent="-389009" algn="l" defTabSz="2438400" rtl="0" eaLnBrk="1" latinLnBrk="0" hangingPunct="1">
-              <a:lnSpc>
-                <a:spcPct val="100000"/>
-              </a:lnSpc>
-              <a:spcBef>
-                <a:spcPts val="2900"/>
-              </a:spcBef>
-              <a:spcAft>
-                <a:spcPts val="0"/>
-              </a:spcAft>
-              <a:buClrTx/>
-              <a:buSzPct val="100000"/>
-              <a:buFontTx/>
-              <a:buChar char="»"/>
-              <a:tabLst/>
-              <a:defRPr sz="3600" b="0" i="0" u="none" strike="noStrike" cap="none" spc="0" baseline="0">
-                <a:solidFill>
-                  <a:srgbClr val="000000"/>
-                </a:solidFill>
-                <a:uFillTx/>
-                <a:latin typeface="+mj-lt"/>
-                <a:ea typeface="+mj-ea"/>
-                <a:cs typeface="+mj-cs"/>
-                <a:sym typeface="IBM Plex Sans Light"/>
-              </a:defRPr>
-            </a:lvl9pPr>
-          </a:lstStyle>
-          <a:p>
-            <a:r>
-              <a:rPr lang="en-US" kern="0" dirty="0">
-                <a:solidFill>
-                  <a:srgbClr val="8A3FFC"/>
-                </a:solidFill>
-              </a:rPr>
-              <a:t>Quantum State Preparation</a:t>
-            </a:r>
-          </a:p>
-          <a:p>
-            <a:endParaRPr lang="en-US" kern="0" dirty="0"/>
-          </a:p>
-        </p:txBody>
-      </p:sp>
-      <p:sp>
-        <p:nvSpPr>
-          <p:cNvPr id="21" name="Text Placeholder 4">
-            <a:extLst>
-              <a:ext uri="{FF2B5EF4-FFF2-40B4-BE49-F238E27FC236}">
-                <a16:creationId xmlns:a16="http://schemas.microsoft.com/office/drawing/2014/main" id="{EB883DB6-A9C9-8C34-729B-145A5E45D865}"/>
-              </a:ext>
-            </a:extLst>
-          </p:cNvPr>
-          <p:cNvSpPr txBox="1">
-            <a:spLocks/>
-          </p:cNvSpPr>
-          <p:nvPr/>
-        </p:nvSpPr>
-        <p:spPr>
-          <a:xfrm>
-            <a:off x="12763500" y="8180134"/>
-            <a:ext cx="4953000" cy="4955590"/>
-          </a:xfrm>
-          <a:prstGeom prst="rect">
-            <a:avLst/>
-          </a:prstGeom>
-          <a:ln w="12700">
-            <a:miter lim="400000"/>
-          </a:ln>
-          <a:extLst>
-            <a:ext uri="{C572A759-6A51-4108-AA02-DFA0A04FC94B}">
-              <ma14:wrappingTextBoxFlag xmlns:ma14="http://schemas.microsoft.com/office/mac/drawingml/2011/main" xmlns:a14="http://schemas.microsoft.com/office/drawing/2010/main" xmlns:m="http://schemas.openxmlformats.org/officeDocument/2006/math" xmlns="" val="1"/>
-            </a:ext>
-          </a:extLst>
-        </p:spPr>
-        <p:txBody>
-          <a:bodyPr lIns="0" tIns="0" rIns="0" bIns="0"/>
-          <a:lstStyle>
-            <a:lvl1pPr marL="0" marR="0" indent="0" algn="l" defTabSz="2438400" rtl="0" eaLnBrk="1" latinLnBrk="0" hangingPunct="1">
-              <a:lnSpc>
-                <a:spcPct val="110000"/>
-              </a:lnSpc>
-              <a:spcBef>
-                <a:spcPts val="0"/>
-              </a:spcBef>
-              <a:spcAft>
-                <a:spcPts val="0"/>
-              </a:spcAft>
-              <a:buClrTx/>
-              <a:buSzTx/>
-              <a:buFontTx/>
-              <a:buNone/>
-              <a:tabLst/>
-              <a:defRPr sz="2000" b="0" i="0" u="none" strike="noStrike" cap="none" spc="0" baseline="0">
-                <a:solidFill>
-                  <a:schemeClr val="tx1"/>
-                </a:solidFill>
-                <a:uFillTx/>
-                <a:latin typeface="IBM Plex Sans" panose="020B0503050203000203" pitchFamily="34" charset="0"/>
-                <a:ea typeface="+mj-ea"/>
-                <a:cs typeface="+mj-cs"/>
-                <a:sym typeface="IBM Plex Sans Light"/>
-              </a:defRPr>
-            </a:lvl1pPr>
-            <a:lvl2pPr marL="182880" marR="0" indent="-182880" algn="l" defTabSz="2438400" rtl="0" eaLnBrk="1" latinLnBrk="0" hangingPunct="1">
-              <a:lnSpc>
-                <a:spcPct val="110000"/>
-              </a:lnSpc>
-              <a:spcBef>
-                <a:spcPts val="0"/>
-              </a:spcBef>
-              <a:spcAft>
-                <a:spcPts val="0"/>
-              </a:spcAft>
-              <a:buClrTx/>
-              <a:buSzPct val="100000"/>
-              <a:buFontTx/>
-              <a:buChar char="–"/>
-              <a:tabLst/>
-              <a:defRPr sz="2000" b="0" i="0" u="none" strike="noStrike" cap="none" spc="0" baseline="0">
-                <a:solidFill>
-                  <a:schemeClr val="tx1"/>
-                </a:solidFill>
-                <a:uFillTx/>
-                <a:latin typeface="IBM Plex Sans" panose="020B0503050203000203" pitchFamily="34" charset="0"/>
-                <a:ea typeface="+mj-ea"/>
-                <a:cs typeface="+mj-cs"/>
-                <a:sym typeface="IBM Plex Sans Light"/>
-              </a:defRPr>
-            </a:lvl2pPr>
-            <a:lvl3pPr marL="365760" marR="0" indent="-182880" algn="l" defTabSz="2438400" rtl="0" eaLnBrk="1" latinLnBrk="0" hangingPunct="1">
-              <a:lnSpc>
-                <a:spcPct val="110000"/>
-              </a:lnSpc>
-              <a:spcBef>
-                <a:spcPts val="0"/>
-              </a:spcBef>
-              <a:spcAft>
-                <a:spcPts val="0"/>
-              </a:spcAft>
-              <a:buClrTx/>
-              <a:buSzPct val="100000"/>
-              <a:buFontTx/>
-              <a:buChar char="•"/>
-              <a:tabLst/>
-              <a:defRPr sz="2000" b="0" i="0" u="none" strike="noStrike" cap="none" spc="0" baseline="0">
-                <a:solidFill>
-                  <a:schemeClr val="tx1"/>
-                </a:solidFill>
-                <a:uFillTx/>
-                <a:latin typeface="IBM Plex Sans" panose="020B0503050203000203" pitchFamily="34" charset="0"/>
-                <a:ea typeface="+mj-ea"/>
-                <a:cs typeface="+mj-cs"/>
-                <a:sym typeface="IBM Plex Sans Light"/>
-              </a:defRPr>
-            </a:lvl3pPr>
-            <a:lvl4pPr marL="548640" marR="0" indent="-182880" algn="l" defTabSz="2438400" rtl="0" eaLnBrk="1" latinLnBrk="0" hangingPunct="1">
-              <a:lnSpc>
-                <a:spcPct val="110000"/>
-              </a:lnSpc>
-              <a:spcBef>
-                <a:spcPts val="0"/>
-              </a:spcBef>
-              <a:spcAft>
-                <a:spcPts val="0"/>
-              </a:spcAft>
-              <a:buClrTx/>
-              <a:buSzPct val="100000"/>
-              <a:buFontTx/>
-              <a:buChar char="–"/>
-              <a:tabLst/>
-              <a:defRPr sz="2000" b="0" i="0" u="none" strike="noStrike" cap="none" spc="0" baseline="0">
-                <a:solidFill>
-                  <a:schemeClr val="tx1"/>
-                </a:solidFill>
-                <a:uFillTx/>
-                <a:latin typeface="IBM Plex Sans" panose="020B0503050203000203" pitchFamily="34" charset="0"/>
-                <a:ea typeface="+mj-ea"/>
-                <a:cs typeface="+mj-cs"/>
-                <a:sym typeface="IBM Plex Sans Light"/>
-              </a:defRPr>
-            </a:lvl4pPr>
-            <a:lvl5pPr marL="1143000" marR="0" indent="-457200" algn="l" defTabSz="2438400" rtl="0" eaLnBrk="1" latinLnBrk="0" hangingPunct="1">
-              <a:lnSpc>
-                <a:spcPct val="110000"/>
-              </a:lnSpc>
-              <a:spcBef>
-                <a:spcPts val="0"/>
-              </a:spcBef>
-              <a:spcAft>
-                <a:spcPts val="0"/>
-              </a:spcAft>
-              <a:buClrTx/>
-              <a:buSzPct val="100000"/>
-              <a:buFont typeface="Arial" panose="020B0604020202020204" pitchFamily="34" charset="0"/>
-              <a:buChar char="•"/>
-              <a:tabLst/>
-              <a:defRPr sz="2000" b="0" i="0" u="none" strike="noStrike" cap="none" spc="0" baseline="0">
-                <a:solidFill>
-                  <a:schemeClr val="tx1"/>
-                </a:solidFill>
-                <a:uFillTx/>
-                <a:latin typeface="IBM Plex Sans" panose="020B0503050203000203" pitchFamily="34" charset="0"/>
-                <a:ea typeface="+mj-ea"/>
-                <a:cs typeface="+mj-cs"/>
-                <a:sym typeface="IBM Plex Sans Light"/>
-              </a:defRPr>
-            </a:lvl5pPr>
-            <a:lvl6pPr marL="1843060" marR="0" indent="-389009" algn="l" defTabSz="2438400" rtl="0" eaLnBrk="1" latinLnBrk="0" hangingPunct="1">
-              <a:lnSpc>
-                <a:spcPct val="100000"/>
-              </a:lnSpc>
-              <a:spcBef>
-                <a:spcPts val="2900"/>
-              </a:spcBef>
-              <a:spcAft>
-                <a:spcPts val="0"/>
-              </a:spcAft>
-              <a:buClrTx/>
-              <a:buSzPct val="100000"/>
-              <a:buFontTx/>
-              <a:buChar char="»"/>
-              <a:tabLst/>
-              <a:defRPr sz="3600" b="0" i="0" u="none" strike="noStrike" cap="none" spc="0" baseline="0">
-                <a:solidFill>
-                  <a:srgbClr val="000000"/>
-                </a:solidFill>
-                <a:uFillTx/>
-                <a:latin typeface="+mj-lt"/>
-                <a:ea typeface="+mj-ea"/>
-                <a:cs typeface="+mj-cs"/>
-                <a:sym typeface="IBM Plex Sans Light"/>
-              </a:defRPr>
-            </a:lvl6pPr>
-            <a:lvl7pPr marL="2205631" marR="0" indent="-389009" algn="l" defTabSz="2438400" rtl="0" eaLnBrk="1" latinLnBrk="0" hangingPunct="1">
-              <a:lnSpc>
-                <a:spcPct val="100000"/>
-              </a:lnSpc>
-              <a:spcBef>
-                <a:spcPts val="2900"/>
-              </a:spcBef>
-              <a:spcAft>
-                <a:spcPts val="0"/>
-              </a:spcAft>
-              <a:buClrTx/>
-              <a:buSzPct val="100000"/>
-              <a:buFontTx/>
-              <a:buChar char="»"/>
-              <a:tabLst/>
-              <a:defRPr sz="3600" b="0" i="0" u="none" strike="noStrike" cap="none" spc="0" baseline="0">
-                <a:solidFill>
-                  <a:srgbClr val="000000"/>
-                </a:solidFill>
-                <a:uFillTx/>
-                <a:latin typeface="+mj-lt"/>
-                <a:ea typeface="+mj-ea"/>
-                <a:cs typeface="+mj-cs"/>
-                <a:sym typeface="IBM Plex Sans Light"/>
-              </a:defRPr>
-            </a:lvl7pPr>
-            <a:lvl8pPr marL="2568200" marR="0" indent="-389009" algn="l" defTabSz="2438400" rtl="0" eaLnBrk="1" latinLnBrk="0" hangingPunct="1">
-              <a:lnSpc>
-                <a:spcPct val="100000"/>
-              </a:lnSpc>
-              <a:spcBef>
-                <a:spcPts val="2900"/>
-              </a:spcBef>
-              <a:spcAft>
-                <a:spcPts val="0"/>
-              </a:spcAft>
-              <a:buClrTx/>
-              <a:buSzPct val="100000"/>
-              <a:buFontTx/>
-              <a:buChar char="»"/>
-              <a:tabLst/>
-              <a:defRPr sz="3600" b="0" i="0" u="none" strike="noStrike" cap="none" spc="0" baseline="0">
-                <a:solidFill>
-                  <a:srgbClr val="000000"/>
-                </a:solidFill>
-                <a:uFillTx/>
-                <a:latin typeface="+mj-lt"/>
-                <a:ea typeface="+mj-ea"/>
-                <a:cs typeface="+mj-cs"/>
-                <a:sym typeface="IBM Plex Sans Light"/>
-              </a:defRPr>
-            </a:lvl8pPr>
-            <a:lvl9pPr marL="2930769" marR="0" indent="-389009" algn="l" defTabSz="2438400" rtl="0" eaLnBrk="1" latinLnBrk="0" hangingPunct="1">
-              <a:lnSpc>
-                <a:spcPct val="100000"/>
-              </a:lnSpc>
-              <a:spcBef>
-                <a:spcPts val="2900"/>
-              </a:spcBef>
-              <a:spcAft>
-                <a:spcPts val="0"/>
-              </a:spcAft>
-              <a:buClrTx/>
-              <a:buSzPct val="100000"/>
-              <a:buFontTx/>
-              <a:buChar char="»"/>
-              <a:tabLst/>
-              <a:defRPr sz="3600" b="0" i="0" u="none" strike="noStrike" cap="none" spc="0" baseline="0">
-                <a:solidFill>
-                  <a:srgbClr val="000000"/>
-                </a:solidFill>
-                <a:uFillTx/>
-                <a:latin typeface="+mj-lt"/>
-                <a:ea typeface="+mj-ea"/>
-                <a:cs typeface="+mj-cs"/>
-                <a:sym typeface="IBM Plex Sans Light"/>
-              </a:defRPr>
-            </a:lvl9pPr>
-          </a:lstStyle>
-          <a:p>
-            <a:r>
-              <a:rPr lang="en-US" dirty="0"/>
-              <a:t>“No, quantum computers are not appropriate for </a:t>
-            </a:r>
-            <a:r>
-              <a:rPr lang="en-US" i="1" dirty="0"/>
-              <a:t>big data</a:t>
-            </a:r>
-            <a:r>
-              <a:rPr lang="en-US" dirty="0"/>
-              <a:t> problems. Rather, they are best for problems with a fairly small amount of data which has a very large solution space — so called </a:t>
-            </a:r>
-            <a:r>
-              <a:rPr lang="en-US" i="1" dirty="0"/>
-              <a:t>combinatorial explosions</a:t>
-            </a:r>
-            <a:r>
-              <a:rPr lang="en-US" dirty="0"/>
-              <a:t>. So, rather than call it </a:t>
-            </a:r>
-            <a:r>
-              <a:rPr lang="en-US" i="1" dirty="0"/>
-              <a:t>Big Data</a:t>
-            </a:r>
-            <a:r>
-              <a:rPr lang="en-US" dirty="0"/>
-              <a:t>, I call it </a:t>
-            </a:r>
-            <a:r>
-              <a:rPr lang="en-US" i="1" dirty="0"/>
-              <a:t>Little Data</a:t>
-            </a:r>
-            <a:r>
-              <a:rPr lang="en-US" dirty="0"/>
-              <a:t> with a </a:t>
-            </a:r>
-            <a:r>
-              <a:rPr lang="en-US" i="1" dirty="0"/>
-              <a:t>Big Solution Space</a:t>
-            </a:r>
-            <a:r>
-              <a:rPr lang="en-US" dirty="0"/>
-              <a:t>. This informal paper introduces the notions of </a:t>
-            </a:r>
-            <a:r>
-              <a:rPr lang="en-US" i="1" dirty="0"/>
-              <a:t>Little Data with a Big Solution Space</a:t>
-            </a:r>
-            <a:r>
-              <a:rPr lang="en-US" dirty="0"/>
-              <a:t>.”</a:t>
-            </a:r>
-          </a:p>
-          <a:p>
-            <a:endParaRPr lang="en-US" dirty="0"/>
-          </a:p>
-          <a:p>
-            <a:r>
-              <a:rPr lang="en-US" dirty="0"/>
-              <a:t>https://jackkrupansky.medium.com/little-data-with-a-big-solution-space-the-sweet-spot-for-quantum-computing-b6c6d76ada6d</a:t>
-            </a:r>
-          </a:p>
-          <a:p>
-            <a:endParaRPr lang="en-US" kern="0" dirty="0"/>
-          </a:p>
-          <a:p>
-            <a:endParaRPr lang="en-US" kern="0" dirty="0"/>
-          </a:p>
-          <a:p>
-            <a:endParaRPr lang="en-US" kern="0" dirty="0"/>
-          </a:p>
-          <a:p>
-            <a:endParaRPr lang="en-US" kern="0" dirty="0">
+            </a:pPr>
+            <a:r>
+              <a:rPr lang="en-US" sz="2800" dirty="0"/>
+              <a:t>Figure 1: A circuit ansatz with hierarchical architecture on 6 qubits laid out on a grid. Vertical gray lines on the circuit indicate a partial circuit which is variationally learned before using it as input to the next sub-circuit.</a:t>
+            </a:r>
+            <a:endParaRPr lang="en-US" sz="2800" kern="0" dirty="0">
               <a:solidFill>
-                <a:srgbClr val="8A3FFC"/>
+                <a:srgbClr val="000000"/>
               </a:solidFill>
+              <a:ea typeface="+mj-ea"/>
+              <a:cs typeface="+mj-cs"/>
+              <a:sym typeface="IBM Plex Sans Light"/>
             </a:endParaRPr>
-          </a:p>
-          <a:p>
-            <a:endParaRPr lang="en-US" kern="0" dirty="0"/>
-          </a:p>
-          <a:p>
-            <a:endParaRPr lang="en-US" kern="0" dirty="0"/>
-          </a:p>
-          <a:p>
-            <a:endParaRPr lang="en-US" kern="0" dirty="0"/>
           </a:p>
         </p:txBody>
       </p:sp>
@@ -28791,7 +30599,7 @@
 </p:sld>
 </file>
 
-<file path=ppt/slides/slide13.xml><?xml version="1.0" encoding="utf-8"?>
+<file path=ppt/slides/slide16.xml><?xml version="1.0" encoding="utf-8"?>
 <p:sld xmlns:a="http://schemas.openxmlformats.org/drawingml/2006/main" xmlns:r="http://schemas.openxmlformats.org/officeDocument/2006/relationships" xmlns:p="http://schemas.openxmlformats.org/presentationml/2006/main">
   <p:cSld>
     <p:spTree>
@@ -28898,22 +30706,6 @@
                   <a:srgbClr val="8A3FFC"/>
                 </a:solidFill>
               </a:rPr>
-              <a:t> </a:t>
-            </a:r>
-            <a:r>
-              <a:rPr lang="en-US" dirty="0" err="1">
-                <a:solidFill>
-                  <a:srgbClr val="8A3FFC"/>
-                </a:solidFill>
-              </a:rPr>
-              <a:t>FunctionsQiskit</a:t>
-            </a:r>
-            <a:r>
-              <a:rPr lang="en-US" dirty="0">
-                <a:solidFill>
-                  <a:srgbClr val="8A3FFC"/>
-                </a:solidFill>
-              </a:rPr>
               <a:t> Functions</a:t>
             </a:r>
           </a:p>
@@ -29673,7 +31465,7 @@
 </p:sld>
 </file>
 
-<file path=ppt/slides/slide14.xml><?xml version="1.0" encoding="utf-8"?>
+<file path=ppt/slides/slide17.xml><?xml version="1.0" encoding="utf-8"?>
 <p:sld xmlns:a="http://schemas.openxmlformats.org/drawingml/2006/main" xmlns:r="http://schemas.openxmlformats.org/officeDocument/2006/relationships" xmlns:p="http://schemas.openxmlformats.org/presentationml/2006/main">
   <p:cSld>
     <p:spTree>
@@ -30186,7 +31978,7 @@
           </a:ln>
           <a:extLst>
             <a:ext uri="{C572A759-6A51-4108-AA02-DFA0A04FC94B}">
-              <ma14:wrappingTextBoxFlag xmlns="" xmlns:m="http://schemas.openxmlformats.org/officeDocument/2006/math" xmlns:a14="http://schemas.microsoft.com/office/drawing/2010/main" xmlns:ma14="http://schemas.microsoft.com/office/mac/drawingml/2011/main" val="1"/>
+              <ma14:wrappingTextBoxFlag xmlns:ma14="http://schemas.microsoft.com/office/mac/drawingml/2011/main" xmlns:a14="http://schemas.microsoft.com/office/drawing/2010/main" xmlns:m="http://schemas.openxmlformats.org/officeDocument/2006/math" xmlns="" val="1"/>
             </a:ext>
           </a:extLst>
         </p:spPr>
@@ -30275,7 +32067,7 @@
           </a:ln>
           <a:extLst>
             <a:ext uri="{C572A759-6A51-4108-AA02-DFA0A04FC94B}">
-              <ma14:wrappingTextBoxFlag xmlns="" xmlns:m="http://schemas.openxmlformats.org/officeDocument/2006/math" xmlns:a14="http://schemas.microsoft.com/office/drawing/2010/main" xmlns:ma14="http://schemas.microsoft.com/office/mac/drawingml/2011/main" val="1"/>
+              <ma14:wrappingTextBoxFlag xmlns:ma14="http://schemas.microsoft.com/office/mac/drawingml/2011/main" xmlns:a14="http://schemas.microsoft.com/office/drawing/2010/main" xmlns:m="http://schemas.openxmlformats.org/officeDocument/2006/math" xmlns="" val="1"/>
             </a:ext>
           </a:extLst>
         </p:spPr>
@@ -30358,6 +32150,102 @@
               <a:cs typeface="+mj-cs"/>
               <a:sym typeface="IBM Plex Sans Light"/>
             </a:endParaRPr>
+          </a:p>
+        </p:txBody>
+      </p:sp>
+      <p:sp>
+        <p:nvSpPr>
+          <p:cNvPr id="13" name="TextBox 12">
+            <a:extLst>
+              <a:ext uri="{FF2B5EF4-FFF2-40B4-BE49-F238E27FC236}">
+                <a16:creationId xmlns:a16="http://schemas.microsoft.com/office/drawing/2014/main" id="{B005F320-3BEB-9755-7AF8-2096691E5547}"/>
+              </a:ext>
+            </a:extLst>
+          </p:cNvPr>
+          <p:cNvSpPr txBox="1"/>
+          <p:nvPr/>
+        </p:nvSpPr>
+        <p:spPr>
+          <a:xfrm>
+            <a:off x="3759200" y="9624060"/>
+            <a:ext cx="7861111" cy="2692400"/>
+          </a:xfrm>
+          <a:prstGeom prst="rect">
+            <a:avLst/>
+          </a:prstGeom>
+          <a:ln w="12700">
+            <a:miter lim="400000"/>
+          </a:ln>
+          <a:extLst>
+            <a:ext uri="{C572A759-6A51-4108-AA02-DFA0A04FC94B}">
+              <ma14:wrappingTextBoxFlag xmlns:ma14="http://schemas.microsoft.com/office/mac/drawingml/2011/main" xmlns:a14="http://schemas.microsoft.com/office/drawing/2010/main" xmlns:m="http://schemas.openxmlformats.org/officeDocument/2006/math" xmlns="" val="1"/>
+            </a:ext>
+          </a:extLst>
+        </p:spPr>
+        <p:txBody>
+          <a:bodyPr wrap="square" lIns="0" tIns="0" rIns="0" bIns="0" rtlCol="0">
+            <a:noAutofit/>
+          </a:bodyPr>
+          <a:lstStyle/>
+          <a:p>
+            <a:pPr defTabSz="2438400">
+              <a:spcBef>
+                <a:spcPts val="2900"/>
+              </a:spcBef>
+              <a:buSzPct val="100000"/>
+            </a:pPr>
+            <a:r>
+              <a:rPr lang="en-US" sz="2800" kern="0" dirty="0">
+                <a:solidFill>
+                  <a:srgbClr val="000000"/>
+                </a:solidFill>
+                <a:ea typeface="+mj-ea"/>
+                <a:cs typeface="+mj-cs"/>
+                <a:sym typeface="IBM Plex Sans Light"/>
+              </a:rPr>
+              <a:t>Zlatko has several </a:t>
+            </a:r>
+            <a:r>
+              <a:rPr lang="en-US" sz="2800" kern="0" dirty="0">
+                <a:solidFill>
+                  <a:srgbClr val="8A3FFC"/>
+                </a:solidFill>
+                <a:ea typeface="+mj-ea"/>
+                <a:cs typeface="+mj-cs"/>
+                <a:sym typeface="IBM Plex Sans Light"/>
+              </a:rPr>
+              <a:t>presentations on noise </a:t>
+            </a:r>
+            <a:r>
+              <a:rPr lang="en-US" sz="2800" kern="0" dirty="0">
+                <a:solidFill>
+                  <a:srgbClr val="000000"/>
+                </a:solidFill>
+                <a:ea typeface="+mj-ea"/>
+                <a:cs typeface="+mj-cs"/>
+                <a:sym typeface="IBM Plex Sans Light"/>
+              </a:rPr>
+              <a:t>too.  One example, </a:t>
+            </a:r>
+          </a:p>
+          <a:p>
+            <a:pPr defTabSz="2438400">
+              <a:spcBef>
+                <a:spcPts val="2900"/>
+              </a:spcBef>
+              <a:buSzPct val="100000"/>
+            </a:pPr>
+            <a:r>
+              <a:rPr lang="en-US" sz="2800" kern="0" dirty="0">
+                <a:solidFill>
+                  <a:srgbClr val="000000"/>
+                </a:solidFill>
+                <a:ea typeface="+mj-ea"/>
+                <a:cs typeface="+mj-cs"/>
+                <a:sym typeface="IBM Plex Sans Light"/>
+              </a:rPr>
+              <a:t>https://www.zlatko-minev.com/blog/quantum-error-mitigation-bss23</a:t>
+            </a:r>
           </a:p>
         </p:txBody>
       </p:sp>
@@ -30375,7 +32263,368 @@
 </p:sld>
 </file>
 
-<file path=ppt/slides/slide15.xml><?xml version="1.0" encoding="utf-8"?>
+<file path=ppt/slides/slide18.xml><?xml version="1.0" encoding="utf-8"?>
+<p:sld xmlns:a="http://schemas.openxmlformats.org/drawingml/2006/main" xmlns:r="http://schemas.openxmlformats.org/officeDocument/2006/relationships" xmlns:p="http://schemas.openxmlformats.org/presentationml/2006/main">
+  <p:cSld>
+    <p:spTree>
+      <p:nvGrpSpPr>
+        <p:cNvPr id="1" name="">
+          <a:extLst>
+            <a:ext uri="{FF2B5EF4-FFF2-40B4-BE49-F238E27FC236}">
+              <a16:creationId xmlns:a16="http://schemas.microsoft.com/office/drawing/2014/main" id="{CE187736-EAA0-4D04-51AF-BA330D35A3C6}"/>
+            </a:ext>
+          </a:extLst>
+        </p:cNvPr>
+        <p:cNvGrpSpPr/>
+        <p:nvPr/>
+      </p:nvGrpSpPr>
+      <p:grpSpPr>
+        <a:xfrm>
+          <a:off x="0" y="0"/>
+          <a:ext cx="0" cy="0"/>
+          <a:chOff x="0" y="0"/>
+          <a:chExt cx="0" cy="0"/>
+        </a:xfrm>
+      </p:grpSpPr>
+      <p:sp>
+        <p:nvSpPr>
+          <p:cNvPr id="2" name="Title 1">
+            <a:extLst>
+              <a:ext uri="{FF2B5EF4-FFF2-40B4-BE49-F238E27FC236}">
+                <a16:creationId xmlns:a16="http://schemas.microsoft.com/office/drawing/2014/main" id="{E9274BFE-6D64-741E-086F-9BB6BBE32A8C}"/>
+              </a:ext>
+            </a:extLst>
+          </p:cNvPr>
+          <p:cNvSpPr>
+            <a:spLocks noGrp="1"/>
+          </p:cNvSpPr>
+          <p:nvPr>
+            <p:ph type="title"/>
+          </p:nvPr>
+        </p:nvSpPr>
+        <p:spPr>
+          <a:xfrm>
+            <a:off x="576072" y="384048"/>
+            <a:ext cx="11045825" cy="1324293"/>
+          </a:xfrm>
+        </p:spPr>
+        <p:txBody>
+          <a:bodyPr/>
+          <a:lstStyle/>
+          <a:p>
+            <a:r>
+              <a:rPr lang="en-US" dirty="0"/>
+              <a:t>QC Biggest Challenge?</a:t>
+            </a:r>
+          </a:p>
+        </p:txBody>
+      </p:sp>
+      <p:sp>
+        <p:nvSpPr>
+          <p:cNvPr id="7" name="Footer Placeholder 6">
+            <a:extLst>
+              <a:ext uri="{FF2B5EF4-FFF2-40B4-BE49-F238E27FC236}">
+                <a16:creationId xmlns:a16="http://schemas.microsoft.com/office/drawing/2014/main" id="{D2361A16-3F32-617B-57E0-FAD41DD2BAF7}"/>
+              </a:ext>
+            </a:extLst>
+          </p:cNvPr>
+          <p:cNvSpPr>
+            <a:spLocks noGrp="1"/>
+          </p:cNvSpPr>
+          <p:nvPr>
+            <p:ph type="ftr" sz="quarter" idx="13"/>
+          </p:nvPr>
+        </p:nvSpPr>
+        <p:spPr>
+          <a:xfrm>
+            <a:off x="576072" y="12801600"/>
+            <a:ext cx="4956176" cy="381000"/>
+          </a:xfrm>
+        </p:spPr>
+        <p:txBody>
+          <a:bodyPr/>
+          <a:lstStyle/>
+          <a:p>
+            <a:r>
+              <a:rPr lang="en-US"/>
+              <a:t>Qiskit Fall Fest 2025</a:t>
+            </a:r>
+            <a:endParaRPr lang="en-US" dirty="0"/>
+          </a:p>
+        </p:txBody>
+      </p:sp>
+      <p:pic>
+        <p:nvPicPr>
+          <p:cNvPr id="8" name="Picture 7">
+            <a:extLst>
+              <a:ext uri="{FF2B5EF4-FFF2-40B4-BE49-F238E27FC236}">
+                <a16:creationId xmlns:a16="http://schemas.microsoft.com/office/drawing/2014/main" id="{5E0CC37D-485A-98FB-961F-F6DBCC8ECFAC}"/>
+              </a:ext>
+            </a:extLst>
+          </p:cNvPr>
+          <p:cNvPicPr>
+            <a:picLocks noChangeAspect="1"/>
+          </p:cNvPicPr>
+          <p:nvPr/>
+        </p:nvPicPr>
+        <p:blipFill>
+          <a:blip r:embed="rId2">
+            <a:extLst>
+              <a:ext uri="{96DAC541-7B7A-43D3-8B79-37D633B846F1}">
+                <asvg:svgBlip xmlns:asvg="http://schemas.microsoft.com/office/drawing/2016/SVG/main" r:embed="rId3"/>
+              </a:ext>
+            </a:extLst>
+          </a:blip>
+          <a:srcRect/>
+          <a:stretch/>
+        </p:blipFill>
+        <p:spPr>
+          <a:xfrm>
+            <a:off x="21926030" y="11348844"/>
+            <a:ext cx="1892302" cy="1892302"/>
+          </a:xfrm>
+          <a:prstGeom prst="rect">
+            <a:avLst/>
+          </a:prstGeom>
+        </p:spPr>
+      </p:pic>
+      <p:sp>
+        <p:nvSpPr>
+          <p:cNvPr id="3" name="Text Placeholder 2">
+            <a:extLst>
+              <a:ext uri="{FF2B5EF4-FFF2-40B4-BE49-F238E27FC236}">
+                <a16:creationId xmlns:a16="http://schemas.microsoft.com/office/drawing/2014/main" id="{B846DFA3-BA05-7E41-8B35-622B5226E7A9}"/>
+              </a:ext>
+            </a:extLst>
+          </p:cNvPr>
+          <p:cNvSpPr>
+            <a:spLocks noGrp="1"/>
+          </p:cNvSpPr>
+          <p:nvPr>
+            <p:ph type="body" sz="quarter" idx="11"/>
+          </p:nvPr>
+        </p:nvSpPr>
+        <p:spPr>
+          <a:xfrm>
+            <a:off x="12763500" y="576073"/>
+            <a:ext cx="4953000" cy="2390648"/>
+          </a:xfrm>
+        </p:spPr>
+        <p:txBody>
+          <a:bodyPr/>
+          <a:lstStyle/>
+          <a:p>
+            <a:r>
+              <a:rPr lang="en-US" b="1" dirty="0">
+                <a:solidFill>
+                  <a:schemeClr val="accent2"/>
+                </a:solidFill>
+              </a:rPr>
+              <a:t>Zlatko says, “Noise.” (2022)</a:t>
+            </a:r>
+          </a:p>
+          <a:p>
+            <a:endParaRPr lang="en-US" b="1" dirty="0">
+              <a:solidFill>
+                <a:schemeClr val="accent2"/>
+              </a:solidFill>
+            </a:endParaRPr>
+          </a:p>
+          <a:p>
+            <a:r>
+              <a:rPr lang="en-US" dirty="0"/>
+              <a:t>https://www.zlatko-minev.com/blog/pec-talk</a:t>
+            </a:r>
+          </a:p>
+          <a:p>
+            <a:endParaRPr lang="en-US" b="1" dirty="0">
+              <a:solidFill>
+                <a:schemeClr val="accent2"/>
+              </a:solidFill>
+            </a:endParaRPr>
+          </a:p>
+          <a:p>
+            <a:endParaRPr lang="en-US" b="1" dirty="0">
+              <a:solidFill>
+                <a:schemeClr val="accent2"/>
+              </a:solidFill>
+            </a:endParaRPr>
+          </a:p>
+          <a:p>
+            <a:endParaRPr lang="en-US" dirty="0"/>
+          </a:p>
+          <a:p>
+            <a:endParaRPr lang="en-US" dirty="0"/>
+          </a:p>
+          <a:p>
+            <a:endParaRPr lang="en-US" dirty="0"/>
+          </a:p>
+          <a:p>
+            <a:endParaRPr lang="en-US" dirty="0"/>
+          </a:p>
+        </p:txBody>
+      </p:sp>
+      <p:sp>
+        <p:nvSpPr>
+          <p:cNvPr id="11" name="Text Placeholder 10">
+            <a:extLst>
+              <a:ext uri="{FF2B5EF4-FFF2-40B4-BE49-F238E27FC236}">
+                <a16:creationId xmlns:a16="http://schemas.microsoft.com/office/drawing/2014/main" id="{5881698D-E68F-1A70-6F93-B67E4C32462F}"/>
+              </a:ext>
+            </a:extLst>
+          </p:cNvPr>
+          <p:cNvSpPr>
+            <a:spLocks noGrp="1"/>
+          </p:cNvSpPr>
+          <p:nvPr>
+            <p:ph type="body" sz="quarter" idx="12"/>
+          </p:nvPr>
+        </p:nvSpPr>
+        <p:spPr>
+          <a:xfrm>
+            <a:off x="18859500" y="576073"/>
+            <a:ext cx="4953000" cy="1892302"/>
+          </a:xfrm>
+        </p:spPr>
+        <p:txBody>
+          <a:bodyPr/>
+          <a:lstStyle/>
+          <a:p>
+            <a:r>
+              <a:rPr lang="en-US" b="1" dirty="0">
+                <a:solidFill>
+                  <a:schemeClr val="accent2"/>
+                </a:solidFill>
+              </a:rPr>
+              <a:t>How Deal with Noise?</a:t>
+            </a:r>
+          </a:p>
+          <a:p>
+            <a:endParaRPr lang="en-US" b="1" dirty="0">
+              <a:solidFill>
+                <a:schemeClr val="accent2"/>
+              </a:solidFill>
+            </a:endParaRPr>
+          </a:p>
+          <a:p>
+            <a:r>
+              <a:rPr lang="en-US" dirty="0"/>
+              <a:t>Depends on the type of noise.</a:t>
+            </a:r>
+          </a:p>
+          <a:p>
+            <a:endParaRPr lang="en-US" dirty="0"/>
+          </a:p>
+          <a:p>
+            <a:endParaRPr lang="en-US" dirty="0"/>
+          </a:p>
+        </p:txBody>
+      </p:sp>
+      <p:pic>
+        <p:nvPicPr>
+          <p:cNvPr id="5" name="Picture 4" descr="A white background with blue text&#10;&#10;AI-generated content may be incorrect.">
+            <a:extLst>
+              <a:ext uri="{FF2B5EF4-FFF2-40B4-BE49-F238E27FC236}">
+                <a16:creationId xmlns:a16="http://schemas.microsoft.com/office/drawing/2014/main" id="{F72D4BED-4208-4F27-A43B-CC7C167381E0}"/>
+              </a:ext>
+            </a:extLst>
+          </p:cNvPr>
+          <p:cNvPicPr>
+            <a:picLocks noChangeAspect="1"/>
+          </p:cNvPicPr>
+          <p:nvPr/>
+        </p:nvPicPr>
+        <p:blipFill>
+          <a:blip r:embed="rId4"/>
+          <a:stretch>
+            <a:fillRect/>
+          </a:stretch>
+        </p:blipFill>
+        <p:spPr>
+          <a:xfrm>
+            <a:off x="574675" y="2010283"/>
+            <a:ext cx="9112718" cy="4940554"/>
+          </a:xfrm>
+          <a:prstGeom prst="rect">
+            <a:avLst/>
+          </a:prstGeom>
+        </p:spPr>
+      </p:pic>
+      <p:pic>
+        <p:nvPicPr>
+          <p:cNvPr id="10" name="Picture 9" descr="A computer screen shot&#10;&#10;AI-generated content may be incorrect.">
+            <a:extLst>
+              <a:ext uri="{FF2B5EF4-FFF2-40B4-BE49-F238E27FC236}">
+                <a16:creationId xmlns:a16="http://schemas.microsoft.com/office/drawing/2014/main" id="{FA322D28-4F48-1656-B9E1-E61AEECD2726}"/>
+              </a:ext>
+            </a:extLst>
+          </p:cNvPr>
+          <p:cNvPicPr>
+            <a:picLocks noChangeAspect="1"/>
+          </p:cNvPicPr>
+          <p:nvPr/>
+        </p:nvPicPr>
+        <p:blipFill>
+          <a:blip r:embed="rId5"/>
+          <a:stretch>
+            <a:fillRect/>
+          </a:stretch>
+        </p:blipFill>
+        <p:spPr>
+          <a:xfrm>
+            <a:off x="10419344" y="3100639"/>
+            <a:ext cx="13295998" cy="7514722"/>
+          </a:xfrm>
+          <a:prstGeom prst="rect">
+            <a:avLst/>
+          </a:prstGeom>
+        </p:spPr>
+      </p:pic>
+      <p:pic>
+        <p:nvPicPr>
+          <p:cNvPr id="14" name="Picture 13" descr="A screenshot of a computer error message&#10;&#10;AI-generated content may be incorrect.">
+            <a:extLst>
+              <a:ext uri="{FF2B5EF4-FFF2-40B4-BE49-F238E27FC236}">
+                <a16:creationId xmlns:a16="http://schemas.microsoft.com/office/drawing/2014/main" id="{63FF0337-AE77-9E4E-B2F1-20C8BC19E52A}"/>
+              </a:ext>
+            </a:extLst>
+          </p:cNvPr>
+          <p:cNvPicPr>
+            <a:picLocks noChangeAspect="1"/>
+          </p:cNvPicPr>
+          <p:nvPr/>
+        </p:nvPicPr>
+        <p:blipFill>
+          <a:blip r:embed="rId6"/>
+          <a:stretch>
+            <a:fillRect/>
+          </a:stretch>
+        </p:blipFill>
+        <p:spPr>
+          <a:xfrm>
+            <a:off x="555624" y="7559104"/>
+            <a:ext cx="9150820" cy="4978656"/>
+          </a:xfrm>
+          <a:prstGeom prst="rect">
+            <a:avLst/>
+          </a:prstGeom>
+        </p:spPr>
+      </p:pic>
+    </p:spTree>
+    <p:extLst>
+      <p:ext uri="{BB962C8B-B14F-4D97-AF65-F5344CB8AC3E}">
+        <p14:creationId xmlns:p14="http://schemas.microsoft.com/office/powerpoint/2010/main" val="1316515393"/>
+      </p:ext>
+    </p:extLst>
+  </p:cSld>
+  <p:clrMapOvr>
+    <a:masterClrMapping/>
+  </p:clrMapOvr>
+  <p:transition spd="med"/>
+</p:sld>
+</file>
+
+<file path=ppt/slides/slide19.xml><?xml version="1.0" encoding="utf-8"?>
 <p:sld xmlns:a="http://schemas.openxmlformats.org/drawingml/2006/main" xmlns:r="http://schemas.openxmlformats.org/officeDocument/2006/relationships" xmlns:p="http://schemas.openxmlformats.org/presentationml/2006/main">
   <p:cSld>
     <p:spTree>
@@ -30903,1029 +33152,6 @@
     <a:masterClrMapping/>
   </p:clrMapOvr>
   <p:transition spd="med"/>
-</p:sld>
-</file>
-
-<file path=ppt/slides/slide16.xml><?xml version="1.0" encoding="utf-8"?>
-<p:sld xmlns:a="http://schemas.openxmlformats.org/drawingml/2006/main" xmlns:r="http://schemas.openxmlformats.org/officeDocument/2006/relationships" xmlns:p="http://schemas.openxmlformats.org/presentationml/2006/main">
-  <p:cSld>
-    <p:spTree>
-      <p:nvGrpSpPr>
-        <p:cNvPr id="1" name="">
-          <a:extLst>
-            <a:ext uri="{FF2B5EF4-FFF2-40B4-BE49-F238E27FC236}">
-              <a16:creationId xmlns:a16="http://schemas.microsoft.com/office/drawing/2014/main" id="{E143492A-6B8C-9950-1EA8-B60F628769B6}"/>
-            </a:ext>
-          </a:extLst>
-        </p:cNvPr>
-        <p:cNvGrpSpPr/>
-        <p:nvPr/>
-      </p:nvGrpSpPr>
-      <p:grpSpPr>
-        <a:xfrm>
-          <a:off x="0" y="0"/>
-          <a:ext cx="0" cy="0"/>
-          <a:chOff x="0" y="0"/>
-          <a:chExt cx="0" cy="0"/>
-        </a:xfrm>
-      </p:grpSpPr>
-      <p:sp>
-        <p:nvSpPr>
-          <p:cNvPr id="6" name="object 6">
-            <a:extLst>
-              <a:ext uri="{FF2B5EF4-FFF2-40B4-BE49-F238E27FC236}">
-                <a16:creationId xmlns:a16="http://schemas.microsoft.com/office/drawing/2014/main" id="{85CDFE3C-F11E-4F45-718B-36E101E39A4F}"/>
-              </a:ext>
-            </a:extLst>
-          </p:cNvPr>
-          <p:cNvSpPr txBox="1">
-            <a:spLocks noGrp="1"/>
-          </p:cNvSpPr>
-          <p:nvPr>
-            <p:ph type="sldNum" sz="quarter" idx="7"/>
-          </p:nvPr>
-        </p:nvSpPr>
-        <p:spPr>
-          <a:xfrm>
-            <a:off x="34548056" y="19131093"/>
-            <a:ext cx="489374" cy="262914"/>
-          </a:xfrm>
-          <a:prstGeom prst="rect">
-            <a:avLst/>
-          </a:prstGeom>
-        </p:spPr>
-        <p:txBody>
-          <a:bodyPr vert="horz" wrap="square" lIns="0" tIns="20023" rIns="0" bIns="0" rtlCol="0" anchor="b" anchorCtr="0">
-            <a:spAutoFit/>
-          </a:bodyPr>
-          <a:lstStyle/>
-          <a:p>
-            <a:pPr marL="135543">
-              <a:spcBef>
-                <a:spcPts val="158"/>
-              </a:spcBef>
-            </a:pPr>
-            <a:fld id="{81D60167-4931-47E6-BA6A-407CBD079E47}" type="slidenum">
-              <a:rPr spc="73" dirty="0"/>
-              <a:pPr marL="135543">
-                <a:spcBef>
-                  <a:spcPts val="158"/>
-                </a:spcBef>
-              </a:pPr>
-              <a:t>16</a:t>
-            </a:fld>
-            <a:endParaRPr spc="73" dirty="0"/>
-          </a:p>
-        </p:txBody>
-      </p:sp>
-      <p:sp>
-        <p:nvSpPr>
-          <p:cNvPr id="8" name="Text Placeholder 4">
-            <a:extLst>
-              <a:ext uri="{FF2B5EF4-FFF2-40B4-BE49-F238E27FC236}">
-                <a16:creationId xmlns:a16="http://schemas.microsoft.com/office/drawing/2014/main" id="{DA7763F8-5543-2867-6BEE-AA99CC5F7E75}"/>
-              </a:ext>
-            </a:extLst>
-          </p:cNvPr>
-          <p:cNvSpPr txBox="1">
-            <a:spLocks/>
-          </p:cNvSpPr>
-          <p:nvPr/>
-        </p:nvSpPr>
-        <p:spPr>
-          <a:xfrm>
-            <a:off x="576072" y="576072"/>
-            <a:ext cx="10099675" cy="571500"/>
-          </a:xfrm>
-          <a:prstGeom prst="rect">
-            <a:avLst/>
-          </a:prstGeom>
-        </p:spPr>
-        <p:txBody>
-          <a:bodyPr/>
-          <a:lstStyle>
-            <a:lvl1pPr marL="0" marR="0" indent="0" algn="l" defTabSz="2438400" rtl="0" eaLnBrk="1" latinLnBrk="0" hangingPunct="1">
-              <a:lnSpc>
-                <a:spcPct val="110000"/>
-              </a:lnSpc>
-              <a:spcBef>
-                <a:spcPts val="0"/>
-              </a:spcBef>
-              <a:spcAft>
-                <a:spcPts val="0"/>
-              </a:spcAft>
-              <a:buClrTx/>
-              <a:buSzTx/>
-              <a:buFontTx/>
-              <a:buNone/>
-              <a:tabLst/>
-              <a:defRPr sz="3600" b="0" i="0" u="none" strike="noStrike" cap="none" spc="0" baseline="0">
-                <a:solidFill>
-                  <a:schemeClr val="tx1"/>
-                </a:solidFill>
-                <a:uFillTx/>
-                <a:latin typeface="+mj-lt"/>
-                <a:ea typeface="+mj-ea"/>
-                <a:cs typeface="+mj-cs"/>
-                <a:sym typeface="IBM Plex Sans Light"/>
-              </a:defRPr>
-            </a:lvl1pPr>
-            <a:lvl2pPr marL="329184" marR="0" indent="-329184" algn="l" defTabSz="2438400" rtl="0" eaLnBrk="1" latinLnBrk="0" hangingPunct="1">
-              <a:lnSpc>
-                <a:spcPct val="110000"/>
-              </a:lnSpc>
-              <a:spcBef>
-                <a:spcPts val="0"/>
-              </a:spcBef>
-              <a:spcAft>
-                <a:spcPts val="0"/>
-              </a:spcAft>
-              <a:buClrTx/>
-              <a:buSzPct val="100000"/>
-              <a:buFontTx/>
-              <a:buChar char="–"/>
-              <a:tabLst/>
-              <a:defRPr sz="3600" b="0" i="0" u="none" strike="noStrike" cap="none" spc="0" baseline="0">
-                <a:solidFill>
-                  <a:schemeClr val="tx1"/>
-                </a:solidFill>
-                <a:uFillTx/>
-                <a:latin typeface="+mj-lt"/>
-                <a:ea typeface="+mj-ea"/>
-                <a:cs typeface="+mj-cs"/>
-                <a:sym typeface="IBM Plex Sans Light"/>
-              </a:defRPr>
-            </a:lvl2pPr>
-            <a:lvl3pPr marL="658368" marR="0" indent="-329184" algn="l" defTabSz="2438400" rtl="0" eaLnBrk="1" latinLnBrk="0" hangingPunct="1">
-              <a:lnSpc>
-                <a:spcPct val="110000"/>
-              </a:lnSpc>
-              <a:spcBef>
-                <a:spcPts val="0"/>
-              </a:spcBef>
-              <a:spcAft>
-                <a:spcPts val="0"/>
-              </a:spcAft>
-              <a:buClrTx/>
-              <a:buSzPct val="100000"/>
-              <a:buFontTx/>
-              <a:buChar char="•"/>
-              <a:tabLst/>
-              <a:defRPr sz="3600" b="0" i="0" u="none" strike="noStrike" cap="none" spc="0" baseline="0">
-                <a:solidFill>
-                  <a:schemeClr val="tx1"/>
-                </a:solidFill>
-                <a:uFillTx/>
-                <a:latin typeface="+mj-lt"/>
-                <a:ea typeface="+mj-ea"/>
-                <a:cs typeface="+mj-cs"/>
-                <a:sym typeface="IBM Plex Sans Light"/>
-              </a:defRPr>
-            </a:lvl3pPr>
-            <a:lvl4pPr marL="987552" marR="0" indent="-329184" algn="l" defTabSz="2438400" rtl="0" eaLnBrk="1" latinLnBrk="0" hangingPunct="1">
-              <a:lnSpc>
-                <a:spcPct val="110000"/>
-              </a:lnSpc>
-              <a:spcBef>
-                <a:spcPts val="0"/>
-              </a:spcBef>
-              <a:spcAft>
-                <a:spcPts val="0"/>
-              </a:spcAft>
-              <a:buClrTx/>
-              <a:buSzPct val="100000"/>
-              <a:buFontTx/>
-              <a:buChar char="–"/>
-              <a:tabLst/>
-              <a:defRPr sz="3600" b="0" i="0" u="none" strike="noStrike" cap="none" spc="0" baseline="0">
-                <a:solidFill>
-                  <a:schemeClr val="tx1"/>
-                </a:solidFill>
-                <a:uFillTx/>
-                <a:latin typeface="+mj-lt"/>
-                <a:ea typeface="+mj-ea"/>
-                <a:cs typeface="+mj-cs"/>
-                <a:sym typeface="IBM Plex Sans Light"/>
-              </a:defRPr>
-            </a:lvl4pPr>
-            <a:lvl5pPr marL="1143000" marR="0" indent="-457200" algn="l" defTabSz="2438400" rtl="0" eaLnBrk="1" latinLnBrk="0" hangingPunct="1">
-              <a:lnSpc>
-                <a:spcPct val="110000"/>
-              </a:lnSpc>
-              <a:spcBef>
-                <a:spcPts val="2900"/>
-              </a:spcBef>
-              <a:spcAft>
-                <a:spcPts val="0"/>
-              </a:spcAft>
-              <a:buClrTx/>
-              <a:buSzPct val="100000"/>
-              <a:buFont typeface="Arial" panose="020B0604020202020204" pitchFamily="34" charset="0"/>
-              <a:buChar char="•"/>
-              <a:tabLst/>
-              <a:defRPr sz="3600" b="0" i="0" u="none" strike="noStrike" cap="none" spc="0" baseline="0">
-                <a:solidFill>
-                  <a:srgbClr val="000000"/>
-                </a:solidFill>
-                <a:uFillTx/>
-                <a:latin typeface="+mj-lt"/>
-                <a:ea typeface="+mj-ea"/>
-                <a:cs typeface="+mj-cs"/>
-                <a:sym typeface="IBM Plex Sans Light"/>
-              </a:defRPr>
-            </a:lvl5pPr>
-            <a:lvl6pPr marL="1843060" marR="0" indent="-389009" algn="l" defTabSz="2438400" rtl="0" eaLnBrk="1" latinLnBrk="0" hangingPunct="1">
-              <a:lnSpc>
-                <a:spcPct val="100000"/>
-              </a:lnSpc>
-              <a:spcBef>
-                <a:spcPts val="2900"/>
-              </a:spcBef>
-              <a:spcAft>
-                <a:spcPts val="0"/>
-              </a:spcAft>
-              <a:buClrTx/>
-              <a:buSzPct val="100000"/>
-              <a:buFontTx/>
-              <a:buChar char="»"/>
-              <a:tabLst/>
-              <a:defRPr sz="3600" b="0" i="0" u="none" strike="noStrike" cap="none" spc="0" baseline="0">
-                <a:solidFill>
-                  <a:srgbClr val="000000"/>
-                </a:solidFill>
-                <a:uFillTx/>
-                <a:latin typeface="+mj-lt"/>
-                <a:ea typeface="+mj-ea"/>
-                <a:cs typeface="+mj-cs"/>
-                <a:sym typeface="IBM Plex Sans Light"/>
-              </a:defRPr>
-            </a:lvl6pPr>
-            <a:lvl7pPr marL="2205631" marR="0" indent="-389009" algn="l" defTabSz="2438400" rtl="0" eaLnBrk="1" latinLnBrk="0" hangingPunct="1">
-              <a:lnSpc>
-                <a:spcPct val="100000"/>
-              </a:lnSpc>
-              <a:spcBef>
-                <a:spcPts val="2900"/>
-              </a:spcBef>
-              <a:spcAft>
-                <a:spcPts val="0"/>
-              </a:spcAft>
-              <a:buClrTx/>
-              <a:buSzPct val="100000"/>
-              <a:buFontTx/>
-              <a:buChar char="»"/>
-              <a:tabLst/>
-              <a:defRPr sz="3600" b="0" i="0" u="none" strike="noStrike" cap="none" spc="0" baseline="0">
-                <a:solidFill>
-                  <a:srgbClr val="000000"/>
-                </a:solidFill>
-                <a:uFillTx/>
-                <a:latin typeface="+mj-lt"/>
-                <a:ea typeface="+mj-ea"/>
-                <a:cs typeface="+mj-cs"/>
-                <a:sym typeface="IBM Plex Sans Light"/>
-              </a:defRPr>
-            </a:lvl7pPr>
-            <a:lvl8pPr marL="2568200" marR="0" indent="-389009" algn="l" defTabSz="2438400" rtl="0" eaLnBrk="1" latinLnBrk="0" hangingPunct="1">
-              <a:lnSpc>
-                <a:spcPct val="100000"/>
-              </a:lnSpc>
-              <a:spcBef>
-                <a:spcPts val="2900"/>
-              </a:spcBef>
-              <a:spcAft>
-                <a:spcPts val="0"/>
-              </a:spcAft>
-              <a:buClrTx/>
-              <a:buSzPct val="100000"/>
-              <a:buFontTx/>
-              <a:buChar char="»"/>
-              <a:tabLst/>
-              <a:defRPr sz="3600" b="0" i="0" u="none" strike="noStrike" cap="none" spc="0" baseline="0">
-                <a:solidFill>
-                  <a:srgbClr val="000000"/>
-                </a:solidFill>
-                <a:uFillTx/>
-                <a:latin typeface="+mj-lt"/>
-                <a:ea typeface="+mj-ea"/>
-                <a:cs typeface="+mj-cs"/>
-                <a:sym typeface="IBM Plex Sans Light"/>
-              </a:defRPr>
-            </a:lvl8pPr>
-            <a:lvl9pPr marL="2930769" marR="0" indent="-389009" algn="l" defTabSz="2438400" rtl="0" eaLnBrk="1" latinLnBrk="0" hangingPunct="1">
-              <a:lnSpc>
-                <a:spcPct val="100000"/>
-              </a:lnSpc>
-              <a:spcBef>
-                <a:spcPts val="2900"/>
-              </a:spcBef>
-              <a:spcAft>
-                <a:spcPts val="0"/>
-              </a:spcAft>
-              <a:buClrTx/>
-              <a:buSzPct val="100000"/>
-              <a:buFontTx/>
-              <a:buChar char="»"/>
-              <a:tabLst/>
-              <a:defRPr sz="3600" b="0" i="0" u="none" strike="noStrike" cap="none" spc="0" baseline="0">
-                <a:solidFill>
-                  <a:srgbClr val="000000"/>
-                </a:solidFill>
-                <a:uFillTx/>
-                <a:latin typeface="+mj-lt"/>
-                <a:ea typeface="+mj-ea"/>
-                <a:cs typeface="+mj-cs"/>
-                <a:sym typeface="IBM Plex Sans Light"/>
-              </a:defRPr>
-            </a:lvl9pPr>
-          </a:lstStyle>
-          <a:p>
-            <a:r>
-              <a:rPr lang="en-US" kern="0">
-                <a:solidFill>
-                  <a:srgbClr val="697077"/>
-                </a:solidFill>
-                <a:latin typeface="IBM Plex Mono" panose="020B0509050203000203" pitchFamily="49" charset="77"/>
-              </a:rPr>
-              <a:t>Qiskit Fall Fest 2025</a:t>
-            </a:r>
-            <a:endParaRPr lang="en-US" kern="0" dirty="0">
-              <a:solidFill>
-                <a:srgbClr val="697077"/>
-              </a:solidFill>
-              <a:latin typeface="IBM Plex Mono" panose="020B0509050203000203" pitchFamily="49" charset="77"/>
-            </a:endParaRPr>
-          </a:p>
-        </p:txBody>
-      </p:sp>
-      <p:sp>
-        <p:nvSpPr>
-          <p:cNvPr id="9" name="Title 2">
-            <a:extLst>
-              <a:ext uri="{FF2B5EF4-FFF2-40B4-BE49-F238E27FC236}">
-                <a16:creationId xmlns:a16="http://schemas.microsoft.com/office/drawing/2014/main" id="{F8DACD11-B02B-184F-A7C8-9683993F047D}"/>
-              </a:ext>
-            </a:extLst>
-          </p:cNvPr>
-          <p:cNvSpPr txBox="1">
-            <a:spLocks/>
-          </p:cNvSpPr>
-          <p:nvPr/>
-        </p:nvSpPr>
-        <p:spPr>
-          <a:xfrm>
-            <a:off x="576072" y="1527048"/>
-            <a:ext cx="10099675" cy="9337675"/>
-          </a:xfrm>
-          <a:prstGeom prst="rect">
-            <a:avLst/>
-          </a:prstGeom>
-        </p:spPr>
-        <p:txBody>
-          <a:bodyPr/>
-          <a:lstStyle>
-            <a:lvl1pPr marL="0" marR="0" indent="0" algn="l" defTabSz="2438400" rtl="0" eaLnBrk="1" latinLnBrk="0" hangingPunct="1">
-              <a:lnSpc>
-                <a:spcPct val="90000"/>
-              </a:lnSpc>
-              <a:spcBef>
-                <a:spcPts val="0"/>
-              </a:spcBef>
-              <a:spcAft>
-                <a:spcPts val="0"/>
-              </a:spcAft>
-              <a:buClrTx/>
-              <a:buSzTx/>
-              <a:buFontTx/>
-              <a:buNone/>
-              <a:tabLst/>
-              <a:defRPr sz="6400" b="0" i="0" u="none" strike="noStrike" cap="none" spc="0" baseline="0">
-                <a:solidFill>
-                  <a:schemeClr val="tx2"/>
-                </a:solidFill>
-                <a:uFillTx/>
-                <a:latin typeface="+mj-lt"/>
-                <a:ea typeface="+mj-ea"/>
-                <a:cs typeface="+mj-cs"/>
-                <a:sym typeface="IBM Plex Sans Light"/>
-              </a:defRPr>
-            </a:lvl1pPr>
-            <a:lvl2pPr marL="0" marR="0" indent="0" algn="l" defTabSz="2438400" rtl="0" eaLnBrk="1" latinLnBrk="0" hangingPunct="1">
-              <a:lnSpc>
-                <a:spcPct val="90000"/>
-              </a:lnSpc>
-              <a:spcBef>
-                <a:spcPts val="0"/>
-              </a:spcBef>
-              <a:spcAft>
-                <a:spcPts val="0"/>
-              </a:spcAft>
-              <a:buClrTx/>
-              <a:buSzTx/>
-              <a:buFontTx/>
-              <a:buNone/>
-              <a:tabLst/>
-              <a:defRPr sz="6400" b="0" i="0" u="none" strike="noStrike" cap="none" spc="0" baseline="0">
-                <a:solidFill>
-                  <a:srgbClr val="000000"/>
-                </a:solidFill>
-                <a:uFillTx/>
-                <a:latin typeface="+mj-lt"/>
-                <a:ea typeface="+mj-ea"/>
-                <a:cs typeface="+mj-cs"/>
-                <a:sym typeface="IBM Plex Sans Light"/>
-              </a:defRPr>
-            </a:lvl2pPr>
-            <a:lvl3pPr marL="0" marR="0" indent="0" algn="l" defTabSz="2438400" rtl="0" eaLnBrk="1" latinLnBrk="0" hangingPunct="1">
-              <a:lnSpc>
-                <a:spcPct val="90000"/>
-              </a:lnSpc>
-              <a:spcBef>
-                <a:spcPts val="0"/>
-              </a:spcBef>
-              <a:spcAft>
-                <a:spcPts val="0"/>
-              </a:spcAft>
-              <a:buClrTx/>
-              <a:buSzTx/>
-              <a:buFontTx/>
-              <a:buNone/>
-              <a:tabLst/>
-              <a:defRPr sz="6400" b="0" i="0" u="none" strike="noStrike" cap="none" spc="0" baseline="0">
-                <a:solidFill>
-                  <a:srgbClr val="000000"/>
-                </a:solidFill>
-                <a:uFillTx/>
-                <a:latin typeface="+mj-lt"/>
-                <a:ea typeface="+mj-ea"/>
-                <a:cs typeface="+mj-cs"/>
-                <a:sym typeface="IBM Plex Sans Light"/>
-              </a:defRPr>
-            </a:lvl3pPr>
-            <a:lvl4pPr marL="0" marR="0" indent="0" algn="l" defTabSz="2438400" rtl="0" eaLnBrk="1" latinLnBrk="0" hangingPunct="1">
-              <a:lnSpc>
-                <a:spcPct val="90000"/>
-              </a:lnSpc>
-              <a:spcBef>
-                <a:spcPts val="0"/>
-              </a:spcBef>
-              <a:spcAft>
-                <a:spcPts val="0"/>
-              </a:spcAft>
-              <a:buClrTx/>
-              <a:buSzTx/>
-              <a:buFontTx/>
-              <a:buNone/>
-              <a:tabLst/>
-              <a:defRPr sz="6400" b="0" i="0" u="none" strike="noStrike" cap="none" spc="0" baseline="0">
-                <a:solidFill>
-                  <a:srgbClr val="000000"/>
-                </a:solidFill>
-                <a:uFillTx/>
-                <a:latin typeface="+mj-lt"/>
-                <a:ea typeface="+mj-ea"/>
-                <a:cs typeface="+mj-cs"/>
-                <a:sym typeface="IBM Plex Sans Light"/>
-              </a:defRPr>
-            </a:lvl4pPr>
-            <a:lvl5pPr marL="0" marR="0" indent="0" algn="l" defTabSz="2438400" rtl="0" eaLnBrk="1" latinLnBrk="0" hangingPunct="1">
-              <a:lnSpc>
-                <a:spcPct val="90000"/>
-              </a:lnSpc>
-              <a:spcBef>
-                <a:spcPts val="0"/>
-              </a:spcBef>
-              <a:spcAft>
-                <a:spcPts val="0"/>
-              </a:spcAft>
-              <a:buClrTx/>
-              <a:buSzTx/>
-              <a:buFontTx/>
-              <a:buNone/>
-              <a:tabLst/>
-              <a:defRPr sz="6400" b="0" i="0" u="none" strike="noStrike" cap="none" spc="0" baseline="0">
-                <a:solidFill>
-                  <a:srgbClr val="000000"/>
-                </a:solidFill>
-                <a:uFillTx/>
-                <a:latin typeface="+mj-lt"/>
-                <a:ea typeface="+mj-ea"/>
-                <a:cs typeface="+mj-cs"/>
-                <a:sym typeface="IBM Plex Sans Light"/>
-              </a:defRPr>
-            </a:lvl5pPr>
-            <a:lvl6pPr marL="0" marR="0" indent="362568" algn="l" defTabSz="2438400" rtl="0" eaLnBrk="1" latinLnBrk="0" hangingPunct="1">
-              <a:lnSpc>
-                <a:spcPct val="90000"/>
-              </a:lnSpc>
-              <a:spcBef>
-                <a:spcPts val="0"/>
-              </a:spcBef>
-              <a:spcAft>
-                <a:spcPts val="0"/>
-              </a:spcAft>
-              <a:buClrTx/>
-              <a:buSzTx/>
-              <a:buFontTx/>
-              <a:buNone/>
-              <a:tabLst/>
-              <a:defRPr sz="6400" b="0" i="0" u="none" strike="noStrike" cap="none" spc="0" baseline="0">
-                <a:solidFill>
-                  <a:srgbClr val="000000"/>
-                </a:solidFill>
-                <a:uFillTx/>
-                <a:latin typeface="+mj-lt"/>
-                <a:ea typeface="+mj-ea"/>
-                <a:cs typeface="+mj-cs"/>
-                <a:sym typeface="IBM Plex Sans Light"/>
-              </a:defRPr>
-            </a:lvl6pPr>
-            <a:lvl7pPr marL="0" marR="0" indent="725139" algn="l" defTabSz="2438400" rtl="0" eaLnBrk="1" latinLnBrk="0" hangingPunct="1">
-              <a:lnSpc>
-                <a:spcPct val="90000"/>
-              </a:lnSpc>
-              <a:spcBef>
-                <a:spcPts val="0"/>
-              </a:spcBef>
-              <a:spcAft>
-                <a:spcPts val="0"/>
-              </a:spcAft>
-              <a:buClrTx/>
-              <a:buSzTx/>
-              <a:buFontTx/>
-              <a:buNone/>
-              <a:tabLst/>
-              <a:defRPr sz="6400" b="0" i="0" u="none" strike="noStrike" cap="none" spc="0" baseline="0">
-                <a:solidFill>
-                  <a:srgbClr val="000000"/>
-                </a:solidFill>
-                <a:uFillTx/>
-                <a:latin typeface="+mj-lt"/>
-                <a:ea typeface="+mj-ea"/>
-                <a:cs typeface="+mj-cs"/>
-                <a:sym typeface="IBM Plex Sans Light"/>
-              </a:defRPr>
-            </a:lvl7pPr>
-            <a:lvl8pPr marL="0" marR="0" indent="1087706" algn="l" defTabSz="2438400" rtl="0" eaLnBrk="1" latinLnBrk="0" hangingPunct="1">
-              <a:lnSpc>
-                <a:spcPct val="90000"/>
-              </a:lnSpc>
-              <a:spcBef>
-                <a:spcPts val="0"/>
-              </a:spcBef>
-              <a:spcAft>
-                <a:spcPts val="0"/>
-              </a:spcAft>
-              <a:buClrTx/>
-              <a:buSzTx/>
-              <a:buFontTx/>
-              <a:buNone/>
-              <a:tabLst/>
-              <a:defRPr sz="6400" b="0" i="0" u="none" strike="noStrike" cap="none" spc="0" baseline="0">
-                <a:solidFill>
-                  <a:srgbClr val="000000"/>
-                </a:solidFill>
-                <a:uFillTx/>
-                <a:latin typeface="+mj-lt"/>
-                <a:ea typeface="+mj-ea"/>
-                <a:cs typeface="+mj-cs"/>
-                <a:sym typeface="IBM Plex Sans Light"/>
-              </a:defRPr>
-            </a:lvl8pPr>
-            <a:lvl9pPr marL="0" marR="0" indent="1450276" algn="l" defTabSz="2438400" rtl="0" eaLnBrk="1" latinLnBrk="0" hangingPunct="1">
-              <a:lnSpc>
-                <a:spcPct val="90000"/>
-              </a:lnSpc>
-              <a:spcBef>
-                <a:spcPts val="0"/>
-              </a:spcBef>
-              <a:spcAft>
-                <a:spcPts val="0"/>
-              </a:spcAft>
-              <a:buClrTx/>
-              <a:buSzTx/>
-              <a:buFontTx/>
-              <a:buNone/>
-              <a:tabLst/>
-              <a:defRPr sz="6400" b="0" i="0" u="none" strike="noStrike" cap="none" spc="0" baseline="0">
-                <a:solidFill>
-                  <a:srgbClr val="000000"/>
-                </a:solidFill>
-                <a:uFillTx/>
-                <a:latin typeface="+mj-lt"/>
-                <a:ea typeface="+mj-ea"/>
-                <a:cs typeface="+mj-cs"/>
-                <a:sym typeface="IBM Plex Sans Light"/>
-              </a:defRPr>
-            </a:lvl9pPr>
-          </a:lstStyle>
-          <a:p>
-            <a:r>
-              <a:rPr lang="en-US" kern="0" dirty="0">
-                <a:solidFill>
-                  <a:schemeClr val="tx1"/>
-                </a:solidFill>
-              </a:rPr>
-              <a:t>Thanks for Coming!!!</a:t>
-            </a:r>
-            <a:br>
-              <a:rPr lang="en-US" kern="0" dirty="0">
-                <a:solidFill>
-                  <a:schemeClr val="tx1"/>
-                </a:solidFill>
-              </a:rPr>
-            </a:br>
-            <a:endParaRPr lang="en-US" kern="0" dirty="0">
-              <a:solidFill>
-                <a:schemeClr val="tx1"/>
-              </a:solidFill>
-            </a:endParaRPr>
-          </a:p>
-        </p:txBody>
-      </p:sp>
-      <p:sp>
-        <p:nvSpPr>
-          <p:cNvPr id="10" name="Text Placeholder 6">
-            <a:extLst>
-              <a:ext uri="{FF2B5EF4-FFF2-40B4-BE49-F238E27FC236}">
-                <a16:creationId xmlns:a16="http://schemas.microsoft.com/office/drawing/2014/main" id="{2E9214AB-CC49-1F4B-7CF2-9C04DA5EE615}"/>
-              </a:ext>
-            </a:extLst>
-          </p:cNvPr>
-          <p:cNvSpPr txBox="1">
-            <a:spLocks/>
-          </p:cNvSpPr>
-          <p:nvPr/>
-        </p:nvSpPr>
-        <p:spPr>
-          <a:xfrm>
-            <a:off x="568325" y="4253501"/>
-            <a:ext cx="9048286" cy="7935451"/>
-          </a:xfrm>
-          <a:prstGeom prst="rect">
-            <a:avLst/>
-          </a:prstGeom>
-        </p:spPr>
-        <p:txBody>
-          <a:bodyPr vert="horz" lIns="0" tIns="0" rIns="0" bIns="0" rtlCol="0" anchor="t"/>
-          <a:lstStyle>
-            <a:defPPr>
-              <a:defRPr lang="en-US"/>
-            </a:defPPr>
-            <a:lvl1pPr marL="0" algn="l" defTabSz="1829379" rtl="0" eaLnBrk="1" latinLnBrk="0" hangingPunct="1">
-              <a:defRPr sz="1600" b="0" i="0" kern="1200">
-                <a:solidFill>
-                  <a:schemeClr val="tx1"/>
-                </a:solidFill>
-                <a:latin typeface="IBM Plex Sans" panose="020B0503050203000203" pitchFamily="34" charset="0"/>
-                <a:ea typeface="+mn-ea"/>
-                <a:cs typeface="+mn-cs"/>
-              </a:defRPr>
-            </a:lvl1pPr>
-            <a:lvl2pPr marL="914688" algn="l" defTabSz="1829379" rtl="0" eaLnBrk="1" latinLnBrk="0" hangingPunct="1">
-              <a:defRPr sz="3600" kern="1200">
-                <a:solidFill>
-                  <a:schemeClr val="tx1"/>
-                </a:solidFill>
-                <a:latin typeface="+mn-lt"/>
-                <a:ea typeface="+mn-ea"/>
-                <a:cs typeface="+mn-cs"/>
-              </a:defRPr>
-            </a:lvl2pPr>
-            <a:lvl3pPr marL="1829379" algn="l" defTabSz="1829379" rtl="0" eaLnBrk="1" latinLnBrk="0" hangingPunct="1">
-              <a:defRPr sz="3600" kern="1200">
-                <a:solidFill>
-                  <a:schemeClr val="tx1"/>
-                </a:solidFill>
-                <a:latin typeface="+mn-lt"/>
-                <a:ea typeface="+mn-ea"/>
-                <a:cs typeface="+mn-cs"/>
-              </a:defRPr>
-            </a:lvl3pPr>
-            <a:lvl4pPr marL="2744068" algn="l" defTabSz="1829379" rtl="0" eaLnBrk="1" latinLnBrk="0" hangingPunct="1">
-              <a:defRPr sz="3600" kern="1200">
-                <a:solidFill>
-                  <a:schemeClr val="tx1"/>
-                </a:solidFill>
-                <a:latin typeface="+mn-lt"/>
-                <a:ea typeface="+mn-ea"/>
-                <a:cs typeface="+mn-cs"/>
-              </a:defRPr>
-            </a:lvl4pPr>
-            <a:lvl5pPr marL="3658759" algn="l" defTabSz="1829379" rtl="0" eaLnBrk="1" latinLnBrk="0" hangingPunct="1">
-              <a:defRPr sz="3600" kern="1200">
-                <a:solidFill>
-                  <a:schemeClr val="tx1"/>
-                </a:solidFill>
-                <a:latin typeface="+mn-lt"/>
-                <a:ea typeface="+mn-ea"/>
-                <a:cs typeface="+mn-cs"/>
-              </a:defRPr>
-            </a:lvl5pPr>
-            <a:lvl6pPr marL="4573447" algn="l" defTabSz="1829379" rtl="0" eaLnBrk="1" latinLnBrk="0" hangingPunct="1">
-              <a:defRPr sz="3600" kern="1200">
-                <a:solidFill>
-                  <a:schemeClr val="tx1"/>
-                </a:solidFill>
-                <a:latin typeface="+mn-lt"/>
-                <a:ea typeface="+mn-ea"/>
-                <a:cs typeface="+mn-cs"/>
-              </a:defRPr>
-            </a:lvl6pPr>
-            <a:lvl7pPr marL="5488138" algn="l" defTabSz="1829379" rtl="0" eaLnBrk="1" latinLnBrk="0" hangingPunct="1">
-              <a:defRPr sz="3600" kern="1200">
-                <a:solidFill>
-                  <a:schemeClr val="tx1"/>
-                </a:solidFill>
-                <a:latin typeface="+mn-lt"/>
-                <a:ea typeface="+mn-ea"/>
-                <a:cs typeface="+mn-cs"/>
-              </a:defRPr>
-            </a:lvl7pPr>
-            <a:lvl8pPr marL="6402827" algn="l" defTabSz="1829379" rtl="0" eaLnBrk="1" latinLnBrk="0" hangingPunct="1">
-              <a:defRPr sz="3600" kern="1200">
-                <a:solidFill>
-                  <a:schemeClr val="tx1"/>
-                </a:solidFill>
-                <a:latin typeface="+mn-lt"/>
-                <a:ea typeface="+mn-ea"/>
-                <a:cs typeface="+mn-cs"/>
-              </a:defRPr>
-            </a:lvl8pPr>
-            <a:lvl9pPr marL="7317518" algn="l" defTabSz="1829379" rtl="0" eaLnBrk="1" latinLnBrk="0" hangingPunct="1">
-              <a:defRPr sz="3600" kern="1200">
-                <a:solidFill>
-                  <a:schemeClr val="tx1"/>
-                </a:solidFill>
-                <a:latin typeface="+mn-lt"/>
-                <a:ea typeface="+mn-ea"/>
-                <a:cs typeface="+mn-cs"/>
-              </a:defRPr>
-            </a:lvl9pPr>
-          </a:lstStyle>
-          <a:p>
-            <a:endParaRPr lang="en-US" sz="2800" b="1" dirty="0">
-              <a:effectLst/>
-              <a:latin typeface="+mj-lt"/>
-            </a:endParaRPr>
-          </a:p>
-          <a:p>
-            <a:endParaRPr lang="en-US" sz="2800" b="1" dirty="0">
-              <a:latin typeface="+mj-lt"/>
-            </a:endParaRPr>
-          </a:p>
-          <a:p>
-            <a:r>
-              <a:rPr lang="en-US" sz="2800" b="1" dirty="0">
-                <a:effectLst/>
-                <a:latin typeface="+mj-lt"/>
-              </a:rPr>
-              <a:t>Deadline for Submissions: </a:t>
-            </a:r>
-            <a:r>
-              <a:rPr lang="en-US" sz="2800" dirty="0">
-                <a:latin typeface="+mj-lt"/>
-              </a:rPr>
-              <a:t>Monday Nov 24, 10 am PT</a:t>
-            </a:r>
-          </a:p>
-          <a:p>
-            <a:endParaRPr lang="en-US" sz="2800" dirty="0">
-              <a:effectLst/>
-              <a:latin typeface="+mj-lt"/>
-            </a:endParaRPr>
-          </a:p>
-          <a:p>
-            <a:endParaRPr lang="en-US" sz="2800" dirty="0">
-              <a:effectLst/>
-              <a:latin typeface="+mj-lt"/>
-            </a:endParaRPr>
-          </a:p>
-          <a:p>
-            <a:endParaRPr lang="en-US" sz="2800" b="1" dirty="0">
-              <a:latin typeface="+mj-lt"/>
-            </a:endParaRPr>
-          </a:p>
-          <a:p>
-            <a:r>
-              <a:rPr lang="en-US" sz="2800" b="1" dirty="0">
-                <a:latin typeface="+mj-lt"/>
-              </a:rPr>
-              <a:t>New Zoom Meetup: </a:t>
-            </a:r>
-            <a:r>
-              <a:rPr lang="en-US" sz="2800" dirty="0">
-                <a:latin typeface="+mj-lt"/>
-              </a:rPr>
-              <a:t>Tuesday Oct 28, 6 pm PT</a:t>
-            </a:r>
-          </a:p>
-          <a:p>
-            <a:endParaRPr lang="en-US" sz="2800" dirty="0">
-              <a:latin typeface="+mj-lt"/>
-            </a:endParaRPr>
-          </a:p>
-          <a:p>
-            <a:endParaRPr lang="en-US" sz="2800" b="1" dirty="0">
-              <a:latin typeface="+mj-lt"/>
-            </a:endParaRPr>
-          </a:p>
-          <a:p>
-            <a:endParaRPr lang="en-US" sz="2800" b="1" dirty="0">
-              <a:latin typeface="+mj-lt"/>
-            </a:endParaRPr>
-          </a:p>
-          <a:p>
-            <a:r>
-              <a:rPr lang="en-US" sz="2800" b="1" dirty="0">
-                <a:latin typeface="+mj-lt"/>
-              </a:rPr>
-              <a:t>Next IRL Meetup: </a:t>
-            </a:r>
-            <a:r>
-              <a:rPr lang="en-US" sz="2800" dirty="0">
-                <a:latin typeface="+mj-lt"/>
-              </a:rPr>
-              <a:t>Saturday Nov 1, 2 pm PT</a:t>
-            </a:r>
-          </a:p>
-          <a:p>
-            <a:endParaRPr lang="en-US" sz="2800" dirty="0">
-              <a:latin typeface="+mj-lt"/>
-            </a:endParaRPr>
-          </a:p>
-          <a:p>
-            <a:endParaRPr lang="en-US" sz="2800" dirty="0">
-              <a:latin typeface="+mj-lt"/>
-            </a:endParaRPr>
-          </a:p>
-          <a:p>
-            <a:endParaRPr lang="en-US" sz="2800" dirty="0">
-              <a:effectLst/>
-              <a:latin typeface="+mj-lt"/>
-            </a:endParaRPr>
-          </a:p>
-          <a:p>
-            <a:r>
-              <a:rPr lang="en-US" sz="2800" b="1" dirty="0">
-                <a:latin typeface="+mj-lt"/>
-              </a:rPr>
-              <a:t>Upcoming</a:t>
-            </a:r>
-            <a:r>
-              <a:rPr lang="en-US" sz="2800" b="1" dirty="0">
-                <a:effectLst/>
-                <a:latin typeface="+mj-lt"/>
-              </a:rPr>
-              <a:t> Event: </a:t>
-            </a:r>
-            <a:r>
-              <a:rPr lang="en-US" sz="2800" dirty="0" err="1">
-                <a:effectLst/>
-                <a:latin typeface="+mj-lt"/>
-              </a:rPr>
-              <a:t>TechAlliance</a:t>
-            </a:r>
-            <a:r>
-              <a:rPr lang="en-US" sz="2800" dirty="0">
-                <a:effectLst/>
-                <a:latin typeface="+mj-lt"/>
-              </a:rPr>
-              <a:t>, Nov 19, South Seattle</a:t>
-            </a:r>
-          </a:p>
-          <a:p>
-            <a:endParaRPr lang="en-US" sz="2800" dirty="0">
-              <a:effectLst/>
-              <a:latin typeface="+mj-lt"/>
-            </a:endParaRPr>
-          </a:p>
-          <a:p>
-            <a:r>
-              <a:rPr lang="en-US" sz="2800" b="1" dirty="0">
-                <a:latin typeface="+mj-lt"/>
-              </a:rPr>
-              <a:t>Upcoming </a:t>
-            </a:r>
-            <a:r>
-              <a:rPr lang="en-US" sz="2800" b="1" dirty="0">
-                <a:effectLst/>
-                <a:latin typeface="+mj-lt"/>
-              </a:rPr>
-              <a:t>Meetup: </a:t>
-            </a:r>
-            <a:r>
-              <a:rPr lang="en-US" sz="2800" dirty="0">
-                <a:effectLst/>
-                <a:latin typeface="+mj-lt"/>
-              </a:rPr>
-              <a:t>in </a:t>
-            </a:r>
-            <a:r>
-              <a:rPr lang="en-US" sz="2800" dirty="0">
-                <a:latin typeface="+mj-lt"/>
-              </a:rPr>
-              <a:t>December w/</a:t>
-            </a:r>
-            <a:r>
-              <a:rPr lang="en-US" sz="2800" dirty="0">
-                <a:solidFill>
-                  <a:srgbClr val="FF0000"/>
-                </a:solidFill>
-                <a:latin typeface="+mj-lt"/>
-              </a:rPr>
-              <a:t>Holiday</a:t>
-            </a:r>
-            <a:r>
-              <a:rPr lang="en-US" sz="2800" dirty="0">
-                <a:latin typeface="+mj-lt"/>
-              </a:rPr>
-              <a:t> </a:t>
-            </a:r>
-            <a:r>
-              <a:rPr lang="en-US" sz="2800" dirty="0">
-                <a:solidFill>
-                  <a:srgbClr val="24A148"/>
-                </a:solidFill>
-                <a:latin typeface="+mj-lt"/>
-              </a:rPr>
-              <a:t>Party</a:t>
-            </a:r>
-            <a:br>
-              <a:rPr lang="en-US" sz="2800" dirty="0">
-                <a:effectLst/>
-                <a:latin typeface="IBM Plex Sans Light" panose="020B0403050203000203" pitchFamily="34" charset="0"/>
-              </a:rPr>
-            </a:br>
-            <a:endParaRPr lang="en-US" sz="2800" dirty="0">
-              <a:effectLst/>
-              <a:latin typeface="IBM Plex Sans Light" panose="020B0403050203000203" pitchFamily="34" charset="0"/>
-            </a:endParaRPr>
-          </a:p>
-          <a:p>
-            <a:br>
-              <a:rPr lang="en-US" sz="2800" dirty="0">
-                <a:effectLst/>
-                <a:latin typeface="+mj-lt"/>
-              </a:rPr>
-            </a:br>
-            <a:endParaRPr lang="en-US" sz="2800" dirty="0">
-              <a:effectLst/>
-              <a:latin typeface="+mj-lt"/>
-            </a:endParaRPr>
-          </a:p>
-          <a:p>
-            <a:endParaRPr lang="en-US" sz="2800" dirty="0">
-              <a:latin typeface="+mj-lt"/>
-            </a:endParaRPr>
-          </a:p>
-          <a:p>
-            <a:endParaRPr lang="en-US" sz="2800" dirty="0">
-              <a:effectLst/>
-              <a:latin typeface="+mj-lt"/>
-            </a:endParaRPr>
-          </a:p>
-        </p:txBody>
-      </p:sp>
-      <p:pic>
-        <p:nvPicPr>
-          <p:cNvPr id="2" name="Graphic 6">
-            <a:extLst>
-              <a:ext uri="{FF2B5EF4-FFF2-40B4-BE49-F238E27FC236}">
-                <a16:creationId xmlns:a16="http://schemas.microsoft.com/office/drawing/2014/main" id="{A6985911-27D4-2B6F-B069-00BCDE5DDED0}"/>
-              </a:ext>
-            </a:extLst>
-          </p:cNvPr>
-          <p:cNvPicPr>
-            <a:picLocks noChangeAspect="1"/>
-          </p:cNvPicPr>
-          <p:nvPr/>
-        </p:nvPicPr>
-        <p:blipFill>
-          <a:blip r:embed="rId2"/>
-          <a:srcRect/>
-          <a:stretch/>
-        </p:blipFill>
-        <p:spPr>
-          <a:xfrm>
-            <a:off x="15245135" y="188681"/>
-            <a:ext cx="9142040" cy="13521000"/>
-          </a:xfrm>
-          <a:prstGeom prst="rect">
-            <a:avLst/>
-          </a:prstGeom>
-        </p:spPr>
-      </p:pic>
-    </p:spTree>
-    <p:extLst>
-      <p:ext uri="{BB962C8B-B14F-4D97-AF65-F5344CB8AC3E}">
-        <p14:creationId xmlns:p14="http://schemas.microsoft.com/office/powerpoint/2010/main" val="331324125"/>
-      </p:ext>
-    </p:extLst>
-  </p:cSld>
-  <p:clrMapOvr>
-    <a:masterClrMapping/>
-  </p:clrMapOvr>
 </p:sld>
 </file>
 
@@ -32119,7 +33345,7 @@
         <p:spPr>
           <a:xfrm>
             <a:off x="6662072" y="542660"/>
-            <a:ext cx="8699848" cy="5658574"/>
+            <a:ext cx="8699848" cy="6817866"/>
           </a:xfrm>
           <a:prstGeom prst="rect">
             <a:avLst/>
@@ -32142,6 +33368,31 @@
                 <a:cs typeface="Calibri"/>
               </a:rPr>
               <a:t>Announcements</a:t>
+            </a:r>
+          </a:p>
+          <a:p>
+            <a:pPr marL="15403">
+              <a:spcBef>
+                <a:spcPts val="170"/>
+              </a:spcBef>
+            </a:pPr>
+            <a:endParaRPr lang="en-US" spc="97" dirty="0">
+              <a:latin typeface="+mj-lt"/>
+              <a:cs typeface="Calibri"/>
+            </a:endParaRPr>
+          </a:p>
+          <a:p>
+            <a:pPr marL="15403">
+              <a:spcBef>
+                <a:spcPts val="170"/>
+              </a:spcBef>
+            </a:pPr>
+            <a:r>
+              <a:rPr lang="en-US" spc="97" dirty="0">
+                <a:latin typeface="+mj-lt"/>
+                <a:cs typeface="Calibri"/>
+              </a:rPr>
+              <a:t>Q News – Industry &amp; Academia</a:t>
             </a:r>
           </a:p>
           <a:p>
@@ -32278,7 +33529,2025 @@
 </p:sld>
 </file>
 
+<file path=ppt/slides/slide20.xml><?xml version="1.0" encoding="utf-8"?>
+<p:sld xmlns:a="http://schemas.openxmlformats.org/drawingml/2006/main" xmlns:r="http://schemas.openxmlformats.org/officeDocument/2006/relationships" xmlns:p="http://schemas.openxmlformats.org/presentationml/2006/main">
+  <p:cSld>
+    <p:spTree>
+      <p:nvGrpSpPr>
+        <p:cNvPr id="1" name="">
+          <a:extLst>
+            <a:ext uri="{FF2B5EF4-FFF2-40B4-BE49-F238E27FC236}">
+              <a16:creationId xmlns:a16="http://schemas.microsoft.com/office/drawing/2014/main" id="{E143492A-6B8C-9950-1EA8-B60F628769B6}"/>
+            </a:ext>
+          </a:extLst>
+        </p:cNvPr>
+        <p:cNvGrpSpPr/>
+        <p:nvPr/>
+      </p:nvGrpSpPr>
+      <p:grpSpPr>
+        <a:xfrm>
+          <a:off x="0" y="0"/>
+          <a:ext cx="0" cy="0"/>
+          <a:chOff x="0" y="0"/>
+          <a:chExt cx="0" cy="0"/>
+        </a:xfrm>
+      </p:grpSpPr>
+      <p:sp>
+        <p:nvSpPr>
+          <p:cNvPr id="6" name="object 6">
+            <a:extLst>
+              <a:ext uri="{FF2B5EF4-FFF2-40B4-BE49-F238E27FC236}">
+                <a16:creationId xmlns:a16="http://schemas.microsoft.com/office/drawing/2014/main" id="{85CDFE3C-F11E-4F45-718B-36E101E39A4F}"/>
+              </a:ext>
+            </a:extLst>
+          </p:cNvPr>
+          <p:cNvSpPr txBox="1">
+            <a:spLocks noGrp="1"/>
+          </p:cNvSpPr>
+          <p:nvPr>
+            <p:ph type="sldNum" sz="quarter" idx="7"/>
+          </p:nvPr>
+        </p:nvSpPr>
+        <p:spPr>
+          <a:xfrm>
+            <a:off x="34548056" y="19131093"/>
+            <a:ext cx="489374" cy="262914"/>
+          </a:xfrm>
+          <a:prstGeom prst="rect">
+            <a:avLst/>
+          </a:prstGeom>
+        </p:spPr>
+        <p:txBody>
+          <a:bodyPr vert="horz" wrap="square" lIns="0" tIns="20023" rIns="0" bIns="0" rtlCol="0" anchor="b" anchorCtr="0">
+            <a:spAutoFit/>
+          </a:bodyPr>
+          <a:lstStyle/>
+          <a:p>
+            <a:pPr marL="135543">
+              <a:spcBef>
+                <a:spcPts val="158"/>
+              </a:spcBef>
+            </a:pPr>
+            <a:fld id="{81D60167-4931-47E6-BA6A-407CBD079E47}" type="slidenum">
+              <a:rPr spc="73" dirty="0"/>
+              <a:pPr marL="135543">
+                <a:spcBef>
+                  <a:spcPts val="158"/>
+                </a:spcBef>
+              </a:pPr>
+              <a:t>20</a:t>
+            </a:fld>
+            <a:endParaRPr spc="73" dirty="0"/>
+          </a:p>
+        </p:txBody>
+      </p:sp>
+      <p:sp>
+        <p:nvSpPr>
+          <p:cNvPr id="8" name="Text Placeholder 4">
+            <a:extLst>
+              <a:ext uri="{FF2B5EF4-FFF2-40B4-BE49-F238E27FC236}">
+                <a16:creationId xmlns:a16="http://schemas.microsoft.com/office/drawing/2014/main" id="{DA7763F8-5543-2867-6BEE-AA99CC5F7E75}"/>
+              </a:ext>
+            </a:extLst>
+          </p:cNvPr>
+          <p:cNvSpPr txBox="1">
+            <a:spLocks/>
+          </p:cNvSpPr>
+          <p:nvPr/>
+        </p:nvSpPr>
+        <p:spPr>
+          <a:xfrm>
+            <a:off x="576072" y="576072"/>
+            <a:ext cx="10099675" cy="571500"/>
+          </a:xfrm>
+          <a:prstGeom prst="rect">
+            <a:avLst/>
+          </a:prstGeom>
+        </p:spPr>
+        <p:txBody>
+          <a:bodyPr/>
+          <a:lstStyle>
+            <a:lvl1pPr marL="0" marR="0" indent="0" algn="l" defTabSz="2438400" rtl="0" eaLnBrk="1" latinLnBrk="0" hangingPunct="1">
+              <a:lnSpc>
+                <a:spcPct val="110000"/>
+              </a:lnSpc>
+              <a:spcBef>
+                <a:spcPts val="0"/>
+              </a:spcBef>
+              <a:spcAft>
+                <a:spcPts val="0"/>
+              </a:spcAft>
+              <a:buClrTx/>
+              <a:buSzTx/>
+              <a:buFontTx/>
+              <a:buNone/>
+              <a:tabLst/>
+              <a:defRPr sz="3600" b="0" i="0" u="none" strike="noStrike" cap="none" spc="0" baseline="0">
+                <a:solidFill>
+                  <a:schemeClr val="tx1"/>
+                </a:solidFill>
+                <a:uFillTx/>
+                <a:latin typeface="+mj-lt"/>
+                <a:ea typeface="+mj-ea"/>
+                <a:cs typeface="+mj-cs"/>
+                <a:sym typeface="IBM Plex Sans Light"/>
+              </a:defRPr>
+            </a:lvl1pPr>
+            <a:lvl2pPr marL="329184" marR="0" indent="-329184" algn="l" defTabSz="2438400" rtl="0" eaLnBrk="1" latinLnBrk="0" hangingPunct="1">
+              <a:lnSpc>
+                <a:spcPct val="110000"/>
+              </a:lnSpc>
+              <a:spcBef>
+                <a:spcPts val="0"/>
+              </a:spcBef>
+              <a:spcAft>
+                <a:spcPts val="0"/>
+              </a:spcAft>
+              <a:buClrTx/>
+              <a:buSzPct val="100000"/>
+              <a:buFontTx/>
+              <a:buChar char="–"/>
+              <a:tabLst/>
+              <a:defRPr sz="3600" b="0" i="0" u="none" strike="noStrike" cap="none" spc="0" baseline="0">
+                <a:solidFill>
+                  <a:schemeClr val="tx1"/>
+                </a:solidFill>
+                <a:uFillTx/>
+                <a:latin typeface="+mj-lt"/>
+                <a:ea typeface="+mj-ea"/>
+                <a:cs typeface="+mj-cs"/>
+                <a:sym typeface="IBM Plex Sans Light"/>
+              </a:defRPr>
+            </a:lvl2pPr>
+            <a:lvl3pPr marL="658368" marR="0" indent="-329184" algn="l" defTabSz="2438400" rtl="0" eaLnBrk="1" latinLnBrk="0" hangingPunct="1">
+              <a:lnSpc>
+                <a:spcPct val="110000"/>
+              </a:lnSpc>
+              <a:spcBef>
+                <a:spcPts val="0"/>
+              </a:spcBef>
+              <a:spcAft>
+                <a:spcPts val="0"/>
+              </a:spcAft>
+              <a:buClrTx/>
+              <a:buSzPct val="100000"/>
+              <a:buFontTx/>
+              <a:buChar char="•"/>
+              <a:tabLst/>
+              <a:defRPr sz="3600" b="0" i="0" u="none" strike="noStrike" cap="none" spc="0" baseline="0">
+                <a:solidFill>
+                  <a:schemeClr val="tx1"/>
+                </a:solidFill>
+                <a:uFillTx/>
+                <a:latin typeface="+mj-lt"/>
+                <a:ea typeface="+mj-ea"/>
+                <a:cs typeface="+mj-cs"/>
+                <a:sym typeface="IBM Plex Sans Light"/>
+              </a:defRPr>
+            </a:lvl3pPr>
+            <a:lvl4pPr marL="987552" marR="0" indent="-329184" algn="l" defTabSz="2438400" rtl="0" eaLnBrk="1" latinLnBrk="0" hangingPunct="1">
+              <a:lnSpc>
+                <a:spcPct val="110000"/>
+              </a:lnSpc>
+              <a:spcBef>
+                <a:spcPts val="0"/>
+              </a:spcBef>
+              <a:spcAft>
+                <a:spcPts val="0"/>
+              </a:spcAft>
+              <a:buClrTx/>
+              <a:buSzPct val="100000"/>
+              <a:buFontTx/>
+              <a:buChar char="–"/>
+              <a:tabLst/>
+              <a:defRPr sz="3600" b="0" i="0" u="none" strike="noStrike" cap="none" spc="0" baseline="0">
+                <a:solidFill>
+                  <a:schemeClr val="tx1"/>
+                </a:solidFill>
+                <a:uFillTx/>
+                <a:latin typeface="+mj-lt"/>
+                <a:ea typeface="+mj-ea"/>
+                <a:cs typeface="+mj-cs"/>
+                <a:sym typeface="IBM Plex Sans Light"/>
+              </a:defRPr>
+            </a:lvl4pPr>
+            <a:lvl5pPr marL="1143000" marR="0" indent="-457200" algn="l" defTabSz="2438400" rtl="0" eaLnBrk="1" latinLnBrk="0" hangingPunct="1">
+              <a:lnSpc>
+                <a:spcPct val="110000"/>
+              </a:lnSpc>
+              <a:spcBef>
+                <a:spcPts val="2900"/>
+              </a:spcBef>
+              <a:spcAft>
+                <a:spcPts val="0"/>
+              </a:spcAft>
+              <a:buClrTx/>
+              <a:buSzPct val="100000"/>
+              <a:buFont typeface="Arial" panose="020B0604020202020204" pitchFamily="34" charset="0"/>
+              <a:buChar char="•"/>
+              <a:tabLst/>
+              <a:defRPr sz="3600" b="0" i="0" u="none" strike="noStrike" cap="none" spc="0" baseline="0">
+                <a:solidFill>
+                  <a:srgbClr val="000000"/>
+                </a:solidFill>
+                <a:uFillTx/>
+                <a:latin typeface="+mj-lt"/>
+                <a:ea typeface="+mj-ea"/>
+                <a:cs typeface="+mj-cs"/>
+                <a:sym typeface="IBM Plex Sans Light"/>
+              </a:defRPr>
+            </a:lvl5pPr>
+            <a:lvl6pPr marL="1843060" marR="0" indent="-389009" algn="l" defTabSz="2438400" rtl="0" eaLnBrk="1" latinLnBrk="0" hangingPunct="1">
+              <a:lnSpc>
+                <a:spcPct val="100000"/>
+              </a:lnSpc>
+              <a:spcBef>
+                <a:spcPts val="2900"/>
+              </a:spcBef>
+              <a:spcAft>
+                <a:spcPts val="0"/>
+              </a:spcAft>
+              <a:buClrTx/>
+              <a:buSzPct val="100000"/>
+              <a:buFontTx/>
+              <a:buChar char="»"/>
+              <a:tabLst/>
+              <a:defRPr sz="3600" b="0" i="0" u="none" strike="noStrike" cap="none" spc="0" baseline="0">
+                <a:solidFill>
+                  <a:srgbClr val="000000"/>
+                </a:solidFill>
+                <a:uFillTx/>
+                <a:latin typeface="+mj-lt"/>
+                <a:ea typeface="+mj-ea"/>
+                <a:cs typeface="+mj-cs"/>
+                <a:sym typeface="IBM Plex Sans Light"/>
+              </a:defRPr>
+            </a:lvl6pPr>
+            <a:lvl7pPr marL="2205631" marR="0" indent="-389009" algn="l" defTabSz="2438400" rtl="0" eaLnBrk="1" latinLnBrk="0" hangingPunct="1">
+              <a:lnSpc>
+                <a:spcPct val="100000"/>
+              </a:lnSpc>
+              <a:spcBef>
+                <a:spcPts val="2900"/>
+              </a:spcBef>
+              <a:spcAft>
+                <a:spcPts val="0"/>
+              </a:spcAft>
+              <a:buClrTx/>
+              <a:buSzPct val="100000"/>
+              <a:buFontTx/>
+              <a:buChar char="»"/>
+              <a:tabLst/>
+              <a:defRPr sz="3600" b="0" i="0" u="none" strike="noStrike" cap="none" spc="0" baseline="0">
+                <a:solidFill>
+                  <a:srgbClr val="000000"/>
+                </a:solidFill>
+                <a:uFillTx/>
+                <a:latin typeface="+mj-lt"/>
+                <a:ea typeface="+mj-ea"/>
+                <a:cs typeface="+mj-cs"/>
+                <a:sym typeface="IBM Plex Sans Light"/>
+              </a:defRPr>
+            </a:lvl7pPr>
+            <a:lvl8pPr marL="2568200" marR="0" indent="-389009" algn="l" defTabSz="2438400" rtl="0" eaLnBrk="1" latinLnBrk="0" hangingPunct="1">
+              <a:lnSpc>
+                <a:spcPct val="100000"/>
+              </a:lnSpc>
+              <a:spcBef>
+                <a:spcPts val="2900"/>
+              </a:spcBef>
+              <a:spcAft>
+                <a:spcPts val="0"/>
+              </a:spcAft>
+              <a:buClrTx/>
+              <a:buSzPct val="100000"/>
+              <a:buFontTx/>
+              <a:buChar char="»"/>
+              <a:tabLst/>
+              <a:defRPr sz="3600" b="0" i="0" u="none" strike="noStrike" cap="none" spc="0" baseline="0">
+                <a:solidFill>
+                  <a:srgbClr val="000000"/>
+                </a:solidFill>
+                <a:uFillTx/>
+                <a:latin typeface="+mj-lt"/>
+                <a:ea typeface="+mj-ea"/>
+                <a:cs typeface="+mj-cs"/>
+                <a:sym typeface="IBM Plex Sans Light"/>
+              </a:defRPr>
+            </a:lvl8pPr>
+            <a:lvl9pPr marL="2930769" marR="0" indent="-389009" algn="l" defTabSz="2438400" rtl="0" eaLnBrk="1" latinLnBrk="0" hangingPunct="1">
+              <a:lnSpc>
+                <a:spcPct val="100000"/>
+              </a:lnSpc>
+              <a:spcBef>
+                <a:spcPts val="2900"/>
+              </a:spcBef>
+              <a:spcAft>
+                <a:spcPts val="0"/>
+              </a:spcAft>
+              <a:buClrTx/>
+              <a:buSzPct val="100000"/>
+              <a:buFontTx/>
+              <a:buChar char="»"/>
+              <a:tabLst/>
+              <a:defRPr sz="3600" b="0" i="0" u="none" strike="noStrike" cap="none" spc="0" baseline="0">
+                <a:solidFill>
+                  <a:srgbClr val="000000"/>
+                </a:solidFill>
+                <a:uFillTx/>
+                <a:latin typeface="+mj-lt"/>
+                <a:ea typeface="+mj-ea"/>
+                <a:cs typeface="+mj-cs"/>
+                <a:sym typeface="IBM Plex Sans Light"/>
+              </a:defRPr>
+            </a:lvl9pPr>
+          </a:lstStyle>
+          <a:p>
+            <a:r>
+              <a:rPr lang="en-US" kern="0">
+                <a:solidFill>
+                  <a:srgbClr val="697077"/>
+                </a:solidFill>
+                <a:latin typeface="IBM Plex Mono" panose="020B0509050203000203" pitchFamily="49" charset="77"/>
+              </a:rPr>
+              <a:t>Qiskit Fall Fest 2025</a:t>
+            </a:r>
+            <a:endParaRPr lang="en-US" kern="0" dirty="0">
+              <a:solidFill>
+                <a:srgbClr val="697077"/>
+              </a:solidFill>
+              <a:latin typeface="IBM Plex Mono" panose="020B0509050203000203" pitchFamily="49" charset="77"/>
+            </a:endParaRPr>
+          </a:p>
+        </p:txBody>
+      </p:sp>
+      <p:sp>
+        <p:nvSpPr>
+          <p:cNvPr id="9" name="Title 2">
+            <a:extLst>
+              <a:ext uri="{FF2B5EF4-FFF2-40B4-BE49-F238E27FC236}">
+                <a16:creationId xmlns:a16="http://schemas.microsoft.com/office/drawing/2014/main" id="{F8DACD11-B02B-184F-A7C8-9683993F047D}"/>
+              </a:ext>
+            </a:extLst>
+          </p:cNvPr>
+          <p:cNvSpPr txBox="1">
+            <a:spLocks/>
+          </p:cNvSpPr>
+          <p:nvPr/>
+        </p:nvSpPr>
+        <p:spPr>
+          <a:xfrm>
+            <a:off x="576072" y="1527048"/>
+            <a:ext cx="10099675" cy="9337675"/>
+          </a:xfrm>
+          <a:prstGeom prst="rect">
+            <a:avLst/>
+          </a:prstGeom>
+        </p:spPr>
+        <p:txBody>
+          <a:bodyPr/>
+          <a:lstStyle>
+            <a:lvl1pPr marL="0" marR="0" indent="0" algn="l" defTabSz="2438400" rtl="0" eaLnBrk="1" latinLnBrk="0" hangingPunct="1">
+              <a:lnSpc>
+                <a:spcPct val="90000"/>
+              </a:lnSpc>
+              <a:spcBef>
+                <a:spcPts val="0"/>
+              </a:spcBef>
+              <a:spcAft>
+                <a:spcPts val="0"/>
+              </a:spcAft>
+              <a:buClrTx/>
+              <a:buSzTx/>
+              <a:buFontTx/>
+              <a:buNone/>
+              <a:tabLst/>
+              <a:defRPr sz="6400" b="0" i="0" u="none" strike="noStrike" cap="none" spc="0" baseline="0">
+                <a:solidFill>
+                  <a:schemeClr val="tx2"/>
+                </a:solidFill>
+                <a:uFillTx/>
+                <a:latin typeface="+mj-lt"/>
+                <a:ea typeface="+mj-ea"/>
+                <a:cs typeface="+mj-cs"/>
+                <a:sym typeface="IBM Plex Sans Light"/>
+              </a:defRPr>
+            </a:lvl1pPr>
+            <a:lvl2pPr marL="0" marR="0" indent="0" algn="l" defTabSz="2438400" rtl="0" eaLnBrk="1" latinLnBrk="0" hangingPunct="1">
+              <a:lnSpc>
+                <a:spcPct val="90000"/>
+              </a:lnSpc>
+              <a:spcBef>
+                <a:spcPts val="0"/>
+              </a:spcBef>
+              <a:spcAft>
+                <a:spcPts val="0"/>
+              </a:spcAft>
+              <a:buClrTx/>
+              <a:buSzTx/>
+              <a:buFontTx/>
+              <a:buNone/>
+              <a:tabLst/>
+              <a:defRPr sz="6400" b="0" i="0" u="none" strike="noStrike" cap="none" spc="0" baseline="0">
+                <a:solidFill>
+                  <a:srgbClr val="000000"/>
+                </a:solidFill>
+                <a:uFillTx/>
+                <a:latin typeface="+mj-lt"/>
+                <a:ea typeface="+mj-ea"/>
+                <a:cs typeface="+mj-cs"/>
+                <a:sym typeface="IBM Plex Sans Light"/>
+              </a:defRPr>
+            </a:lvl2pPr>
+            <a:lvl3pPr marL="0" marR="0" indent="0" algn="l" defTabSz="2438400" rtl="0" eaLnBrk="1" latinLnBrk="0" hangingPunct="1">
+              <a:lnSpc>
+                <a:spcPct val="90000"/>
+              </a:lnSpc>
+              <a:spcBef>
+                <a:spcPts val="0"/>
+              </a:spcBef>
+              <a:spcAft>
+                <a:spcPts val="0"/>
+              </a:spcAft>
+              <a:buClrTx/>
+              <a:buSzTx/>
+              <a:buFontTx/>
+              <a:buNone/>
+              <a:tabLst/>
+              <a:defRPr sz="6400" b="0" i="0" u="none" strike="noStrike" cap="none" spc="0" baseline="0">
+                <a:solidFill>
+                  <a:srgbClr val="000000"/>
+                </a:solidFill>
+                <a:uFillTx/>
+                <a:latin typeface="+mj-lt"/>
+                <a:ea typeface="+mj-ea"/>
+                <a:cs typeface="+mj-cs"/>
+                <a:sym typeface="IBM Plex Sans Light"/>
+              </a:defRPr>
+            </a:lvl3pPr>
+            <a:lvl4pPr marL="0" marR="0" indent="0" algn="l" defTabSz="2438400" rtl="0" eaLnBrk="1" latinLnBrk="0" hangingPunct="1">
+              <a:lnSpc>
+                <a:spcPct val="90000"/>
+              </a:lnSpc>
+              <a:spcBef>
+                <a:spcPts val="0"/>
+              </a:spcBef>
+              <a:spcAft>
+                <a:spcPts val="0"/>
+              </a:spcAft>
+              <a:buClrTx/>
+              <a:buSzTx/>
+              <a:buFontTx/>
+              <a:buNone/>
+              <a:tabLst/>
+              <a:defRPr sz="6400" b="0" i="0" u="none" strike="noStrike" cap="none" spc="0" baseline="0">
+                <a:solidFill>
+                  <a:srgbClr val="000000"/>
+                </a:solidFill>
+                <a:uFillTx/>
+                <a:latin typeface="+mj-lt"/>
+                <a:ea typeface="+mj-ea"/>
+                <a:cs typeface="+mj-cs"/>
+                <a:sym typeface="IBM Plex Sans Light"/>
+              </a:defRPr>
+            </a:lvl4pPr>
+            <a:lvl5pPr marL="0" marR="0" indent="0" algn="l" defTabSz="2438400" rtl="0" eaLnBrk="1" latinLnBrk="0" hangingPunct="1">
+              <a:lnSpc>
+                <a:spcPct val="90000"/>
+              </a:lnSpc>
+              <a:spcBef>
+                <a:spcPts val="0"/>
+              </a:spcBef>
+              <a:spcAft>
+                <a:spcPts val="0"/>
+              </a:spcAft>
+              <a:buClrTx/>
+              <a:buSzTx/>
+              <a:buFontTx/>
+              <a:buNone/>
+              <a:tabLst/>
+              <a:defRPr sz="6400" b="0" i="0" u="none" strike="noStrike" cap="none" spc="0" baseline="0">
+                <a:solidFill>
+                  <a:srgbClr val="000000"/>
+                </a:solidFill>
+                <a:uFillTx/>
+                <a:latin typeface="+mj-lt"/>
+                <a:ea typeface="+mj-ea"/>
+                <a:cs typeface="+mj-cs"/>
+                <a:sym typeface="IBM Plex Sans Light"/>
+              </a:defRPr>
+            </a:lvl5pPr>
+            <a:lvl6pPr marL="0" marR="0" indent="362568" algn="l" defTabSz="2438400" rtl="0" eaLnBrk="1" latinLnBrk="0" hangingPunct="1">
+              <a:lnSpc>
+                <a:spcPct val="90000"/>
+              </a:lnSpc>
+              <a:spcBef>
+                <a:spcPts val="0"/>
+              </a:spcBef>
+              <a:spcAft>
+                <a:spcPts val="0"/>
+              </a:spcAft>
+              <a:buClrTx/>
+              <a:buSzTx/>
+              <a:buFontTx/>
+              <a:buNone/>
+              <a:tabLst/>
+              <a:defRPr sz="6400" b="0" i="0" u="none" strike="noStrike" cap="none" spc="0" baseline="0">
+                <a:solidFill>
+                  <a:srgbClr val="000000"/>
+                </a:solidFill>
+                <a:uFillTx/>
+                <a:latin typeface="+mj-lt"/>
+                <a:ea typeface="+mj-ea"/>
+                <a:cs typeface="+mj-cs"/>
+                <a:sym typeface="IBM Plex Sans Light"/>
+              </a:defRPr>
+            </a:lvl6pPr>
+            <a:lvl7pPr marL="0" marR="0" indent="725139" algn="l" defTabSz="2438400" rtl="0" eaLnBrk="1" latinLnBrk="0" hangingPunct="1">
+              <a:lnSpc>
+                <a:spcPct val="90000"/>
+              </a:lnSpc>
+              <a:spcBef>
+                <a:spcPts val="0"/>
+              </a:spcBef>
+              <a:spcAft>
+                <a:spcPts val="0"/>
+              </a:spcAft>
+              <a:buClrTx/>
+              <a:buSzTx/>
+              <a:buFontTx/>
+              <a:buNone/>
+              <a:tabLst/>
+              <a:defRPr sz="6400" b="0" i="0" u="none" strike="noStrike" cap="none" spc="0" baseline="0">
+                <a:solidFill>
+                  <a:srgbClr val="000000"/>
+                </a:solidFill>
+                <a:uFillTx/>
+                <a:latin typeface="+mj-lt"/>
+                <a:ea typeface="+mj-ea"/>
+                <a:cs typeface="+mj-cs"/>
+                <a:sym typeface="IBM Plex Sans Light"/>
+              </a:defRPr>
+            </a:lvl7pPr>
+            <a:lvl8pPr marL="0" marR="0" indent="1087706" algn="l" defTabSz="2438400" rtl="0" eaLnBrk="1" latinLnBrk="0" hangingPunct="1">
+              <a:lnSpc>
+                <a:spcPct val="90000"/>
+              </a:lnSpc>
+              <a:spcBef>
+                <a:spcPts val="0"/>
+              </a:spcBef>
+              <a:spcAft>
+                <a:spcPts val="0"/>
+              </a:spcAft>
+              <a:buClrTx/>
+              <a:buSzTx/>
+              <a:buFontTx/>
+              <a:buNone/>
+              <a:tabLst/>
+              <a:defRPr sz="6400" b="0" i="0" u="none" strike="noStrike" cap="none" spc="0" baseline="0">
+                <a:solidFill>
+                  <a:srgbClr val="000000"/>
+                </a:solidFill>
+                <a:uFillTx/>
+                <a:latin typeface="+mj-lt"/>
+                <a:ea typeface="+mj-ea"/>
+                <a:cs typeface="+mj-cs"/>
+                <a:sym typeface="IBM Plex Sans Light"/>
+              </a:defRPr>
+            </a:lvl8pPr>
+            <a:lvl9pPr marL="0" marR="0" indent="1450276" algn="l" defTabSz="2438400" rtl="0" eaLnBrk="1" latinLnBrk="0" hangingPunct="1">
+              <a:lnSpc>
+                <a:spcPct val="90000"/>
+              </a:lnSpc>
+              <a:spcBef>
+                <a:spcPts val="0"/>
+              </a:spcBef>
+              <a:spcAft>
+                <a:spcPts val="0"/>
+              </a:spcAft>
+              <a:buClrTx/>
+              <a:buSzTx/>
+              <a:buFontTx/>
+              <a:buNone/>
+              <a:tabLst/>
+              <a:defRPr sz="6400" b="0" i="0" u="none" strike="noStrike" cap="none" spc="0" baseline="0">
+                <a:solidFill>
+                  <a:srgbClr val="000000"/>
+                </a:solidFill>
+                <a:uFillTx/>
+                <a:latin typeface="+mj-lt"/>
+                <a:ea typeface="+mj-ea"/>
+                <a:cs typeface="+mj-cs"/>
+                <a:sym typeface="IBM Plex Sans Light"/>
+              </a:defRPr>
+            </a:lvl9pPr>
+          </a:lstStyle>
+          <a:p>
+            <a:r>
+              <a:rPr lang="en-US" kern="0" dirty="0">
+                <a:solidFill>
+                  <a:schemeClr val="tx1"/>
+                </a:solidFill>
+              </a:rPr>
+              <a:t>Thanks for Coming!!!</a:t>
+            </a:r>
+            <a:br>
+              <a:rPr lang="en-US" kern="0" dirty="0">
+                <a:solidFill>
+                  <a:schemeClr val="tx1"/>
+                </a:solidFill>
+              </a:rPr>
+            </a:br>
+            <a:endParaRPr lang="en-US" kern="0" dirty="0">
+              <a:solidFill>
+                <a:schemeClr val="tx1"/>
+              </a:solidFill>
+            </a:endParaRPr>
+          </a:p>
+        </p:txBody>
+      </p:sp>
+      <p:sp>
+        <p:nvSpPr>
+          <p:cNvPr id="10" name="Text Placeholder 6">
+            <a:extLst>
+              <a:ext uri="{FF2B5EF4-FFF2-40B4-BE49-F238E27FC236}">
+                <a16:creationId xmlns:a16="http://schemas.microsoft.com/office/drawing/2014/main" id="{2E9214AB-CC49-1F4B-7CF2-9C04DA5EE615}"/>
+              </a:ext>
+            </a:extLst>
+          </p:cNvPr>
+          <p:cNvSpPr txBox="1">
+            <a:spLocks/>
+          </p:cNvSpPr>
+          <p:nvPr/>
+        </p:nvSpPr>
+        <p:spPr>
+          <a:xfrm>
+            <a:off x="568325" y="4253501"/>
+            <a:ext cx="9048286" cy="7935451"/>
+          </a:xfrm>
+          <a:prstGeom prst="rect">
+            <a:avLst/>
+          </a:prstGeom>
+        </p:spPr>
+        <p:txBody>
+          <a:bodyPr vert="horz" lIns="0" tIns="0" rIns="0" bIns="0" rtlCol="0" anchor="t"/>
+          <a:lstStyle>
+            <a:defPPr>
+              <a:defRPr lang="en-US"/>
+            </a:defPPr>
+            <a:lvl1pPr marL="0" algn="l" defTabSz="1829379" rtl="0" eaLnBrk="1" latinLnBrk="0" hangingPunct="1">
+              <a:defRPr sz="1600" b="0" i="0" kern="1200">
+                <a:solidFill>
+                  <a:schemeClr val="tx1"/>
+                </a:solidFill>
+                <a:latin typeface="IBM Plex Sans" panose="020B0503050203000203" pitchFamily="34" charset="0"/>
+                <a:ea typeface="+mn-ea"/>
+                <a:cs typeface="+mn-cs"/>
+              </a:defRPr>
+            </a:lvl1pPr>
+            <a:lvl2pPr marL="914688" algn="l" defTabSz="1829379" rtl="0" eaLnBrk="1" latinLnBrk="0" hangingPunct="1">
+              <a:defRPr sz="3600" kern="1200">
+                <a:solidFill>
+                  <a:schemeClr val="tx1"/>
+                </a:solidFill>
+                <a:latin typeface="+mn-lt"/>
+                <a:ea typeface="+mn-ea"/>
+                <a:cs typeface="+mn-cs"/>
+              </a:defRPr>
+            </a:lvl2pPr>
+            <a:lvl3pPr marL="1829379" algn="l" defTabSz="1829379" rtl="0" eaLnBrk="1" latinLnBrk="0" hangingPunct="1">
+              <a:defRPr sz="3600" kern="1200">
+                <a:solidFill>
+                  <a:schemeClr val="tx1"/>
+                </a:solidFill>
+                <a:latin typeface="+mn-lt"/>
+                <a:ea typeface="+mn-ea"/>
+                <a:cs typeface="+mn-cs"/>
+              </a:defRPr>
+            </a:lvl3pPr>
+            <a:lvl4pPr marL="2744068" algn="l" defTabSz="1829379" rtl="0" eaLnBrk="1" latinLnBrk="0" hangingPunct="1">
+              <a:defRPr sz="3600" kern="1200">
+                <a:solidFill>
+                  <a:schemeClr val="tx1"/>
+                </a:solidFill>
+                <a:latin typeface="+mn-lt"/>
+                <a:ea typeface="+mn-ea"/>
+                <a:cs typeface="+mn-cs"/>
+              </a:defRPr>
+            </a:lvl4pPr>
+            <a:lvl5pPr marL="3658759" algn="l" defTabSz="1829379" rtl="0" eaLnBrk="1" latinLnBrk="0" hangingPunct="1">
+              <a:defRPr sz="3600" kern="1200">
+                <a:solidFill>
+                  <a:schemeClr val="tx1"/>
+                </a:solidFill>
+                <a:latin typeface="+mn-lt"/>
+                <a:ea typeface="+mn-ea"/>
+                <a:cs typeface="+mn-cs"/>
+              </a:defRPr>
+            </a:lvl5pPr>
+            <a:lvl6pPr marL="4573447" algn="l" defTabSz="1829379" rtl="0" eaLnBrk="1" latinLnBrk="0" hangingPunct="1">
+              <a:defRPr sz="3600" kern="1200">
+                <a:solidFill>
+                  <a:schemeClr val="tx1"/>
+                </a:solidFill>
+                <a:latin typeface="+mn-lt"/>
+                <a:ea typeface="+mn-ea"/>
+                <a:cs typeface="+mn-cs"/>
+              </a:defRPr>
+            </a:lvl6pPr>
+            <a:lvl7pPr marL="5488138" algn="l" defTabSz="1829379" rtl="0" eaLnBrk="1" latinLnBrk="0" hangingPunct="1">
+              <a:defRPr sz="3600" kern="1200">
+                <a:solidFill>
+                  <a:schemeClr val="tx1"/>
+                </a:solidFill>
+                <a:latin typeface="+mn-lt"/>
+                <a:ea typeface="+mn-ea"/>
+                <a:cs typeface="+mn-cs"/>
+              </a:defRPr>
+            </a:lvl7pPr>
+            <a:lvl8pPr marL="6402827" algn="l" defTabSz="1829379" rtl="0" eaLnBrk="1" latinLnBrk="0" hangingPunct="1">
+              <a:defRPr sz="3600" kern="1200">
+                <a:solidFill>
+                  <a:schemeClr val="tx1"/>
+                </a:solidFill>
+                <a:latin typeface="+mn-lt"/>
+                <a:ea typeface="+mn-ea"/>
+                <a:cs typeface="+mn-cs"/>
+              </a:defRPr>
+            </a:lvl8pPr>
+            <a:lvl9pPr marL="7317518" algn="l" defTabSz="1829379" rtl="0" eaLnBrk="1" latinLnBrk="0" hangingPunct="1">
+              <a:defRPr sz="3600" kern="1200">
+                <a:solidFill>
+                  <a:schemeClr val="tx1"/>
+                </a:solidFill>
+                <a:latin typeface="+mn-lt"/>
+                <a:ea typeface="+mn-ea"/>
+                <a:cs typeface="+mn-cs"/>
+              </a:defRPr>
+            </a:lvl9pPr>
+          </a:lstStyle>
+          <a:p>
+            <a:endParaRPr lang="en-US" sz="2800" b="1" dirty="0">
+              <a:effectLst/>
+              <a:latin typeface="+mj-lt"/>
+            </a:endParaRPr>
+          </a:p>
+          <a:p>
+            <a:endParaRPr lang="en-US" sz="2800" b="1" dirty="0">
+              <a:latin typeface="+mj-lt"/>
+            </a:endParaRPr>
+          </a:p>
+          <a:p>
+            <a:r>
+              <a:rPr lang="en-US" sz="2800" b="1" dirty="0">
+                <a:solidFill>
+                  <a:srgbClr val="8A3FFC"/>
+                </a:solidFill>
+                <a:effectLst/>
+                <a:latin typeface="+mj-lt"/>
+              </a:rPr>
+              <a:t>Deadline for Submissions: </a:t>
+            </a:r>
+            <a:r>
+              <a:rPr lang="en-US" sz="2800" dirty="0">
+                <a:latin typeface="+mj-lt"/>
+              </a:rPr>
+              <a:t>Monday Nov 24, 10 am PT</a:t>
+            </a:r>
+          </a:p>
+          <a:p>
+            <a:endParaRPr lang="en-US" sz="2800" dirty="0">
+              <a:effectLst/>
+              <a:latin typeface="+mj-lt"/>
+            </a:endParaRPr>
+          </a:p>
+          <a:p>
+            <a:endParaRPr lang="en-US" sz="2800" dirty="0">
+              <a:effectLst/>
+              <a:latin typeface="+mj-lt"/>
+            </a:endParaRPr>
+          </a:p>
+          <a:p>
+            <a:endParaRPr lang="en-US" sz="2800" b="1" dirty="0">
+              <a:latin typeface="+mj-lt"/>
+            </a:endParaRPr>
+          </a:p>
+          <a:p>
+            <a:r>
+              <a:rPr lang="en-US" sz="2800" b="1" dirty="0">
+                <a:solidFill>
+                  <a:srgbClr val="8A3FFC"/>
+                </a:solidFill>
+                <a:latin typeface="+mj-lt"/>
+              </a:rPr>
+              <a:t>New Zoom Meetup: </a:t>
+            </a:r>
+            <a:r>
+              <a:rPr lang="en-US" sz="2800" dirty="0">
+                <a:latin typeface="+mj-lt"/>
+              </a:rPr>
+              <a:t>Tuesday Oct 28, 6 pm PT</a:t>
+            </a:r>
+          </a:p>
+          <a:p>
+            <a:endParaRPr lang="en-US" sz="2800" b="1" dirty="0">
+              <a:latin typeface="+mj-lt"/>
+            </a:endParaRPr>
+          </a:p>
+          <a:p>
+            <a:endParaRPr lang="en-US" sz="2800" b="1" dirty="0">
+              <a:latin typeface="+mj-lt"/>
+            </a:endParaRPr>
+          </a:p>
+          <a:p>
+            <a:r>
+              <a:rPr lang="en-US" sz="2800" b="1" dirty="0">
+                <a:solidFill>
+                  <a:srgbClr val="8A3FFC"/>
+                </a:solidFill>
+                <a:latin typeface="+mj-lt"/>
+              </a:rPr>
+              <a:t>Next IRL Meetup: </a:t>
+            </a:r>
+            <a:r>
+              <a:rPr lang="en-US" sz="2800" dirty="0">
+                <a:latin typeface="+mj-lt"/>
+              </a:rPr>
+              <a:t>Saturday Nov 1, 2 pm PT</a:t>
+            </a:r>
+          </a:p>
+          <a:p>
+            <a:endParaRPr lang="en-US" sz="2800" dirty="0">
+              <a:latin typeface="+mj-lt"/>
+            </a:endParaRPr>
+          </a:p>
+          <a:p>
+            <a:endParaRPr lang="en-US" sz="2800" dirty="0">
+              <a:latin typeface="+mj-lt"/>
+            </a:endParaRPr>
+          </a:p>
+          <a:p>
+            <a:endParaRPr lang="en-US" sz="2800" dirty="0">
+              <a:effectLst/>
+              <a:latin typeface="+mj-lt"/>
+            </a:endParaRPr>
+          </a:p>
+          <a:p>
+            <a:r>
+              <a:rPr lang="en-US" sz="2800" b="1" dirty="0">
+                <a:solidFill>
+                  <a:srgbClr val="8A3FFC"/>
+                </a:solidFill>
+                <a:latin typeface="+mj-lt"/>
+              </a:rPr>
+              <a:t>Upcoming</a:t>
+            </a:r>
+            <a:r>
+              <a:rPr lang="en-US" sz="2800" b="1" dirty="0">
+                <a:solidFill>
+                  <a:srgbClr val="8A3FFC"/>
+                </a:solidFill>
+                <a:effectLst/>
+                <a:latin typeface="+mj-lt"/>
+              </a:rPr>
+              <a:t> Event: </a:t>
+            </a:r>
+            <a:r>
+              <a:rPr lang="en-US" sz="2800" dirty="0" err="1">
+                <a:effectLst/>
+                <a:latin typeface="+mj-lt"/>
+              </a:rPr>
+              <a:t>TechAlliance</a:t>
+            </a:r>
+            <a:r>
+              <a:rPr lang="en-US" sz="2800" dirty="0">
+                <a:effectLst/>
+                <a:latin typeface="+mj-lt"/>
+              </a:rPr>
+              <a:t>, Nov 19, South Seattle</a:t>
+            </a:r>
+          </a:p>
+          <a:p>
+            <a:endParaRPr lang="en-US" sz="2800" dirty="0">
+              <a:effectLst/>
+              <a:latin typeface="+mj-lt"/>
+            </a:endParaRPr>
+          </a:p>
+          <a:p>
+            <a:endParaRPr lang="en-US" sz="2800" dirty="0">
+              <a:effectLst/>
+              <a:latin typeface="+mj-lt"/>
+            </a:endParaRPr>
+          </a:p>
+          <a:p>
+            <a:r>
+              <a:rPr lang="en-US" sz="2800" b="1" dirty="0">
+                <a:solidFill>
+                  <a:srgbClr val="8A3FFC"/>
+                </a:solidFill>
+                <a:latin typeface="+mj-lt"/>
+              </a:rPr>
+              <a:t>Upcoming </a:t>
+            </a:r>
+            <a:r>
+              <a:rPr lang="en-US" sz="2800" b="1" dirty="0">
+                <a:solidFill>
+                  <a:srgbClr val="8A3FFC"/>
+                </a:solidFill>
+                <a:effectLst/>
+                <a:latin typeface="+mj-lt"/>
+              </a:rPr>
+              <a:t>Meetup: </a:t>
+            </a:r>
+            <a:r>
+              <a:rPr lang="en-US" sz="2800" dirty="0">
+                <a:effectLst/>
+                <a:latin typeface="+mj-lt"/>
+              </a:rPr>
+              <a:t>Date? in </a:t>
+            </a:r>
+            <a:r>
+              <a:rPr lang="en-US" sz="2800" dirty="0">
+                <a:latin typeface="+mj-lt"/>
+              </a:rPr>
+              <a:t>December w/</a:t>
+            </a:r>
+            <a:r>
+              <a:rPr lang="en-US" sz="2800" dirty="0">
+                <a:solidFill>
+                  <a:srgbClr val="FF0000"/>
+                </a:solidFill>
+                <a:latin typeface="+mj-lt"/>
+              </a:rPr>
+              <a:t>Holiday</a:t>
+            </a:r>
+            <a:r>
+              <a:rPr lang="en-US" sz="2800" dirty="0">
+                <a:latin typeface="+mj-lt"/>
+              </a:rPr>
+              <a:t> </a:t>
+            </a:r>
+            <a:r>
+              <a:rPr lang="en-US" sz="2800" dirty="0">
+                <a:solidFill>
+                  <a:srgbClr val="24A148"/>
+                </a:solidFill>
+                <a:latin typeface="+mj-lt"/>
+              </a:rPr>
+              <a:t>Party</a:t>
+            </a:r>
+            <a:br>
+              <a:rPr lang="en-US" sz="2800" dirty="0">
+                <a:effectLst/>
+                <a:latin typeface="IBM Plex Sans Light" panose="020B0403050203000203" pitchFamily="34" charset="0"/>
+              </a:rPr>
+            </a:br>
+            <a:endParaRPr lang="en-US" sz="2800" dirty="0">
+              <a:effectLst/>
+              <a:latin typeface="IBM Plex Sans Light" panose="020B0403050203000203" pitchFamily="34" charset="0"/>
+            </a:endParaRPr>
+          </a:p>
+          <a:p>
+            <a:br>
+              <a:rPr lang="en-US" sz="2800" dirty="0">
+                <a:effectLst/>
+                <a:latin typeface="+mj-lt"/>
+              </a:rPr>
+            </a:br>
+            <a:endParaRPr lang="en-US" sz="2800" dirty="0">
+              <a:effectLst/>
+              <a:latin typeface="+mj-lt"/>
+            </a:endParaRPr>
+          </a:p>
+          <a:p>
+            <a:endParaRPr lang="en-US" sz="2800" dirty="0">
+              <a:latin typeface="+mj-lt"/>
+            </a:endParaRPr>
+          </a:p>
+          <a:p>
+            <a:endParaRPr lang="en-US" sz="2800" dirty="0">
+              <a:effectLst/>
+              <a:latin typeface="+mj-lt"/>
+            </a:endParaRPr>
+          </a:p>
+        </p:txBody>
+      </p:sp>
+      <p:pic>
+        <p:nvPicPr>
+          <p:cNvPr id="2" name="Graphic 6">
+            <a:extLst>
+              <a:ext uri="{FF2B5EF4-FFF2-40B4-BE49-F238E27FC236}">
+                <a16:creationId xmlns:a16="http://schemas.microsoft.com/office/drawing/2014/main" id="{A6985911-27D4-2B6F-B069-00BCDE5DDED0}"/>
+              </a:ext>
+            </a:extLst>
+          </p:cNvPr>
+          <p:cNvPicPr>
+            <a:picLocks noChangeAspect="1"/>
+          </p:cNvPicPr>
+          <p:nvPr/>
+        </p:nvPicPr>
+        <p:blipFill>
+          <a:blip r:embed="rId2"/>
+          <a:srcRect/>
+          <a:stretch/>
+        </p:blipFill>
+        <p:spPr>
+          <a:xfrm>
+            <a:off x="15245135" y="188681"/>
+            <a:ext cx="9142040" cy="13521000"/>
+          </a:xfrm>
+          <a:prstGeom prst="rect">
+            <a:avLst/>
+          </a:prstGeom>
+        </p:spPr>
+      </p:pic>
+    </p:spTree>
+    <p:extLst>
+      <p:ext uri="{BB962C8B-B14F-4D97-AF65-F5344CB8AC3E}">
+        <p14:creationId xmlns:p14="http://schemas.microsoft.com/office/powerpoint/2010/main" val="331324125"/>
+      </p:ext>
+    </p:extLst>
+  </p:cSld>
+  <p:clrMapOvr>
+    <a:masterClrMapping/>
+  </p:clrMapOvr>
+</p:sld>
+</file>
+
 <file path=ppt/slides/slide3.xml><?xml version="1.0" encoding="utf-8"?>
+<p:sld xmlns:a="http://schemas.openxmlformats.org/drawingml/2006/main" xmlns:r="http://schemas.openxmlformats.org/officeDocument/2006/relationships" xmlns:p="http://schemas.openxmlformats.org/presentationml/2006/main">
+  <p:cSld>
+    <p:spTree>
+      <p:nvGrpSpPr>
+        <p:cNvPr id="1" name="">
+          <a:extLst>
+            <a:ext uri="{FF2B5EF4-FFF2-40B4-BE49-F238E27FC236}">
+              <a16:creationId xmlns:a16="http://schemas.microsoft.com/office/drawing/2014/main" id="{BBB2970C-CB50-D2FC-7FC1-D597AED47159}"/>
+            </a:ext>
+          </a:extLst>
+        </p:cNvPr>
+        <p:cNvGrpSpPr/>
+        <p:nvPr/>
+      </p:nvGrpSpPr>
+      <p:grpSpPr>
+        <a:xfrm>
+          <a:off x="0" y="0"/>
+          <a:ext cx="0" cy="0"/>
+          <a:chOff x="0" y="0"/>
+          <a:chExt cx="0" cy="0"/>
+        </a:xfrm>
+      </p:grpSpPr>
+      <p:sp>
+        <p:nvSpPr>
+          <p:cNvPr id="2" name="Title 1">
+            <a:extLst>
+              <a:ext uri="{FF2B5EF4-FFF2-40B4-BE49-F238E27FC236}">
+                <a16:creationId xmlns:a16="http://schemas.microsoft.com/office/drawing/2014/main" id="{9623132A-4614-71E9-3669-508F6C31244F}"/>
+              </a:ext>
+            </a:extLst>
+          </p:cNvPr>
+          <p:cNvSpPr>
+            <a:spLocks noGrp="1"/>
+          </p:cNvSpPr>
+          <p:nvPr>
+            <p:ph type="title"/>
+          </p:nvPr>
+        </p:nvSpPr>
+        <p:spPr>
+          <a:xfrm>
+            <a:off x="576072" y="384049"/>
+            <a:ext cx="11045825" cy="1414272"/>
+          </a:xfrm>
+        </p:spPr>
+        <p:txBody>
+          <a:bodyPr/>
+          <a:lstStyle/>
+          <a:p>
+            <a:r>
+              <a:rPr lang="en-US" dirty="0"/>
+              <a:t>Q News</a:t>
+            </a:r>
+          </a:p>
+        </p:txBody>
+      </p:sp>
+      <p:sp>
+        <p:nvSpPr>
+          <p:cNvPr id="7" name="Footer Placeholder 6">
+            <a:extLst>
+              <a:ext uri="{FF2B5EF4-FFF2-40B4-BE49-F238E27FC236}">
+                <a16:creationId xmlns:a16="http://schemas.microsoft.com/office/drawing/2014/main" id="{AE5F72D9-9CD1-E102-17FE-34162D83797D}"/>
+              </a:ext>
+            </a:extLst>
+          </p:cNvPr>
+          <p:cNvSpPr>
+            <a:spLocks noGrp="1"/>
+          </p:cNvSpPr>
+          <p:nvPr>
+            <p:ph type="ftr" sz="quarter" idx="13"/>
+          </p:nvPr>
+        </p:nvSpPr>
+        <p:spPr>
+          <a:xfrm>
+            <a:off x="576072" y="12801600"/>
+            <a:ext cx="4956176" cy="381000"/>
+          </a:xfrm>
+        </p:spPr>
+        <p:txBody>
+          <a:bodyPr/>
+          <a:lstStyle/>
+          <a:p>
+            <a:r>
+              <a:rPr lang="en-US"/>
+              <a:t>Qiskit Fall Fest 2025</a:t>
+            </a:r>
+            <a:endParaRPr lang="en-US" dirty="0"/>
+          </a:p>
+        </p:txBody>
+      </p:sp>
+      <p:pic>
+        <p:nvPicPr>
+          <p:cNvPr id="8" name="Picture 7">
+            <a:extLst>
+              <a:ext uri="{FF2B5EF4-FFF2-40B4-BE49-F238E27FC236}">
+                <a16:creationId xmlns:a16="http://schemas.microsoft.com/office/drawing/2014/main" id="{17802A7A-D4CE-0BFE-7D2A-E1DDF51689F9}"/>
+              </a:ext>
+            </a:extLst>
+          </p:cNvPr>
+          <p:cNvPicPr>
+            <a:picLocks noChangeAspect="1"/>
+          </p:cNvPicPr>
+          <p:nvPr/>
+        </p:nvPicPr>
+        <p:blipFill>
+          <a:blip r:embed="rId2">
+            <a:extLst>
+              <a:ext uri="{96DAC541-7B7A-43D3-8B79-37D633B846F1}">
+                <asvg:svgBlip xmlns:asvg="http://schemas.microsoft.com/office/drawing/2016/SVG/main" r:embed="rId3"/>
+              </a:ext>
+            </a:extLst>
+          </a:blip>
+          <a:srcRect/>
+          <a:stretch/>
+        </p:blipFill>
+        <p:spPr>
+          <a:xfrm>
+            <a:off x="21926030" y="11348844"/>
+            <a:ext cx="1892302" cy="1892302"/>
+          </a:xfrm>
+          <a:prstGeom prst="rect">
+            <a:avLst/>
+          </a:prstGeom>
+        </p:spPr>
+      </p:pic>
+      <p:sp>
+        <p:nvSpPr>
+          <p:cNvPr id="3" name="Text Placeholder 2">
+            <a:extLst>
+              <a:ext uri="{FF2B5EF4-FFF2-40B4-BE49-F238E27FC236}">
+                <a16:creationId xmlns:a16="http://schemas.microsoft.com/office/drawing/2014/main" id="{E7D6E928-40E3-F3C7-2C54-54BAD25DDCD8}"/>
+              </a:ext>
+            </a:extLst>
+          </p:cNvPr>
+          <p:cNvSpPr>
+            <a:spLocks noGrp="1"/>
+          </p:cNvSpPr>
+          <p:nvPr>
+            <p:ph type="body" sz="quarter" idx="11"/>
+          </p:nvPr>
+        </p:nvSpPr>
+        <p:spPr/>
+        <p:txBody>
+          <a:bodyPr/>
+          <a:lstStyle/>
+          <a:p>
+            <a:r>
+              <a:rPr lang="en-US" b="1" dirty="0">
+                <a:solidFill>
+                  <a:schemeClr val="accent2"/>
+                </a:solidFill>
+              </a:rPr>
+              <a:t>Claims</a:t>
+            </a:r>
+          </a:p>
+          <a:p>
+            <a:endParaRPr lang="en-US" dirty="0"/>
+          </a:p>
+          <a:p>
+            <a:r>
+              <a:rPr lang="en-US" dirty="0"/>
+              <a:t>“</a:t>
+            </a:r>
+            <a:r>
+              <a:rPr lang="en-US" b="1" dirty="0">
+                <a:solidFill>
+                  <a:schemeClr val="accent1"/>
+                </a:solidFill>
+              </a:rPr>
+              <a:t>When and how will quantum computing broadly benefit humanity? </a:t>
+            </a:r>
+            <a:r>
+              <a:rPr lang="en-US" dirty="0"/>
+              <a:t>Despite exhilarating recent progress, </a:t>
+            </a:r>
+            <a:r>
+              <a:rPr lang="en-US" b="1" dirty="0">
+                <a:solidFill>
+                  <a:schemeClr val="accent1"/>
+                </a:solidFill>
+              </a:rPr>
+              <a:t>we still don’t know</a:t>
+            </a:r>
+            <a:r>
+              <a:rPr lang="en-US" dirty="0"/>
+              <a:t>. Here my friend Jens Eisert and I assess the current status and the challenges ahead. We are optimistic about the quantum future, but there’s a lot of work to do.” </a:t>
+            </a:r>
+          </a:p>
+          <a:p>
+            <a:r>
+              <a:rPr lang="en-US" dirty="0"/>
+              <a:t>John </a:t>
+            </a:r>
+            <a:r>
+              <a:rPr lang="en-US" dirty="0" err="1"/>
+              <a:t>Preskill</a:t>
+            </a:r>
+            <a:r>
+              <a:rPr lang="en-US" dirty="0"/>
+              <a:t>, Caltech.</a:t>
+            </a:r>
+          </a:p>
+          <a:p>
+            <a:br>
+              <a:rPr lang="en-US" dirty="0"/>
+            </a:br>
+            <a:r>
+              <a:rPr lang="en-US" b="1" dirty="0">
+                <a:hlinkClick r:id="rId4"/>
+              </a:rPr>
+              <a:t>https://lnkd.in/gxuzxhj3</a:t>
+            </a:r>
+            <a:endParaRPr lang="en-US" b="1" dirty="0"/>
+          </a:p>
+          <a:p>
+            <a:r>
+              <a:rPr lang="en-US" dirty="0"/>
+              <a:t>2510.19928</a:t>
+            </a:r>
+          </a:p>
+          <a:p>
+            <a:endParaRPr lang="en-US" dirty="0"/>
+          </a:p>
+          <a:p>
+            <a:endParaRPr lang="en-US" dirty="0"/>
+          </a:p>
+        </p:txBody>
+      </p:sp>
+      <p:sp>
+        <p:nvSpPr>
+          <p:cNvPr id="11" name="Text Placeholder 10">
+            <a:extLst>
+              <a:ext uri="{FF2B5EF4-FFF2-40B4-BE49-F238E27FC236}">
+                <a16:creationId xmlns:a16="http://schemas.microsoft.com/office/drawing/2014/main" id="{19BCDD9A-EAF7-D5EF-C76E-0B422C976FC2}"/>
+              </a:ext>
+            </a:extLst>
+          </p:cNvPr>
+          <p:cNvSpPr>
+            <a:spLocks noGrp="1"/>
+          </p:cNvSpPr>
+          <p:nvPr>
+            <p:ph type="body" sz="quarter" idx="12"/>
+          </p:nvPr>
+        </p:nvSpPr>
+        <p:spPr/>
+        <p:txBody>
+          <a:bodyPr/>
+          <a:lstStyle/>
+          <a:p>
+            <a:r>
+              <a:rPr lang="en-US" b="1" dirty="0">
+                <a:solidFill>
+                  <a:schemeClr val="accent2"/>
+                </a:solidFill>
+              </a:rPr>
+              <a:t>What’s Needed</a:t>
+            </a:r>
+          </a:p>
+          <a:p>
+            <a:endParaRPr lang="en-US" b="1" dirty="0">
+              <a:solidFill>
+                <a:schemeClr val="accent2"/>
+              </a:solidFill>
+            </a:endParaRPr>
+          </a:p>
+          <a:p>
+            <a:r>
+              <a:rPr lang="en-US" dirty="0"/>
+              <a:t>“Gaps that we still have to cross in order to reach broadly useful technology. An important take-away: 𝘁𝗵𝗲 𝗯𝗶𝗴𝗴𝗲𝘀𝘁 𝗴𝗮𝗽 𝗶𝘀 𝗻𝗼𝘁 𝗶𝗻 𝗵𝗮𝗿𝗱𝘄𝗮𝗿𝗲, 𝗯𝘂𝘁 𝗶𝗻 𝗱𝗲𝘃𝗲𝗹𝗼𝗽𝗶𝗻𝗴 𝘁𝗵𝗲 𝗿𝗶𝗴𝗵𝘁 𝗾𝘂𝗮𝗻𝘁𝘂𝗺 𝗮𝗹𝗴𝗼𝗿𝗶𝘁𝗵𝗺𝘀.” </a:t>
+            </a:r>
+          </a:p>
+          <a:p>
+            <a:r>
+              <a:rPr lang="en-US" dirty="0"/>
+              <a:t>Koen </a:t>
+            </a:r>
+            <a:r>
+              <a:rPr lang="en-US" dirty="0" err="1"/>
+              <a:t>Groenland</a:t>
+            </a:r>
+            <a:r>
+              <a:rPr lang="en-US" dirty="0"/>
+              <a:t>, </a:t>
+            </a:r>
+            <a:r>
+              <a:rPr lang="en-US" dirty="0" err="1"/>
+              <a:t>QuSoft</a:t>
+            </a:r>
+            <a:r>
+              <a:rPr lang="en-US" dirty="0"/>
+              <a:t>. </a:t>
+            </a:r>
+          </a:p>
+          <a:p>
+            <a:endParaRPr lang="en-US" b="1" dirty="0">
+              <a:solidFill>
+                <a:schemeClr val="accent2"/>
+              </a:solidFill>
+            </a:endParaRPr>
+          </a:p>
+          <a:p>
+            <a:endParaRPr lang="en-US" b="1" dirty="0">
+              <a:solidFill>
+                <a:schemeClr val="accent2"/>
+              </a:solidFill>
+            </a:endParaRPr>
+          </a:p>
+          <a:p>
+            <a:endParaRPr lang="en-US" b="1" dirty="0"/>
+          </a:p>
+          <a:p>
+            <a:endParaRPr lang="en-US" dirty="0"/>
+          </a:p>
+          <a:p>
+            <a:endParaRPr lang="en-US" dirty="0"/>
+          </a:p>
+          <a:p>
+            <a:endParaRPr lang="en-US" dirty="0"/>
+          </a:p>
+          <a:p>
+            <a:endParaRPr lang="en-US" dirty="0"/>
+          </a:p>
+          <a:p>
+            <a:endParaRPr lang="en-US" dirty="0"/>
+          </a:p>
+          <a:p>
+            <a:endParaRPr lang="en-US" dirty="0"/>
+          </a:p>
+        </p:txBody>
+      </p:sp>
+      <p:pic>
+        <p:nvPicPr>
+          <p:cNvPr id="5" name="Picture 4" descr="A screenshot of a computer&#10;&#10;AI-generated content may be incorrect.">
+            <a:extLst>
+              <a:ext uri="{FF2B5EF4-FFF2-40B4-BE49-F238E27FC236}">
+                <a16:creationId xmlns:a16="http://schemas.microsoft.com/office/drawing/2014/main" id="{6D99C819-29BB-06D0-672F-101B25EC5E06}"/>
+              </a:ext>
+            </a:extLst>
+          </p:cNvPr>
+          <p:cNvPicPr>
+            <a:picLocks noChangeAspect="1"/>
+          </p:cNvPicPr>
+          <p:nvPr/>
+        </p:nvPicPr>
+        <p:blipFill>
+          <a:blip r:embed="rId5"/>
+          <a:stretch>
+            <a:fillRect/>
+          </a:stretch>
+        </p:blipFill>
+        <p:spPr>
+          <a:xfrm>
+            <a:off x="574675" y="3007910"/>
+            <a:ext cx="10398125" cy="6250396"/>
+          </a:xfrm>
+          <a:prstGeom prst="rect">
+            <a:avLst/>
+          </a:prstGeom>
+        </p:spPr>
+      </p:pic>
+      <p:pic>
+        <p:nvPicPr>
+          <p:cNvPr id="10" name="Picture 9" descr="A close up of text&#10;&#10;AI-generated content may be incorrect.">
+            <a:extLst>
+              <a:ext uri="{FF2B5EF4-FFF2-40B4-BE49-F238E27FC236}">
+                <a16:creationId xmlns:a16="http://schemas.microsoft.com/office/drawing/2014/main" id="{248BA953-7F0C-9924-CACE-92D2DA562314}"/>
+              </a:ext>
+            </a:extLst>
+          </p:cNvPr>
+          <p:cNvPicPr>
+            <a:picLocks noChangeAspect="1"/>
+          </p:cNvPicPr>
+          <p:nvPr/>
+        </p:nvPicPr>
+        <p:blipFill>
+          <a:blip r:embed="rId6"/>
+          <a:stretch>
+            <a:fillRect/>
+          </a:stretch>
+        </p:blipFill>
+        <p:spPr>
+          <a:xfrm>
+            <a:off x="10929620" y="8195475"/>
+            <a:ext cx="13351010" cy="3148523"/>
+          </a:xfrm>
+          <a:prstGeom prst="rect">
+            <a:avLst/>
+          </a:prstGeom>
+        </p:spPr>
+      </p:pic>
+    </p:spTree>
+    <p:extLst>
+      <p:ext uri="{BB962C8B-B14F-4D97-AF65-F5344CB8AC3E}">
+        <p14:creationId xmlns:p14="http://schemas.microsoft.com/office/powerpoint/2010/main" val="3598523416"/>
+      </p:ext>
+    </p:extLst>
+  </p:cSld>
+  <p:clrMapOvr>
+    <a:masterClrMapping/>
+  </p:clrMapOvr>
+  <p:transition spd="med"/>
+</p:sld>
+</file>
+
+<file path=ppt/slides/slide4.xml><?xml version="1.0" encoding="utf-8"?>
+<p:sld xmlns:a="http://schemas.openxmlformats.org/drawingml/2006/main" xmlns:r="http://schemas.openxmlformats.org/officeDocument/2006/relationships" xmlns:p="http://schemas.openxmlformats.org/presentationml/2006/main">
+  <p:cSld>
+    <p:spTree>
+      <p:nvGrpSpPr>
+        <p:cNvPr id="1" name="">
+          <a:extLst>
+            <a:ext uri="{FF2B5EF4-FFF2-40B4-BE49-F238E27FC236}">
+              <a16:creationId xmlns:a16="http://schemas.microsoft.com/office/drawing/2014/main" id="{CA06ED37-18B2-F349-340A-9502A20DAC2A}"/>
+            </a:ext>
+          </a:extLst>
+        </p:cNvPr>
+        <p:cNvGrpSpPr/>
+        <p:nvPr/>
+      </p:nvGrpSpPr>
+      <p:grpSpPr>
+        <a:xfrm>
+          <a:off x="0" y="0"/>
+          <a:ext cx="0" cy="0"/>
+          <a:chOff x="0" y="0"/>
+          <a:chExt cx="0" cy="0"/>
+        </a:xfrm>
+      </p:grpSpPr>
+      <p:sp>
+        <p:nvSpPr>
+          <p:cNvPr id="2" name="Title 1">
+            <a:extLst>
+              <a:ext uri="{FF2B5EF4-FFF2-40B4-BE49-F238E27FC236}">
+                <a16:creationId xmlns:a16="http://schemas.microsoft.com/office/drawing/2014/main" id="{CA026391-38B8-6C8B-5F20-B59029900CAA}"/>
+              </a:ext>
+            </a:extLst>
+          </p:cNvPr>
+          <p:cNvSpPr>
+            <a:spLocks noGrp="1"/>
+          </p:cNvSpPr>
+          <p:nvPr>
+            <p:ph type="title"/>
+          </p:nvPr>
+        </p:nvSpPr>
+        <p:spPr>
+          <a:xfrm>
+            <a:off x="576072" y="384049"/>
+            <a:ext cx="11045825" cy="1414272"/>
+          </a:xfrm>
+        </p:spPr>
+        <p:txBody>
+          <a:bodyPr/>
+          <a:lstStyle/>
+          <a:p>
+            <a:r>
+              <a:rPr lang="en-US" dirty="0"/>
+              <a:t>Q News</a:t>
+            </a:r>
+          </a:p>
+        </p:txBody>
+      </p:sp>
+      <p:sp>
+        <p:nvSpPr>
+          <p:cNvPr id="7" name="Footer Placeholder 6">
+            <a:extLst>
+              <a:ext uri="{FF2B5EF4-FFF2-40B4-BE49-F238E27FC236}">
+                <a16:creationId xmlns:a16="http://schemas.microsoft.com/office/drawing/2014/main" id="{356B2BF0-5F8C-249D-BEF8-8B618AEAC163}"/>
+              </a:ext>
+            </a:extLst>
+          </p:cNvPr>
+          <p:cNvSpPr>
+            <a:spLocks noGrp="1"/>
+          </p:cNvSpPr>
+          <p:nvPr>
+            <p:ph type="ftr" sz="quarter" idx="13"/>
+          </p:nvPr>
+        </p:nvSpPr>
+        <p:spPr>
+          <a:xfrm>
+            <a:off x="576072" y="12801600"/>
+            <a:ext cx="4956176" cy="381000"/>
+          </a:xfrm>
+        </p:spPr>
+        <p:txBody>
+          <a:bodyPr/>
+          <a:lstStyle/>
+          <a:p>
+            <a:r>
+              <a:rPr lang="en-US"/>
+              <a:t>Qiskit Fall Fest 2025</a:t>
+            </a:r>
+            <a:endParaRPr lang="en-US" dirty="0"/>
+          </a:p>
+        </p:txBody>
+      </p:sp>
+      <p:pic>
+        <p:nvPicPr>
+          <p:cNvPr id="8" name="Picture 7">
+            <a:extLst>
+              <a:ext uri="{FF2B5EF4-FFF2-40B4-BE49-F238E27FC236}">
+                <a16:creationId xmlns:a16="http://schemas.microsoft.com/office/drawing/2014/main" id="{43BBFD9D-7741-1BAD-65BB-CE1D2B53F4F9}"/>
+              </a:ext>
+            </a:extLst>
+          </p:cNvPr>
+          <p:cNvPicPr>
+            <a:picLocks noChangeAspect="1"/>
+          </p:cNvPicPr>
+          <p:nvPr/>
+        </p:nvPicPr>
+        <p:blipFill>
+          <a:blip r:embed="rId2">
+            <a:extLst>
+              <a:ext uri="{96DAC541-7B7A-43D3-8B79-37D633B846F1}">
+                <asvg:svgBlip xmlns:asvg="http://schemas.microsoft.com/office/drawing/2016/SVG/main" r:embed="rId3"/>
+              </a:ext>
+            </a:extLst>
+          </a:blip>
+          <a:srcRect/>
+          <a:stretch/>
+        </p:blipFill>
+        <p:spPr>
+          <a:xfrm>
+            <a:off x="21926030" y="11348844"/>
+            <a:ext cx="1892302" cy="1892302"/>
+          </a:xfrm>
+          <a:prstGeom prst="rect">
+            <a:avLst/>
+          </a:prstGeom>
+        </p:spPr>
+      </p:pic>
+      <p:sp>
+        <p:nvSpPr>
+          <p:cNvPr id="3" name="Text Placeholder 2">
+            <a:extLst>
+              <a:ext uri="{FF2B5EF4-FFF2-40B4-BE49-F238E27FC236}">
+                <a16:creationId xmlns:a16="http://schemas.microsoft.com/office/drawing/2014/main" id="{E901D7ED-7A71-0099-3C8F-6332BB8BEB48}"/>
+              </a:ext>
+            </a:extLst>
+          </p:cNvPr>
+          <p:cNvSpPr>
+            <a:spLocks noGrp="1"/>
+          </p:cNvSpPr>
+          <p:nvPr>
+            <p:ph type="body" sz="quarter" idx="11"/>
+          </p:nvPr>
+        </p:nvSpPr>
+        <p:spPr/>
+        <p:txBody>
+          <a:bodyPr/>
+          <a:lstStyle/>
+          <a:p>
+            <a:r>
+              <a:rPr lang="en-US" b="1" dirty="0">
+                <a:solidFill>
+                  <a:schemeClr val="accent2"/>
+                </a:solidFill>
+              </a:rPr>
+              <a:t>Sweet Spot for Q Advantage</a:t>
+            </a:r>
+          </a:p>
+          <a:p>
+            <a:endParaRPr lang="en-US" dirty="0"/>
+          </a:p>
+          <a:p>
+            <a:endParaRPr lang="en-US" dirty="0"/>
+          </a:p>
+          <a:p>
+            <a:endParaRPr lang="en-US" dirty="0"/>
+          </a:p>
+          <a:p>
+            <a:endParaRPr lang="en-US" dirty="0"/>
+          </a:p>
+        </p:txBody>
+      </p:sp>
+      <p:sp>
+        <p:nvSpPr>
+          <p:cNvPr id="11" name="Text Placeholder 10">
+            <a:extLst>
+              <a:ext uri="{FF2B5EF4-FFF2-40B4-BE49-F238E27FC236}">
+                <a16:creationId xmlns:a16="http://schemas.microsoft.com/office/drawing/2014/main" id="{31126FC9-89CD-53E9-FC26-29F154AA8CA8}"/>
+              </a:ext>
+            </a:extLst>
+          </p:cNvPr>
+          <p:cNvSpPr>
+            <a:spLocks noGrp="1"/>
+          </p:cNvSpPr>
+          <p:nvPr>
+            <p:ph type="body" sz="quarter" idx="12"/>
+          </p:nvPr>
+        </p:nvSpPr>
+        <p:spPr/>
+        <p:txBody>
+          <a:bodyPr/>
+          <a:lstStyle/>
+          <a:p>
+            <a:r>
+              <a:rPr lang="en-US" b="1" dirty="0">
+                <a:solidFill>
+                  <a:schemeClr val="accent2"/>
+                </a:solidFill>
+              </a:rPr>
+              <a:t>Error Rates Needed </a:t>
+            </a:r>
+            <a:endParaRPr lang="en-US" dirty="0"/>
+          </a:p>
+          <a:p>
+            <a:r>
+              <a:rPr lang="en-US" dirty="0"/>
+              <a:t>Koen </a:t>
+            </a:r>
+            <a:r>
+              <a:rPr lang="en-US" dirty="0" err="1"/>
+              <a:t>Groenland</a:t>
+            </a:r>
+            <a:r>
+              <a:rPr lang="en-US" dirty="0"/>
+              <a:t>, </a:t>
+            </a:r>
+            <a:r>
+              <a:rPr lang="en-US" dirty="0" err="1"/>
+              <a:t>QuSoft</a:t>
+            </a:r>
+            <a:r>
+              <a:rPr lang="en-US" dirty="0"/>
+              <a:t>, Amsterdam</a:t>
+            </a:r>
+          </a:p>
+          <a:p>
+            <a:endParaRPr lang="en-US" dirty="0"/>
+          </a:p>
+        </p:txBody>
+      </p:sp>
+      <p:pic>
+        <p:nvPicPr>
+          <p:cNvPr id="5" name="Picture 4" descr="A diagram of a diagram of a variety of components&#10;&#10;AI-generated content may be incorrect.">
+            <a:extLst>
+              <a:ext uri="{FF2B5EF4-FFF2-40B4-BE49-F238E27FC236}">
+                <a16:creationId xmlns:a16="http://schemas.microsoft.com/office/drawing/2014/main" id="{8661E7FB-D3D0-424D-6B52-F6A09D50D0BF}"/>
+              </a:ext>
+            </a:extLst>
+          </p:cNvPr>
+          <p:cNvPicPr>
+            <a:picLocks noChangeAspect="1"/>
+          </p:cNvPicPr>
+          <p:nvPr/>
+        </p:nvPicPr>
+        <p:blipFill>
+          <a:blip r:embed="rId4"/>
+          <a:stretch>
+            <a:fillRect/>
+          </a:stretch>
+        </p:blipFill>
+        <p:spPr>
+          <a:xfrm>
+            <a:off x="748819" y="3528857"/>
+            <a:ext cx="11129703" cy="5526015"/>
+          </a:xfrm>
+          <a:prstGeom prst="rect">
+            <a:avLst/>
+          </a:prstGeom>
+        </p:spPr>
+      </p:pic>
+      <p:pic>
+        <p:nvPicPr>
+          <p:cNvPr id="10" name="Picture 9" descr="A graph with numbers and a line&#10;&#10;AI-generated content may be incorrect.">
+            <a:extLst>
+              <a:ext uri="{FF2B5EF4-FFF2-40B4-BE49-F238E27FC236}">
+                <a16:creationId xmlns:a16="http://schemas.microsoft.com/office/drawing/2014/main" id="{F85AE3AF-9DAA-16CB-7E79-E815324D1F9F}"/>
+              </a:ext>
+            </a:extLst>
+          </p:cNvPr>
+          <p:cNvPicPr>
+            <a:picLocks noChangeAspect="1"/>
+          </p:cNvPicPr>
+          <p:nvPr/>
+        </p:nvPicPr>
+        <p:blipFill>
+          <a:blip r:embed="rId5"/>
+          <a:stretch>
+            <a:fillRect/>
+          </a:stretch>
+        </p:blipFill>
+        <p:spPr>
+          <a:xfrm>
+            <a:off x="12955851" y="3528857"/>
+            <a:ext cx="11336973" cy="6544864"/>
+          </a:xfrm>
+          <a:prstGeom prst="rect">
+            <a:avLst/>
+          </a:prstGeom>
+        </p:spPr>
+      </p:pic>
+    </p:spTree>
+    <p:extLst>
+      <p:ext uri="{BB962C8B-B14F-4D97-AF65-F5344CB8AC3E}">
+        <p14:creationId xmlns:p14="http://schemas.microsoft.com/office/powerpoint/2010/main" val="3347560158"/>
+      </p:ext>
+    </p:extLst>
+  </p:cSld>
+  <p:clrMapOvr>
+    <a:masterClrMapping/>
+  </p:clrMapOvr>
+  <p:transition spd="med"/>
+</p:sld>
+</file>
+
+<file path=ppt/slides/slide5.xml><?xml version="1.0" encoding="utf-8"?>
+<p:sld xmlns:a="http://schemas.openxmlformats.org/drawingml/2006/main" xmlns:r="http://schemas.openxmlformats.org/officeDocument/2006/relationships" xmlns:p="http://schemas.openxmlformats.org/presentationml/2006/main">
+  <p:cSld>
+    <p:spTree>
+      <p:nvGrpSpPr>
+        <p:cNvPr id="1" name="">
+          <a:extLst>
+            <a:ext uri="{FF2B5EF4-FFF2-40B4-BE49-F238E27FC236}">
+              <a16:creationId xmlns:a16="http://schemas.microsoft.com/office/drawing/2014/main" id="{8CB1D96C-CA44-DF0C-5E70-C84EDC98867C}"/>
+            </a:ext>
+          </a:extLst>
+        </p:cNvPr>
+        <p:cNvGrpSpPr/>
+        <p:nvPr/>
+      </p:nvGrpSpPr>
+      <p:grpSpPr>
+        <a:xfrm>
+          <a:off x="0" y="0"/>
+          <a:ext cx="0" cy="0"/>
+          <a:chOff x="0" y="0"/>
+          <a:chExt cx="0" cy="0"/>
+        </a:xfrm>
+      </p:grpSpPr>
+      <p:sp>
+        <p:nvSpPr>
+          <p:cNvPr id="2" name="Title 1">
+            <a:extLst>
+              <a:ext uri="{FF2B5EF4-FFF2-40B4-BE49-F238E27FC236}">
+                <a16:creationId xmlns:a16="http://schemas.microsoft.com/office/drawing/2014/main" id="{74EF5176-C805-D4EF-A259-908891D8B987}"/>
+              </a:ext>
+            </a:extLst>
+          </p:cNvPr>
+          <p:cNvSpPr>
+            <a:spLocks noGrp="1"/>
+          </p:cNvSpPr>
+          <p:nvPr>
+            <p:ph type="title"/>
+          </p:nvPr>
+        </p:nvSpPr>
+        <p:spPr>
+          <a:xfrm>
+            <a:off x="576072" y="384049"/>
+            <a:ext cx="11045825" cy="1414272"/>
+          </a:xfrm>
+        </p:spPr>
+        <p:txBody>
+          <a:bodyPr/>
+          <a:lstStyle/>
+          <a:p>
+            <a:r>
+              <a:rPr lang="en-US" dirty="0"/>
+              <a:t>Q News</a:t>
+            </a:r>
+          </a:p>
+        </p:txBody>
+      </p:sp>
+      <p:sp>
+        <p:nvSpPr>
+          <p:cNvPr id="7" name="Footer Placeholder 6">
+            <a:extLst>
+              <a:ext uri="{FF2B5EF4-FFF2-40B4-BE49-F238E27FC236}">
+                <a16:creationId xmlns:a16="http://schemas.microsoft.com/office/drawing/2014/main" id="{7AB94F09-794B-9BE7-83AD-E164B152C0DA}"/>
+              </a:ext>
+            </a:extLst>
+          </p:cNvPr>
+          <p:cNvSpPr>
+            <a:spLocks noGrp="1"/>
+          </p:cNvSpPr>
+          <p:nvPr>
+            <p:ph type="ftr" sz="quarter" idx="13"/>
+          </p:nvPr>
+        </p:nvSpPr>
+        <p:spPr>
+          <a:xfrm>
+            <a:off x="576072" y="12801600"/>
+            <a:ext cx="4956176" cy="381000"/>
+          </a:xfrm>
+        </p:spPr>
+        <p:txBody>
+          <a:bodyPr/>
+          <a:lstStyle/>
+          <a:p>
+            <a:r>
+              <a:rPr lang="en-US"/>
+              <a:t>Qiskit Fall Fest 2025</a:t>
+            </a:r>
+            <a:endParaRPr lang="en-US" dirty="0"/>
+          </a:p>
+        </p:txBody>
+      </p:sp>
+      <p:pic>
+        <p:nvPicPr>
+          <p:cNvPr id="8" name="Picture 7">
+            <a:extLst>
+              <a:ext uri="{FF2B5EF4-FFF2-40B4-BE49-F238E27FC236}">
+                <a16:creationId xmlns:a16="http://schemas.microsoft.com/office/drawing/2014/main" id="{229B174F-DE84-B29E-9B16-073C1E8F2ED4}"/>
+              </a:ext>
+            </a:extLst>
+          </p:cNvPr>
+          <p:cNvPicPr>
+            <a:picLocks noChangeAspect="1"/>
+          </p:cNvPicPr>
+          <p:nvPr/>
+        </p:nvPicPr>
+        <p:blipFill>
+          <a:blip r:embed="rId2">
+            <a:extLst>
+              <a:ext uri="{96DAC541-7B7A-43D3-8B79-37D633B846F1}">
+                <asvg:svgBlip xmlns:asvg="http://schemas.microsoft.com/office/drawing/2016/SVG/main" r:embed="rId3"/>
+              </a:ext>
+            </a:extLst>
+          </a:blip>
+          <a:srcRect/>
+          <a:stretch/>
+        </p:blipFill>
+        <p:spPr>
+          <a:xfrm>
+            <a:off x="21926030" y="11348844"/>
+            <a:ext cx="1892302" cy="1892302"/>
+          </a:xfrm>
+          <a:prstGeom prst="rect">
+            <a:avLst/>
+          </a:prstGeom>
+        </p:spPr>
+      </p:pic>
+      <p:sp>
+        <p:nvSpPr>
+          <p:cNvPr id="3" name="Text Placeholder 2">
+            <a:extLst>
+              <a:ext uri="{FF2B5EF4-FFF2-40B4-BE49-F238E27FC236}">
+                <a16:creationId xmlns:a16="http://schemas.microsoft.com/office/drawing/2014/main" id="{D39727F8-89DC-338D-2AE8-FF252B38F3A7}"/>
+              </a:ext>
+            </a:extLst>
+          </p:cNvPr>
+          <p:cNvSpPr>
+            <a:spLocks noGrp="1"/>
+          </p:cNvSpPr>
+          <p:nvPr>
+            <p:ph type="body" sz="quarter" idx="11"/>
+          </p:nvPr>
+        </p:nvSpPr>
+        <p:spPr/>
+        <p:txBody>
+          <a:bodyPr/>
+          <a:lstStyle/>
+          <a:p>
+            <a:r>
+              <a:rPr lang="en-US" b="1" dirty="0">
+                <a:solidFill>
+                  <a:schemeClr val="accent2"/>
+                </a:solidFill>
+              </a:rPr>
+              <a:t>Qubit Technology Comparison</a:t>
+            </a:r>
+          </a:p>
+          <a:p>
+            <a:endParaRPr lang="en-US" dirty="0"/>
+          </a:p>
+          <a:p>
+            <a:endParaRPr lang="en-US" dirty="0"/>
+          </a:p>
+          <a:p>
+            <a:endParaRPr lang="en-US" dirty="0"/>
+          </a:p>
+          <a:p>
+            <a:endParaRPr lang="en-US" dirty="0"/>
+          </a:p>
+        </p:txBody>
+      </p:sp>
+      <p:sp>
+        <p:nvSpPr>
+          <p:cNvPr id="11" name="Text Placeholder 10">
+            <a:extLst>
+              <a:ext uri="{FF2B5EF4-FFF2-40B4-BE49-F238E27FC236}">
+                <a16:creationId xmlns:a16="http://schemas.microsoft.com/office/drawing/2014/main" id="{A7BBC62C-EE68-F6FD-419B-2A2ED1119FAF}"/>
+              </a:ext>
+            </a:extLst>
+          </p:cNvPr>
+          <p:cNvSpPr>
+            <a:spLocks noGrp="1"/>
+          </p:cNvSpPr>
+          <p:nvPr>
+            <p:ph type="body" sz="quarter" idx="12"/>
+          </p:nvPr>
+        </p:nvSpPr>
+        <p:spPr/>
+        <p:txBody>
+          <a:bodyPr/>
+          <a:lstStyle/>
+          <a:p>
+            <a:r>
+              <a:rPr lang="en-US" b="1" dirty="0">
+                <a:solidFill>
+                  <a:schemeClr val="accent2"/>
+                </a:solidFill>
+              </a:rPr>
+              <a:t>Table compiled by </a:t>
+            </a:r>
+            <a:r>
+              <a:rPr lang="en-US" b="1" dirty="0" err="1">
+                <a:solidFill>
+                  <a:schemeClr val="accent2"/>
+                </a:solidFill>
+              </a:rPr>
+              <a:t>Automatski</a:t>
+            </a:r>
+            <a:r>
+              <a:rPr lang="en-US" b="1" dirty="0">
+                <a:solidFill>
+                  <a:schemeClr val="accent2"/>
+                </a:solidFill>
+              </a:rPr>
+              <a:t>, India</a:t>
+            </a:r>
+            <a:endParaRPr lang="en-US" dirty="0"/>
+          </a:p>
+          <a:p>
+            <a:endParaRPr lang="en-US" dirty="0"/>
+          </a:p>
+          <a:p>
+            <a:endParaRPr lang="en-US" dirty="0"/>
+          </a:p>
+        </p:txBody>
+      </p:sp>
+      <p:pic>
+        <p:nvPicPr>
+          <p:cNvPr id="6" name="Picture 5" descr="A blue and white table with text&#10;&#10;AI-generated content may be incorrect.">
+            <a:extLst>
+              <a:ext uri="{FF2B5EF4-FFF2-40B4-BE49-F238E27FC236}">
+                <a16:creationId xmlns:a16="http://schemas.microsoft.com/office/drawing/2014/main" id="{D887F87A-254C-12E4-DDB6-0458B1068B72}"/>
+              </a:ext>
+            </a:extLst>
+          </p:cNvPr>
+          <p:cNvPicPr>
+            <a:picLocks noChangeAspect="1"/>
+          </p:cNvPicPr>
+          <p:nvPr/>
+        </p:nvPicPr>
+        <p:blipFill>
+          <a:blip r:embed="rId4"/>
+          <a:stretch>
+            <a:fillRect/>
+          </a:stretch>
+        </p:blipFill>
+        <p:spPr>
+          <a:xfrm>
+            <a:off x="142240" y="1531429"/>
+            <a:ext cx="17942560" cy="11270171"/>
+          </a:xfrm>
+          <a:prstGeom prst="rect">
+            <a:avLst/>
+          </a:prstGeom>
+        </p:spPr>
+      </p:pic>
+    </p:spTree>
+    <p:extLst>
+      <p:ext uri="{BB962C8B-B14F-4D97-AF65-F5344CB8AC3E}">
+        <p14:creationId xmlns:p14="http://schemas.microsoft.com/office/powerpoint/2010/main" val="759107757"/>
+      </p:ext>
+    </p:extLst>
+  </p:cSld>
+  <p:clrMapOvr>
+    <a:masterClrMapping/>
+  </p:clrMapOvr>
+  <p:transition spd="med"/>
+</p:sld>
+</file>
+
+<file path=ppt/slides/slide6.xml><?xml version="1.0" encoding="utf-8"?>
 <p:sld xmlns:a="http://schemas.openxmlformats.org/drawingml/2006/main" xmlns:r="http://schemas.openxmlformats.org/officeDocument/2006/relationships" xmlns:p="http://schemas.openxmlformats.org/presentationml/2006/main">
   <p:cSld>
     <p:spTree>
@@ -32987,7 +36256,7 @@
 </p:sld>
 </file>
 
-<file path=ppt/slides/slide4.xml><?xml version="1.0" encoding="utf-8"?>
+<file path=ppt/slides/slide7.xml><?xml version="1.0" encoding="utf-8"?>
 <p:sld xmlns:a="http://schemas.openxmlformats.org/drawingml/2006/main" xmlns:r="http://schemas.openxmlformats.org/officeDocument/2006/relationships" xmlns:p="http://schemas.openxmlformats.org/presentationml/2006/main">
   <p:cSld>
     <p:spTree>
@@ -33031,7 +36300,11 @@
           <a:lstStyle/>
           <a:p>
             <a:r>
-              <a:rPr lang="en-US" sz="6000" dirty="0" err="1"/>
+              <a:rPr lang="en-US" sz="6000" dirty="0" err="1">
+                <a:solidFill>
+                  <a:srgbClr val="8A3FFC"/>
+                </a:solidFill>
+              </a:rPr>
               <a:t>TechAlliance</a:t>
             </a:r>
             <a:r>
@@ -33068,7 +36341,11 @@
           <a:lstStyle/>
           <a:p>
             <a:r>
-              <a:rPr lang="en-US" dirty="0"/>
+              <a:rPr lang="en-US" dirty="0">
+                <a:solidFill>
+                  <a:srgbClr val="8A3FFC"/>
+                </a:solidFill>
+              </a:rPr>
               <a:t>Summit Agenda</a:t>
             </a:r>
           </a:p>
@@ -33139,7 +36416,7 @@
           </a:ln>
           <a:extLst>
             <a:ext uri="{C572A759-6A51-4108-AA02-DFA0A04FC94B}">
-              <ma14:wrappingTextBoxFlag xmlns="" xmlns:m="http://schemas.openxmlformats.org/officeDocument/2006/math" xmlns:a14="http://schemas.microsoft.com/office/drawing/2010/main" xmlns:ma14="http://schemas.microsoft.com/office/mac/drawingml/2011/main" val="1"/>
+              <ma14:wrappingTextBoxFlag xmlns:ma14="http://schemas.microsoft.com/office/mac/drawingml/2011/main" xmlns:a14="http://schemas.microsoft.com/office/drawing/2010/main" xmlns:m="http://schemas.openxmlformats.org/officeDocument/2006/math" xmlns="" val="1"/>
             </a:ext>
           </a:extLst>
         </p:spPr>
@@ -33276,7 +36553,7 @@
           </a:ln>
           <a:extLst>
             <a:ext uri="{C572A759-6A51-4108-AA02-DFA0A04FC94B}">
-              <ma14:wrappingTextBoxFlag xmlns="" xmlns:m="http://schemas.openxmlformats.org/officeDocument/2006/math" xmlns:a14="http://schemas.microsoft.com/office/drawing/2010/main" xmlns:ma14="http://schemas.microsoft.com/office/mac/drawingml/2011/main" val="1"/>
+              <ma14:wrappingTextBoxFlag xmlns:ma14="http://schemas.microsoft.com/office/mac/drawingml/2011/main" xmlns:a14="http://schemas.microsoft.com/office/drawing/2010/main" xmlns:m="http://schemas.openxmlformats.org/officeDocument/2006/math" xmlns="" val="1"/>
             </a:ext>
           </a:extLst>
         </p:spPr>
@@ -33360,7 +36637,7 @@
           </a:ln>
           <a:extLst>
             <a:ext uri="{C572A759-6A51-4108-AA02-DFA0A04FC94B}">
-              <ma14:wrappingTextBoxFlag xmlns="" xmlns:m="http://schemas.openxmlformats.org/officeDocument/2006/math" xmlns:a14="http://schemas.microsoft.com/office/drawing/2010/main" xmlns:ma14="http://schemas.microsoft.com/office/mac/drawingml/2011/main" val="1"/>
+              <ma14:wrappingTextBoxFlag xmlns:ma14="http://schemas.microsoft.com/office/mac/drawingml/2011/main" xmlns:a14="http://schemas.microsoft.com/office/drawing/2010/main" xmlns:m="http://schemas.openxmlformats.org/officeDocument/2006/math" xmlns="" val="1"/>
             </a:ext>
           </a:extLst>
         </p:spPr>
@@ -33577,7 +36854,7 @@
 </p:sld>
 </file>
 
-<file path=ppt/slides/slide5.xml><?xml version="1.0" encoding="utf-8"?>
+<file path=ppt/slides/slide8.xml><?xml version="1.0" encoding="utf-8"?>
 <p:sld xmlns:a="http://schemas.openxmlformats.org/drawingml/2006/main" xmlns:r="http://schemas.openxmlformats.org/officeDocument/2006/relationships" xmlns:p="http://schemas.openxmlformats.org/presentationml/2006/main">
   <p:cSld>
     <p:spTree>
@@ -33627,7 +36904,11 @@
           <a:lstStyle/>
           <a:p>
             <a:r>
-              <a:rPr lang="en-US" dirty="0"/>
+              <a:rPr lang="en-US" b="1" dirty="0">
+                <a:solidFill>
+                  <a:srgbClr val="8A3FFC"/>
+                </a:solidFill>
+              </a:rPr>
               <a:t>Others Are Moving Fast </a:t>
             </a:r>
             <a:br>
@@ -33862,7 +37143,7 @@
           </a:ln>
           <a:extLst>
             <a:ext uri="{C572A759-6A51-4108-AA02-DFA0A04FC94B}">
-              <ma14:wrappingTextBoxFlag xmlns:ma14="http://schemas.microsoft.com/office/mac/drawingml/2011/main" xmlns:a14="http://schemas.microsoft.com/office/drawing/2010/main" xmlns:m="http://schemas.openxmlformats.org/officeDocument/2006/math" xmlns="" val="1"/>
+              <ma14:wrappingTextBoxFlag xmlns="" xmlns:m="http://schemas.openxmlformats.org/officeDocument/2006/math" xmlns:a14="http://schemas.microsoft.com/office/drawing/2010/main" xmlns:ma14="http://schemas.microsoft.com/office/mac/drawingml/2011/main" val="1"/>
             </a:ext>
           </a:extLst>
         </p:spPr>
@@ -34237,7 +37518,7 @@
           </a:ln>
           <a:extLst>
             <a:ext uri="{C572A759-6A51-4108-AA02-DFA0A04FC94B}">
-              <ma14:wrappingTextBoxFlag xmlns:ma14="http://schemas.microsoft.com/office/mac/drawingml/2011/main" xmlns:a14="http://schemas.microsoft.com/office/drawing/2010/main" xmlns:m="http://schemas.openxmlformats.org/officeDocument/2006/math" xmlns="" val="1"/>
+              <ma14:wrappingTextBoxFlag xmlns="" xmlns:m="http://schemas.openxmlformats.org/officeDocument/2006/math" xmlns:a14="http://schemas.microsoft.com/office/drawing/2010/main" xmlns:ma14="http://schemas.microsoft.com/office/mac/drawingml/2011/main" val="1"/>
             </a:ext>
           </a:extLst>
         </p:spPr>
@@ -34481,7 +37762,11 @@
           </a:lstStyle>
           <a:p>
             <a:r>
-              <a:rPr lang="en-US" kern="0" dirty="0"/>
+              <a:rPr lang="en-US" b="1" kern="0" dirty="0">
+                <a:solidFill>
+                  <a:srgbClr val="8A3FFC"/>
+                </a:solidFill>
+              </a:rPr>
               <a:t>Look at IEEE Quantum Week Locations: </a:t>
             </a:r>
           </a:p>
@@ -34547,7 +37832,11 @@
           </a:p>
           <a:p>
             <a:r>
-              <a:rPr lang="en-US" sz="2800" kern="0" dirty="0"/>
+              <a:rPr lang="en-US" sz="2800" kern="0" dirty="0">
+                <a:solidFill>
+                  <a:schemeClr val="accent2"/>
+                </a:solidFill>
+              </a:rPr>
               <a:t>https://qce.quantum.ieee.org/2025/</a:t>
             </a:r>
           </a:p>
@@ -34570,7 +37859,7 @@
 </p:sld>
 </file>
 
-<file path=ppt/slides/slide6.xml><?xml version="1.0" encoding="utf-8"?>
+<file path=ppt/slides/slide9.xml><?xml version="1.0" encoding="utf-8"?>
 <p:sld xmlns:a="http://schemas.openxmlformats.org/drawingml/2006/main" xmlns:r="http://schemas.openxmlformats.org/officeDocument/2006/relationships" xmlns:p="http://schemas.openxmlformats.org/presentationml/2006/main">
   <p:cSld>
     <p:spTree>
@@ -35607,1750 +38896,6 @@
     <p:extLst>
       <p:ext uri="{BB962C8B-B14F-4D97-AF65-F5344CB8AC3E}">
         <p14:creationId xmlns:p14="http://schemas.microsoft.com/office/powerpoint/2010/main" val="244742044"/>
-      </p:ext>
-    </p:extLst>
-  </p:cSld>
-  <p:clrMapOvr>
-    <a:masterClrMapping/>
-  </p:clrMapOvr>
-  <p:transition spd="med"/>
-</p:sld>
-</file>
-
-<file path=ppt/slides/slide7.xml><?xml version="1.0" encoding="utf-8"?>
-<p:sld xmlns:a="http://schemas.openxmlformats.org/drawingml/2006/main" xmlns:r="http://schemas.openxmlformats.org/officeDocument/2006/relationships" xmlns:p="http://schemas.openxmlformats.org/presentationml/2006/main">
-  <p:cSld>
-    <p:spTree>
-      <p:nvGrpSpPr>
-        <p:cNvPr id="1" name="">
-          <a:extLst>
-            <a:ext uri="{FF2B5EF4-FFF2-40B4-BE49-F238E27FC236}">
-              <a16:creationId xmlns:a16="http://schemas.microsoft.com/office/drawing/2014/main" id="{62E53FF9-84C5-FE89-226E-DA1330A7BB38}"/>
-            </a:ext>
-          </a:extLst>
-        </p:cNvPr>
-        <p:cNvGrpSpPr/>
-        <p:nvPr/>
-      </p:nvGrpSpPr>
-      <p:grpSpPr>
-        <a:xfrm>
-          <a:off x="0" y="0"/>
-          <a:ext cx="0" cy="0"/>
-          <a:chOff x="0" y="0"/>
-          <a:chExt cx="0" cy="0"/>
-        </a:xfrm>
-      </p:grpSpPr>
-      <p:sp>
-        <p:nvSpPr>
-          <p:cNvPr id="2" name="Title 1">
-            <a:extLst>
-              <a:ext uri="{FF2B5EF4-FFF2-40B4-BE49-F238E27FC236}">
-                <a16:creationId xmlns:a16="http://schemas.microsoft.com/office/drawing/2014/main" id="{77CEAA65-CAF1-8E70-9466-12F60369FDA9}"/>
-              </a:ext>
-            </a:extLst>
-          </p:cNvPr>
-          <p:cNvSpPr>
-            <a:spLocks noGrp="1"/>
-          </p:cNvSpPr>
-          <p:nvPr>
-            <p:ph type="title"/>
-          </p:nvPr>
-        </p:nvSpPr>
-        <p:spPr/>
-        <p:txBody>
-          <a:bodyPr/>
-          <a:lstStyle/>
-          <a:p>
-            <a:r>
-              <a:rPr lang="en-US" dirty="0"/>
-              <a:t>Revisit Previous Questions</a:t>
-            </a:r>
-          </a:p>
-        </p:txBody>
-      </p:sp>
-      <p:cxnSp>
-        <p:nvCxnSpPr>
-          <p:cNvPr id="10" name="Straight Connector 9" descr="Horizontal row divider">
-            <a:extLst>
-              <a:ext uri="{FF2B5EF4-FFF2-40B4-BE49-F238E27FC236}">
-                <a16:creationId xmlns:a16="http://schemas.microsoft.com/office/drawing/2014/main" id="{D7EEC640-DB22-1222-288C-EE4A4EE4A48B}"/>
-              </a:ext>
-            </a:extLst>
-          </p:cNvPr>
-          <p:cNvCxnSpPr/>
-          <p:nvPr/>
-        </p:nvCxnSpPr>
-        <p:spPr bwMode="auto">
-          <a:xfrm>
-            <a:off x="568325" y="6096000"/>
-            <a:ext cx="23244175" cy="0"/>
-          </a:xfrm>
-          <a:prstGeom prst="line">
-            <a:avLst/>
-          </a:prstGeom>
-          <a:ln w="12700">
-            <a:solidFill>
-              <a:schemeClr val="tx1"/>
-            </a:solidFill>
-            <a:headEnd type="none" w="med" len="med"/>
-            <a:tailEnd type="none" w="med" len="med"/>
-          </a:ln>
-          <a:effectLst/>
-        </p:spPr>
-        <p:style>
-          <a:lnRef idx="1">
-            <a:schemeClr val="dk1"/>
-          </a:lnRef>
-          <a:fillRef idx="0">
-            <a:schemeClr val="dk1"/>
-          </a:fillRef>
-          <a:effectRef idx="0">
-            <a:schemeClr val="dk1"/>
-          </a:effectRef>
-          <a:fontRef idx="minor">
-            <a:schemeClr val="tx1"/>
-          </a:fontRef>
-        </p:style>
-      </p:cxnSp>
-      <p:sp>
-        <p:nvSpPr>
-          <p:cNvPr id="3" name="Text Placeholder 2">
-            <a:extLst>
-              <a:ext uri="{FF2B5EF4-FFF2-40B4-BE49-F238E27FC236}">
-                <a16:creationId xmlns:a16="http://schemas.microsoft.com/office/drawing/2014/main" id="{6BF29E3B-841E-12BC-B949-545152983CED}"/>
-              </a:ext>
-            </a:extLst>
-          </p:cNvPr>
-          <p:cNvSpPr>
-            <a:spLocks noGrp="1"/>
-          </p:cNvSpPr>
-          <p:nvPr>
-            <p:ph type="body" sz="quarter" idx="11"/>
-          </p:nvPr>
-        </p:nvSpPr>
-        <p:spPr/>
-        <p:txBody>
-          <a:bodyPr/>
-          <a:lstStyle/>
-          <a:p>
-            <a:r>
-              <a:rPr lang="en-US" sz="6400" dirty="0">
-                <a:solidFill>
-                  <a:srgbClr val="EE5396"/>
-                </a:solidFill>
-              </a:rPr>
-              <a:t>1</a:t>
-            </a:r>
-          </a:p>
-          <a:p>
-            <a:br>
-              <a:rPr lang="en-US" dirty="0"/>
-            </a:br>
-            <a:r>
-              <a:rPr lang="en-US" b="1" dirty="0">
-                <a:solidFill>
-                  <a:schemeClr val="accent2"/>
-                </a:solidFill>
-              </a:rPr>
-              <a:t>Greek Alphabet</a:t>
-            </a:r>
-            <a:endParaRPr lang="en-US" dirty="0"/>
-          </a:p>
-        </p:txBody>
-      </p:sp>
-      <p:cxnSp>
-        <p:nvCxnSpPr>
-          <p:cNvPr id="11" name="Straight Connector 10" descr="Vertical column divider">
-            <a:extLst>
-              <a:ext uri="{FF2B5EF4-FFF2-40B4-BE49-F238E27FC236}">
-                <a16:creationId xmlns:a16="http://schemas.microsoft.com/office/drawing/2014/main" id="{59806C2C-36FE-845B-F725-9D3ED52B1E6B}"/>
-              </a:ext>
-            </a:extLst>
-          </p:cNvPr>
-          <p:cNvCxnSpPr>
-            <a:cxnSpLocks/>
-          </p:cNvCxnSpPr>
-          <p:nvPr/>
-        </p:nvCxnSpPr>
-        <p:spPr bwMode="auto">
-          <a:xfrm>
-            <a:off x="6096000" y="6096000"/>
-            <a:ext cx="0" cy="5870448"/>
-          </a:xfrm>
-          <a:prstGeom prst="line">
-            <a:avLst/>
-          </a:prstGeom>
-          <a:ln w="12700">
-            <a:solidFill>
-              <a:schemeClr val="tx1"/>
-            </a:solidFill>
-            <a:headEnd type="none" w="med" len="med"/>
-            <a:tailEnd type="none" w="med" len="med"/>
-          </a:ln>
-          <a:effectLst/>
-        </p:spPr>
-        <p:style>
-          <a:lnRef idx="1">
-            <a:schemeClr val="dk1"/>
-          </a:lnRef>
-          <a:fillRef idx="0">
-            <a:schemeClr val="dk1"/>
-          </a:fillRef>
-          <a:effectRef idx="0">
-            <a:schemeClr val="dk1"/>
-          </a:effectRef>
-          <a:fontRef idx="minor">
-            <a:schemeClr val="tx1"/>
-          </a:fontRef>
-        </p:style>
-      </p:cxnSp>
-      <p:sp>
-        <p:nvSpPr>
-          <p:cNvPr id="4" name="Text Placeholder 3">
-            <a:extLst>
-              <a:ext uri="{FF2B5EF4-FFF2-40B4-BE49-F238E27FC236}">
-                <a16:creationId xmlns:a16="http://schemas.microsoft.com/office/drawing/2014/main" id="{C50E3709-A825-DEC2-1914-28BB3B0E5530}"/>
-              </a:ext>
-            </a:extLst>
-          </p:cNvPr>
-          <p:cNvSpPr>
-            <a:spLocks noGrp="1"/>
-          </p:cNvSpPr>
-          <p:nvPr>
-            <p:ph type="body" sz="quarter" idx="12"/>
-          </p:nvPr>
-        </p:nvSpPr>
-        <p:spPr>
-          <a:xfrm>
-            <a:off x="6669591" y="6667501"/>
-            <a:ext cx="5136327" cy="6245859"/>
-          </a:xfrm>
-        </p:spPr>
-        <p:txBody>
-          <a:bodyPr/>
-          <a:lstStyle/>
-          <a:p>
-            <a:r>
-              <a:rPr lang="en-US" sz="6400" dirty="0">
-                <a:solidFill>
-                  <a:srgbClr val="EE5396"/>
-                </a:solidFill>
-              </a:rPr>
-              <a:t>2</a:t>
-            </a:r>
-          </a:p>
-          <a:p>
-            <a:br>
-              <a:rPr lang="en-US" dirty="0"/>
-            </a:br>
-            <a:r>
-              <a:rPr lang="en-US" b="1" dirty="0">
-                <a:solidFill>
-                  <a:schemeClr val="accent2"/>
-                </a:solidFill>
-              </a:rPr>
-              <a:t>Data and Quantum Computers</a:t>
-            </a:r>
-          </a:p>
-          <a:p>
-            <a:endParaRPr lang="en-US" b="1" dirty="0">
-              <a:solidFill>
-                <a:schemeClr val="accent2"/>
-              </a:solidFill>
-            </a:endParaRPr>
-          </a:p>
-          <a:p>
-            <a:pPr marL="457200" indent="-457200">
-              <a:buFontTx/>
-              <a:buChar char="-"/>
-            </a:pPr>
-            <a:r>
-              <a:rPr lang="en-US" dirty="0"/>
-              <a:t>Data Loading Project</a:t>
-            </a:r>
-          </a:p>
-          <a:p>
-            <a:pPr marL="457200" indent="-457200">
-              <a:buFontTx/>
-              <a:buChar char="-"/>
-            </a:pPr>
-            <a:r>
-              <a:rPr lang="en-US" dirty="0"/>
-              <a:t>Watch out for Bad Articles, written by AI or humans</a:t>
-            </a:r>
-          </a:p>
-          <a:p>
-            <a:pPr marL="457200" indent="-457200">
-              <a:buFontTx/>
-              <a:buChar char="-"/>
-            </a:pPr>
-            <a:r>
-              <a:rPr lang="en-US" dirty="0"/>
-              <a:t>Small Data, Big Solution Space (Medium: J Krupansky)</a:t>
-            </a:r>
-          </a:p>
-          <a:p>
-            <a:pPr marL="457200" indent="-457200">
-              <a:buFontTx/>
-              <a:buChar char="-"/>
-            </a:pPr>
-            <a:r>
-              <a:rPr lang="en-US" dirty="0"/>
-              <a:t>Now-</a:t>
-            </a:r>
-            <a:r>
-              <a:rPr lang="en-US" dirty="0" err="1"/>
-              <a:t>ish</a:t>
-            </a:r>
-            <a:r>
-              <a:rPr lang="en-US" dirty="0"/>
-              <a:t> vs. Later-</a:t>
-            </a:r>
-            <a:r>
-              <a:rPr lang="en-US" dirty="0" err="1"/>
-              <a:t>ish</a:t>
-            </a:r>
-            <a:r>
-              <a:rPr lang="en-US" dirty="0"/>
-              <a:t> (FTQC, </a:t>
-            </a:r>
-            <a:r>
-              <a:rPr lang="en-US" dirty="0" err="1"/>
-              <a:t>qRAM</a:t>
-            </a:r>
-            <a:r>
-              <a:rPr lang="en-US" dirty="0"/>
-              <a:t>)</a:t>
-            </a:r>
-          </a:p>
-          <a:p>
-            <a:endParaRPr lang="en-US" b="1" dirty="0">
-              <a:solidFill>
-                <a:schemeClr val="accent2"/>
-              </a:solidFill>
-            </a:endParaRPr>
-          </a:p>
-        </p:txBody>
-      </p:sp>
-      <p:cxnSp>
-        <p:nvCxnSpPr>
-          <p:cNvPr id="12" name="Straight Connector 11" descr="Vertical column divider">
-            <a:extLst>
-              <a:ext uri="{FF2B5EF4-FFF2-40B4-BE49-F238E27FC236}">
-                <a16:creationId xmlns:a16="http://schemas.microsoft.com/office/drawing/2014/main" id="{97BEC58A-ACFB-7905-1B35-CD1CB0CE862B}"/>
-              </a:ext>
-            </a:extLst>
-          </p:cNvPr>
-          <p:cNvCxnSpPr>
-            <a:cxnSpLocks/>
-          </p:cNvCxnSpPr>
-          <p:nvPr/>
-        </p:nvCxnSpPr>
-        <p:spPr bwMode="auto">
-          <a:xfrm>
-            <a:off x="12188952" y="6099048"/>
-            <a:ext cx="0" cy="5890632"/>
-          </a:xfrm>
-          <a:prstGeom prst="line">
-            <a:avLst/>
-          </a:prstGeom>
-          <a:ln w="12700">
-            <a:solidFill>
-              <a:schemeClr val="tx1"/>
-            </a:solidFill>
-            <a:headEnd type="none" w="med" len="med"/>
-            <a:tailEnd type="none" w="med" len="med"/>
-          </a:ln>
-          <a:effectLst/>
-        </p:spPr>
-        <p:style>
-          <a:lnRef idx="1">
-            <a:schemeClr val="dk1"/>
-          </a:lnRef>
-          <a:fillRef idx="0">
-            <a:schemeClr val="dk1"/>
-          </a:fillRef>
-          <a:effectRef idx="0">
-            <a:schemeClr val="dk1"/>
-          </a:effectRef>
-          <a:fontRef idx="minor">
-            <a:schemeClr val="tx1"/>
-          </a:fontRef>
-        </p:style>
-      </p:cxnSp>
-      <p:sp>
-        <p:nvSpPr>
-          <p:cNvPr id="5" name="Text Placeholder 4">
-            <a:extLst>
-              <a:ext uri="{FF2B5EF4-FFF2-40B4-BE49-F238E27FC236}">
-                <a16:creationId xmlns:a16="http://schemas.microsoft.com/office/drawing/2014/main" id="{89C85353-0B79-90E0-3C7F-BD9B7838D58C}"/>
-              </a:ext>
-            </a:extLst>
-          </p:cNvPr>
-          <p:cNvSpPr>
-            <a:spLocks noGrp="1"/>
-          </p:cNvSpPr>
-          <p:nvPr>
-            <p:ph type="body" sz="quarter" idx="13"/>
-          </p:nvPr>
-        </p:nvSpPr>
-        <p:spPr/>
-        <p:txBody>
-          <a:bodyPr/>
-          <a:lstStyle/>
-          <a:p>
-            <a:r>
-              <a:rPr lang="en-US" sz="6400" dirty="0">
-                <a:solidFill>
-                  <a:srgbClr val="EE5396"/>
-                </a:solidFill>
-              </a:rPr>
-              <a:t>3</a:t>
-            </a:r>
-          </a:p>
-          <a:p>
-            <a:br>
-              <a:rPr lang="en-US" dirty="0"/>
-            </a:br>
-            <a:r>
-              <a:rPr lang="en-US" b="1" dirty="0">
-                <a:solidFill>
-                  <a:schemeClr val="accent2"/>
-                </a:solidFill>
-              </a:rPr>
-              <a:t>AI + Quantum, Quantum + AI </a:t>
-            </a:r>
-          </a:p>
-          <a:p>
-            <a:endParaRPr lang="en-US" dirty="0"/>
-          </a:p>
-          <a:p>
-            <a:pPr marL="457200" indent="-457200">
-              <a:buFontTx/>
-              <a:buChar char="-"/>
-            </a:pPr>
-            <a:r>
-              <a:rPr lang="en-US" dirty="0" err="1"/>
-              <a:t>Qiskit</a:t>
-            </a:r>
-            <a:r>
-              <a:rPr lang="en-US" dirty="0"/>
-              <a:t> Code Assistant</a:t>
-            </a:r>
-          </a:p>
-          <a:p>
-            <a:pPr marL="457200" indent="-457200">
-              <a:buFontTx/>
-              <a:buChar char="-"/>
-            </a:pPr>
-            <a:r>
-              <a:rPr lang="en-US" dirty="0"/>
-              <a:t>AI Software Survey (TensorFlow?)</a:t>
-            </a:r>
-          </a:p>
-          <a:p>
-            <a:pPr marL="457200" indent="-457200">
-              <a:buFontTx/>
-              <a:buChar char="-"/>
-            </a:pPr>
-            <a:r>
-              <a:rPr lang="en-US" dirty="0"/>
-              <a:t>Quantum Software Survey (TensorFlow Quantum?)</a:t>
-            </a:r>
-          </a:p>
-        </p:txBody>
-      </p:sp>
-      <p:cxnSp>
-        <p:nvCxnSpPr>
-          <p:cNvPr id="13" name="Straight Connector 12" descr="Vertical column divider">
-            <a:extLst>
-              <a:ext uri="{FF2B5EF4-FFF2-40B4-BE49-F238E27FC236}">
-                <a16:creationId xmlns:a16="http://schemas.microsoft.com/office/drawing/2014/main" id="{D39143F9-9D22-4FFE-7FEB-846D8767F6FE}"/>
-              </a:ext>
-            </a:extLst>
-          </p:cNvPr>
-          <p:cNvCxnSpPr>
-            <a:cxnSpLocks/>
-          </p:cNvCxnSpPr>
-          <p:nvPr/>
-        </p:nvCxnSpPr>
-        <p:spPr bwMode="auto">
-          <a:xfrm>
-            <a:off x="18288000" y="6096000"/>
-            <a:ext cx="0" cy="5868329"/>
-          </a:xfrm>
-          <a:prstGeom prst="line">
-            <a:avLst/>
-          </a:prstGeom>
-          <a:ln w="12700">
-            <a:solidFill>
-              <a:schemeClr val="tx1"/>
-            </a:solidFill>
-            <a:headEnd type="none" w="med" len="med"/>
-            <a:tailEnd type="none" w="med" len="med"/>
-          </a:ln>
-          <a:effectLst/>
-        </p:spPr>
-        <p:style>
-          <a:lnRef idx="1">
-            <a:schemeClr val="dk1"/>
-          </a:lnRef>
-          <a:fillRef idx="0">
-            <a:schemeClr val="dk1"/>
-          </a:fillRef>
-          <a:effectRef idx="0">
-            <a:schemeClr val="dk1"/>
-          </a:effectRef>
-          <a:fontRef idx="minor">
-            <a:schemeClr val="tx1"/>
-          </a:fontRef>
-        </p:style>
-      </p:cxnSp>
-      <p:sp>
-        <p:nvSpPr>
-          <p:cNvPr id="6" name="Text Placeholder 5">
-            <a:extLst>
-              <a:ext uri="{FF2B5EF4-FFF2-40B4-BE49-F238E27FC236}">
-                <a16:creationId xmlns:a16="http://schemas.microsoft.com/office/drawing/2014/main" id="{D6F64ADF-2B97-69B3-05B3-4C70A1995F7B}"/>
-              </a:ext>
-            </a:extLst>
-          </p:cNvPr>
-          <p:cNvSpPr>
-            <a:spLocks noGrp="1"/>
-          </p:cNvSpPr>
-          <p:nvPr>
-            <p:ph type="body" sz="quarter" idx="14"/>
-          </p:nvPr>
-        </p:nvSpPr>
-        <p:spPr>
-          <a:xfrm>
-            <a:off x="18859500" y="6667501"/>
-            <a:ext cx="4949825" cy="6515099"/>
-          </a:xfrm>
-        </p:spPr>
-        <p:txBody>
-          <a:bodyPr/>
-          <a:lstStyle/>
-          <a:p>
-            <a:r>
-              <a:rPr lang="en-US" sz="6400" dirty="0">
-                <a:solidFill>
-                  <a:srgbClr val="EE5396"/>
-                </a:solidFill>
-              </a:rPr>
-              <a:t>4</a:t>
-            </a:r>
-          </a:p>
-          <a:p>
-            <a:br>
-              <a:rPr lang="en-US" dirty="0"/>
-            </a:br>
-            <a:r>
-              <a:rPr lang="en-US" b="1" dirty="0">
-                <a:solidFill>
-                  <a:schemeClr val="accent2"/>
-                </a:solidFill>
-              </a:rPr>
-              <a:t>Computer Chips</a:t>
-            </a:r>
-          </a:p>
-          <a:p>
-            <a:endParaRPr lang="en-US" b="1" dirty="0">
-              <a:solidFill>
-                <a:schemeClr val="accent2"/>
-              </a:solidFill>
-            </a:endParaRPr>
-          </a:p>
-          <a:p>
-            <a:pPr marL="457200" indent="-457200">
-              <a:buFontTx/>
-              <a:buChar char="-"/>
-            </a:pPr>
-            <a:r>
-              <a:rPr lang="en-US" dirty="0"/>
-              <a:t>How SC qubits work, </a:t>
-            </a:r>
-          </a:p>
-          <a:p>
-            <a:r>
-              <a:rPr lang="en-US" dirty="0"/>
-              <a:t>     </a:t>
-            </a:r>
-            <a:r>
-              <a:rPr lang="en-US" dirty="0" err="1"/>
-              <a:t>Qiskit</a:t>
-            </a:r>
-            <a:r>
-              <a:rPr lang="en-US" dirty="0"/>
-              <a:t> Channel, Zlatko’s talk,     </a:t>
-            </a:r>
-          </a:p>
-          <a:p>
-            <a:r>
-              <a:rPr lang="en-US" dirty="0"/>
-              <a:t>     Parts 1 and 2, </a:t>
-            </a:r>
-          </a:p>
-          <a:p>
-            <a:r>
-              <a:rPr lang="en-US" dirty="0"/>
-              <a:t>     Lectures 16-21, (~6 </a:t>
-            </a:r>
-            <a:r>
-              <a:rPr lang="en-US" dirty="0" err="1"/>
-              <a:t>hrs</a:t>
-            </a:r>
-            <a:r>
-              <a:rPr lang="en-US" dirty="0"/>
-              <a:t>)</a:t>
-            </a:r>
-          </a:p>
-          <a:p>
-            <a:pPr marL="457200" indent="-457200">
-              <a:buFontTx/>
-              <a:buChar char="-"/>
-            </a:pPr>
-            <a:endParaRPr lang="en-US" dirty="0"/>
-          </a:p>
-          <a:p>
-            <a:pPr marL="457200" indent="-457200">
-              <a:buFontTx/>
-              <a:buChar char="-"/>
-            </a:pPr>
-            <a:r>
-              <a:rPr lang="en-US" dirty="0"/>
-              <a:t>How QPUs and CPUs are made </a:t>
-            </a:r>
-          </a:p>
-          <a:p>
-            <a:pPr marL="457200" indent="-457200">
-              <a:buFontTx/>
-              <a:buChar char="-"/>
-            </a:pPr>
-            <a:endParaRPr lang="en-US" dirty="0"/>
-          </a:p>
-        </p:txBody>
-      </p:sp>
-      <p:sp>
-        <p:nvSpPr>
-          <p:cNvPr id="7" name="Footer Placeholder 6">
-            <a:extLst>
-              <a:ext uri="{FF2B5EF4-FFF2-40B4-BE49-F238E27FC236}">
-                <a16:creationId xmlns:a16="http://schemas.microsoft.com/office/drawing/2014/main" id="{6BAE6F33-C175-5EF2-42E5-8386FD36E878}"/>
-              </a:ext>
-            </a:extLst>
-          </p:cNvPr>
-          <p:cNvSpPr>
-            <a:spLocks noGrp="1"/>
-          </p:cNvSpPr>
-          <p:nvPr>
-            <p:ph type="ftr" sz="quarter" idx="15"/>
-          </p:nvPr>
-        </p:nvSpPr>
-        <p:spPr>
-          <a:xfrm>
-            <a:off x="576072" y="12801600"/>
-            <a:ext cx="4956176" cy="381000"/>
-          </a:xfrm>
-        </p:spPr>
-        <p:txBody>
-          <a:bodyPr/>
-          <a:lstStyle/>
-          <a:p>
-            <a:r>
-              <a:rPr lang="en-US" dirty="0" err="1"/>
-              <a:t>Qiskit</a:t>
-            </a:r>
-            <a:r>
-              <a:rPr lang="en-US" dirty="0"/>
-              <a:t> Fall Fest 2025</a:t>
-            </a:r>
-          </a:p>
-        </p:txBody>
-      </p:sp>
-      <p:pic>
-        <p:nvPicPr>
-          <p:cNvPr id="14" name="Picture 13">
-            <a:extLst>
-              <a:ext uri="{FF2B5EF4-FFF2-40B4-BE49-F238E27FC236}">
-                <a16:creationId xmlns:a16="http://schemas.microsoft.com/office/drawing/2014/main" id="{EB39F395-8B85-7448-124C-9811CE740583}"/>
-              </a:ext>
-            </a:extLst>
-          </p:cNvPr>
-          <p:cNvPicPr>
-            <a:picLocks noChangeAspect="1"/>
-          </p:cNvPicPr>
-          <p:nvPr/>
-        </p:nvPicPr>
-        <p:blipFill>
-          <a:blip r:embed="rId2">
-            <a:extLst>
-              <a:ext uri="{96DAC541-7B7A-43D3-8B79-37D633B846F1}">
-                <asvg:svgBlip xmlns:asvg="http://schemas.microsoft.com/office/drawing/2016/SVG/main" r:embed="rId3"/>
-              </a:ext>
-            </a:extLst>
-          </a:blip>
-          <a:srcRect/>
-          <a:stretch/>
-        </p:blipFill>
-        <p:spPr>
-          <a:xfrm>
-            <a:off x="21912263" y="532124"/>
-            <a:ext cx="1892300" cy="1892300"/>
-          </a:xfrm>
-          <a:prstGeom prst="rect">
-            <a:avLst/>
-          </a:prstGeom>
-        </p:spPr>
-      </p:pic>
-    </p:spTree>
-    <p:extLst>
-      <p:ext uri="{BB962C8B-B14F-4D97-AF65-F5344CB8AC3E}">
-        <p14:creationId xmlns:p14="http://schemas.microsoft.com/office/powerpoint/2010/main" val="1886029350"/>
-      </p:ext>
-    </p:extLst>
-  </p:cSld>
-  <p:clrMapOvr>
-    <a:masterClrMapping/>
-  </p:clrMapOvr>
-  <p:transition spd="med"/>
-</p:sld>
-</file>
-
-<file path=ppt/slides/slide8.xml><?xml version="1.0" encoding="utf-8"?>
-<p:sld xmlns:a="http://schemas.openxmlformats.org/drawingml/2006/main" xmlns:r="http://schemas.openxmlformats.org/officeDocument/2006/relationships" xmlns:p="http://schemas.openxmlformats.org/presentationml/2006/main">
-  <p:cSld>
-    <p:spTree>
-      <p:nvGrpSpPr>
-        <p:cNvPr id="1" name=""/>
-        <p:cNvGrpSpPr/>
-        <p:nvPr/>
-      </p:nvGrpSpPr>
-      <p:grpSpPr>
-        <a:xfrm>
-          <a:off x="0" y="0"/>
-          <a:ext cx="0" cy="0"/>
-          <a:chOff x="0" y="0"/>
-          <a:chExt cx="0" cy="0"/>
-        </a:xfrm>
-      </p:grpSpPr>
-      <p:sp>
-        <p:nvSpPr>
-          <p:cNvPr id="2" name="Title 1">
-            <a:extLst>
-              <a:ext uri="{FF2B5EF4-FFF2-40B4-BE49-F238E27FC236}">
-                <a16:creationId xmlns:a16="http://schemas.microsoft.com/office/drawing/2014/main" id="{D39052BC-A31A-3AFD-FA62-5B081B61CDCC}"/>
-              </a:ext>
-            </a:extLst>
-          </p:cNvPr>
-          <p:cNvSpPr>
-            <a:spLocks noGrp="1"/>
-          </p:cNvSpPr>
-          <p:nvPr>
-            <p:ph type="title"/>
-          </p:nvPr>
-        </p:nvSpPr>
-        <p:spPr/>
-        <p:txBody>
-          <a:bodyPr/>
-          <a:lstStyle/>
-          <a:p>
-            <a:r>
-              <a:rPr lang="en-US" sz="4400" dirty="0"/>
-              <a:t>Greek Alphabet</a:t>
-            </a:r>
-          </a:p>
-        </p:txBody>
-      </p:sp>
-      <p:sp>
-        <p:nvSpPr>
-          <p:cNvPr id="4" name="Text Placeholder 3">
-            <a:extLst>
-              <a:ext uri="{FF2B5EF4-FFF2-40B4-BE49-F238E27FC236}">
-                <a16:creationId xmlns:a16="http://schemas.microsoft.com/office/drawing/2014/main" id="{4D61F429-A819-1589-FBA7-B0AB71D7DF20}"/>
-              </a:ext>
-            </a:extLst>
-          </p:cNvPr>
-          <p:cNvSpPr>
-            <a:spLocks noGrp="1"/>
-          </p:cNvSpPr>
-          <p:nvPr>
-            <p:ph type="body" sz="quarter" idx="12"/>
-          </p:nvPr>
-        </p:nvSpPr>
-        <p:spPr/>
-        <p:txBody>
-          <a:bodyPr/>
-          <a:lstStyle/>
-          <a:p>
-            <a:r>
-              <a:rPr lang="en-US" b="1" dirty="0">
-                <a:solidFill>
-                  <a:schemeClr val="accent2"/>
-                </a:solidFill>
-              </a:rPr>
-              <a:t>Phi </a:t>
-            </a:r>
-            <a:r>
-              <a:rPr lang="en-US" dirty="0"/>
-              <a:t>and</a:t>
-            </a:r>
-            <a:r>
-              <a:rPr lang="en-US" b="1" dirty="0">
-                <a:solidFill>
-                  <a:schemeClr val="accent2"/>
-                </a:solidFill>
-              </a:rPr>
-              <a:t> Psi </a:t>
-            </a:r>
-            <a:r>
-              <a:rPr lang="en-US" dirty="0"/>
-              <a:t>are used a lot, also Alpha, Beta, Pi, and Theta, and, well, the others too!</a:t>
-            </a:r>
-          </a:p>
-          <a:p>
-            <a:endParaRPr lang="en-US" dirty="0"/>
-          </a:p>
-          <a:p>
-            <a:endParaRPr lang="en-US" dirty="0"/>
-          </a:p>
-          <a:p>
-            <a:endParaRPr lang="en-US" dirty="0"/>
-          </a:p>
-          <a:p>
-            <a:endParaRPr lang="en-US" dirty="0"/>
-          </a:p>
-          <a:p>
-            <a:endParaRPr lang="en-US" dirty="0"/>
-          </a:p>
-          <a:p>
-            <a:r>
-              <a:rPr lang="en-US" dirty="0"/>
-              <a:t>https://en.wikipedia.org/wiki/Greek_alphabet</a:t>
-            </a:r>
-          </a:p>
-          <a:p>
-            <a:endParaRPr lang="en-US" dirty="0"/>
-          </a:p>
-        </p:txBody>
-      </p:sp>
-      <p:sp>
-        <p:nvSpPr>
-          <p:cNvPr id="5" name="Text Placeholder 4">
-            <a:extLst>
-              <a:ext uri="{FF2B5EF4-FFF2-40B4-BE49-F238E27FC236}">
-                <a16:creationId xmlns:a16="http://schemas.microsoft.com/office/drawing/2014/main" id="{5D00F604-0481-AD77-9049-C690DC1A4437}"/>
-              </a:ext>
-            </a:extLst>
-          </p:cNvPr>
-          <p:cNvSpPr>
-            <a:spLocks noGrp="1"/>
-          </p:cNvSpPr>
-          <p:nvPr>
-            <p:ph type="body" sz="quarter" idx="13"/>
-          </p:nvPr>
-        </p:nvSpPr>
-        <p:spPr/>
-        <p:txBody>
-          <a:bodyPr/>
-          <a:lstStyle/>
-          <a:p>
-            <a:r>
-              <a:rPr lang="en-US" dirty="0"/>
-              <a:t>.</a:t>
-            </a:r>
-          </a:p>
-        </p:txBody>
-      </p:sp>
-      <p:sp>
-        <p:nvSpPr>
-          <p:cNvPr id="7" name="Picture Placeholder 10" descr="Place imagery here">
-            <a:extLst>
-              <a:ext uri="{FF2B5EF4-FFF2-40B4-BE49-F238E27FC236}">
-                <a16:creationId xmlns:a16="http://schemas.microsoft.com/office/drawing/2014/main" id="{77A7CC8A-F8D4-01B6-C299-15983476AE0E}"/>
-              </a:ext>
-            </a:extLst>
-          </p:cNvPr>
-          <p:cNvSpPr>
-            <a:spLocks noGrp="1"/>
-          </p:cNvSpPr>
-          <p:nvPr>
-            <p:ph type="pic" sz="quarter" idx="15" hasCustomPrompt="1"/>
-          </p:nvPr>
-        </p:nvSpPr>
-        <p:spPr>
-          <a:xfrm>
-            <a:off x="12763500" y="569913"/>
-            <a:ext cx="11049000" cy="12574587"/>
-          </a:xfrm>
-          <a:solidFill>
-            <a:schemeClr val="bg1"/>
-          </a:solidFill>
-        </p:spPr>
-        <p:txBody>
-          <a:bodyPr anchor="ctr"/>
-          <a:lstStyle>
-            <a:lvl1pPr algn="ctr">
-              <a:defRPr>
-                <a:solidFill>
-                  <a:schemeClr val="accent5"/>
-                </a:solidFill>
-              </a:defRPr>
-            </a:lvl1pPr>
-          </a:lstStyle>
-          <a:p>
-            <a:r>
-              <a:rPr lang="en-US"/>
-              <a:t>Place imagery here</a:t>
-            </a:r>
-          </a:p>
-        </p:txBody>
-      </p:sp>
-      <p:sp>
-        <p:nvSpPr>
-          <p:cNvPr id="6" name="Footer Placeholder 5">
-            <a:extLst>
-              <a:ext uri="{FF2B5EF4-FFF2-40B4-BE49-F238E27FC236}">
-                <a16:creationId xmlns:a16="http://schemas.microsoft.com/office/drawing/2014/main" id="{A1B75C6E-9935-614F-FDDF-F1F6697CD61D}"/>
-              </a:ext>
-            </a:extLst>
-          </p:cNvPr>
-          <p:cNvSpPr>
-            <a:spLocks noGrp="1"/>
-          </p:cNvSpPr>
-          <p:nvPr>
-            <p:ph type="ftr" sz="quarter" idx="14"/>
-          </p:nvPr>
-        </p:nvSpPr>
-        <p:spPr>
-          <a:xfrm>
-            <a:off x="576072" y="12801600"/>
-            <a:ext cx="4956176" cy="381000"/>
-          </a:xfrm>
-        </p:spPr>
-        <p:txBody>
-          <a:bodyPr/>
-          <a:lstStyle/>
-          <a:p>
-            <a:r>
-              <a:rPr lang="en-US"/>
-              <a:t>Qiskit Fall Fest 2025</a:t>
-            </a:r>
-            <a:endParaRPr lang="en-US" dirty="0"/>
-          </a:p>
-        </p:txBody>
-      </p:sp>
-      <p:pic>
-        <p:nvPicPr>
-          <p:cNvPr id="8" name="Picture 7">
-            <a:extLst>
-              <a:ext uri="{FF2B5EF4-FFF2-40B4-BE49-F238E27FC236}">
-                <a16:creationId xmlns:a16="http://schemas.microsoft.com/office/drawing/2014/main" id="{A0307671-4424-C753-1DC8-469EFBE61EE3}"/>
-              </a:ext>
-            </a:extLst>
-          </p:cNvPr>
-          <p:cNvPicPr>
-            <a:picLocks noChangeAspect="1"/>
-          </p:cNvPicPr>
-          <p:nvPr/>
-        </p:nvPicPr>
-        <p:blipFill>
-          <a:blip r:embed="rId2">
-            <a:extLst>
-              <a:ext uri="{96DAC541-7B7A-43D3-8B79-37D633B846F1}">
-                <asvg:svgBlip xmlns:asvg="http://schemas.microsoft.com/office/drawing/2016/SVG/main" r:embed="rId3"/>
-              </a:ext>
-            </a:extLst>
-          </a:blip>
-          <a:srcRect/>
-          <a:stretch/>
-        </p:blipFill>
-        <p:spPr>
-          <a:xfrm>
-            <a:off x="6682597" y="11237101"/>
-            <a:ext cx="1892302" cy="1892302"/>
-          </a:xfrm>
-          <a:prstGeom prst="rect">
-            <a:avLst/>
-          </a:prstGeom>
-        </p:spPr>
-      </p:pic>
-      <p:pic>
-        <p:nvPicPr>
-          <p:cNvPr id="9" name="Picture 8" descr="A close-up of a chart&#10;&#10;AI-generated content may be incorrect.">
-            <a:extLst>
-              <a:ext uri="{FF2B5EF4-FFF2-40B4-BE49-F238E27FC236}">
-                <a16:creationId xmlns:a16="http://schemas.microsoft.com/office/drawing/2014/main" id="{DFACAEC0-9B77-5E93-D60C-ABC3DE988C1A}"/>
-              </a:ext>
-            </a:extLst>
-          </p:cNvPr>
-          <p:cNvPicPr>
-            <a:picLocks noChangeAspect="1"/>
-          </p:cNvPicPr>
-          <p:nvPr/>
-        </p:nvPicPr>
-        <p:blipFill>
-          <a:blip r:embed="rId4"/>
-          <a:stretch>
-            <a:fillRect/>
-          </a:stretch>
-        </p:blipFill>
-        <p:spPr>
-          <a:xfrm>
-            <a:off x="12769850" y="821425"/>
-            <a:ext cx="11058334" cy="12071561"/>
-          </a:xfrm>
-          <a:prstGeom prst="rect">
-            <a:avLst/>
-          </a:prstGeom>
-        </p:spPr>
-      </p:pic>
-    </p:spTree>
-    <p:extLst>
-      <p:ext uri="{BB962C8B-B14F-4D97-AF65-F5344CB8AC3E}">
-        <p14:creationId xmlns:p14="http://schemas.microsoft.com/office/powerpoint/2010/main" val="579239392"/>
-      </p:ext>
-    </p:extLst>
-  </p:cSld>
-  <p:clrMapOvr>
-    <a:masterClrMapping/>
-  </p:clrMapOvr>
-  <p:transition spd="med"/>
-</p:sld>
-</file>
-
-<file path=ppt/slides/slide9.xml><?xml version="1.0" encoding="utf-8"?>
-<p:sld xmlns:a="http://schemas.openxmlformats.org/drawingml/2006/main" xmlns:r="http://schemas.openxmlformats.org/officeDocument/2006/relationships" xmlns:p="http://schemas.openxmlformats.org/presentationml/2006/main">
-  <p:cSld>
-    <p:spTree>
-      <p:nvGrpSpPr>
-        <p:cNvPr id="1" name="">
-          <a:extLst>
-            <a:ext uri="{FF2B5EF4-FFF2-40B4-BE49-F238E27FC236}">
-              <a16:creationId xmlns:a16="http://schemas.microsoft.com/office/drawing/2014/main" id="{77966EAA-4307-E39C-32C9-16E7F6DEBA8F}"/>
-            </a:ext>
-          </a:extLst>
-        </p:cNvPr>
-        <p:cNvGrpSpPr/>
-        <p:nvPr/>
-      </p:nvGrpSpPr>
-      <p:grpSpPr>
-        <a:xfrm>
-          <a:off x="0" y="0"/>
-          <a:ext cx="0" cy="0"/>
-          <a:chOff x="0" y="0"/>
-          <a:chExt cx="0" cy="0"/>
-        </a:xfrm>
-      </p:grpSpPr>
-      <p:sp>
-        <p:nvSpPr>
-          <p:cNvPr id="9" name="Text Placeholder 8">
-            <a:extLst>
-              <a:ext uri="{FF2B5EF4-FFF2-40B4-BE49-F238E27FC236}">
-                <a16:creationId xmlns:a16="http://schemas.microsoft.com/office/drawing/2014/main" id="{CF1CC963-BA9B-5D98-5EFE-46B9D4509B4F}"/>
-              </a:ext>
-            </a:extLst>
-          </p:cNvPr>
-          <p:cNvSpPr>
-            <a:spLocks noGrp="1"/>
-          </p:cNvSpPr>
-          <p:nvPr>
-            <p:ph type="body" sz="quarter" idx="21"/>
-          </p:nvPr>
-        </p:nvSpPr>
-        <p:spPr/>
-        <p:txBody>
-          <a:bodyPr/>
-          <a:lstStyle/>
-          <a:p>
-            <a:r>
-              <a:rPr lang="en-US" dirty="0"/>
-              <a:t>Software Development</a:t>
-            </a:r>
-          </a:p>
-        </p:txBody>
-      </p:sp>
-      <p:sp>
-        <p:nvSpPr>
-          <p:cNvPr id="2" name="Title 1">
-            <a:extLst>
-              <a:ext uri="{FF2B5EF4-FFF2-40B4-BE49-F238E27FC236}">
-                <a16:creationId xmlns:a16="http://schemas.microsoft.com/office/drawing/2014/main" id="{2081CE3A-9122-2A26-15BF-69912DDCB911}"/>
-              </a:ext>
-            </a:extLst>
-          </p:cNvPr>
-          <p:cNvSpPr>
-            <a:spLocks noGrp="1"/>
-          </p:cNvSpPr>
-          <p:nvPr>
-            <p:ph type="title"/>
-          </p:nvPr>
-        </p:nvSpPr>
-        <p:spPr>
-          <a:xfrm>
-            <a:off x="576072" y="1527048"/>
-            <a:ext cx="11044239" cy="2276856"/>
-          </a:xfrm>
-        </p:spPr>
-        <p:txBody>
-          <a:bodyPr/>
-          <a:lstStyle/>
-          <a:p>
-            <a:r>
-              <a:rPr lang="en-US" dirty="0"/>
-              <a:t>AI and Quantum Computers</a:t>
-            </a:r>
-          </a:p>
-        </p:txBody>
-      </p:sp>
-      <p:cxnSp>
-        <p:nvCxnSpPr>
-          <p:cNvPr id="11" name="Straight Connector 10" descr="Vertical column divider">
-            <a:extLst>
-              <a:ext uri="{FF2B5EF4-FFF2-40B4-BE49-F238E27FC236}">
-                <a16:creationId xmlns:a16="http://schemas.microsoft.com/office/drawing/2014/main" id="{293E34D8-F756-3A25-2F68-A47EB8E2ACFD}"/>
-              </a:ext>
-              <a:ext uri="{C183D7F6-B498-43B3-948B-1728B52AA6E4}">
-                <adec:decorative xmlns:adec="http://schemas.microsoft.com/office/drawing/2017/decorative" val="0"/>
-              </a:ext>
-            </a:extLst>
-          </p:cNvPr>
-          <p:cNvCxnSpPr/>
-          <p:nvPr/>
-        </p:nvCxnSpPr>
-        <p:spPr bwMode="auto">
-          <a:xfrm>
-            <a:off x="12192000" y="569913"/>
-            <a:ext cx="0" cy="11431587"/>
-          </a:xfrm>
-          <a:prstGeom prst="line">
-            <a:avLst/>
-          </a:prstGeom>
-          <a:ln w="12700">
-            <a:solidFill>
-              <a:schemeClr val="tx1"/>
-            </a:solidFill>
-            <a:headEnd type="none" w="med" len="med"/>
-            <a:tailEnd type="none" w="med" len="med"/>
-          </a:ln>
-          <a:effectLst/>
-        </p:spPr>
-        <p:style>
-          <a:lnRef idx="1">
-            <a:schemeClr val="dk1"/>
-          </a:lnRef>
-          <a:fillRef idx="0">
-            <a:schemeClr val="dk1"/>
-          </a:fillRef>
-          <a:effectRef idx="0">
-            <a:schemeClr val="dk1"/>
-          </a:effectRef>
-          <a:fontRef idx="minor">
-            <a:schemeClr val="tx1"/>
-          </a:fontRef>
-        </p:style>
-      </p:cxnSp>
-      <p:sp>
-        <p:nvSpPr>
-          <p:cNvPr id="4" name="Text Placeholder 3">
-            <a:extLst>
-              <a:ext uri="{FF2B5EF4-FFF2-40B4-BE49-F238E27FC236}">
-                <a16:creationId xmlns:a16="http://schemas.microsoft.com/office/drawing/2014/main" id="{91841D25-7EE9-8F35-7A51-EF0F802866C1}"/>
-              </a:ext>
-            </a:extLst>
-          </p:cNvPr>
-          <p:cNvSpPr>
-            <a:spLocks noGrp="1"/>
-          </p:cNvSpPr>
-          <p:nvPr>
-            <p:ph type="body" sz="quarter" idx="16"/>
-          </p:nvPr>
-        </p:nvSpPr>
-        <p:spPr/>
-        <p:txBody>
-          <a:bodyPr/>
-          <a:lstStyle/>
-          <a:p>
-            <a:r>
-              <a:rPr lang="en-US" dirty="0" err="1">
-                <a:solidFill>
-                  <a:srgbClr val="8A3FFC"/>
-                </a:solidFill>
-              </a:rPr>
-              <a:t>Qiskit</a:t>
-            </a:r>
-            <a:r>
-              <a:rPr lang="en-US" dirty="0">
-                <a:solidFill>
-                  <a:srgbClr val="8A3FFC"/>
-                </a:solidFill>
-              </a:rPr>
-              <a:t> Code Assistant</a:t>
-            </a:r>
-          </a:p>
-          <a:p>
-            <a:endParaRPr lang="en-US" dirty="0"/>
-          </a:p>
-          <a:p>
-            <a:pPr marL="457200" indent="-457200">
-              <a:buFontTx/>
-              <a:buChar char="-"/>
-            </a:pPr>
-            <a:r>
-              <a:rPr lang="en-US" dirty="0"/>
-              <a:t>IBM Quantum has one</a:t>
-            </a:r>
-          </a:p>
-          <a:p>
-            <a:pPr marL="457200" indent="-457200">
-              <a:buFontTx/>
-              <a:buChar char="-"/>
-            </a:pPr>
-            <a:r>
-              <a:rPr lang="en-US" dirty="0"/>
-              <a:t>Available via a Premium Plan</a:t>
-            </a:r>
-          </a:p>
-          <a:p>
-            <a:pPr marL="457200" indent="-457200">
-              <a:buFontTx/>
-              <a:buChar char="-"/>
-            </a:pPr>
-            <a:r>
-              <a:rPr lang="en-US" dirty="0"/>
-              <a:t>Designed to create </a:t>
-            </a:r>
-            <a:r>
-              <a:rPr lang="en-US" dirty="0" err="1"/>
-              <a:t>Qiskit</a:t>
-            </a:r>
-            <a:r>
-              <a:rPr lang="en-US" dirty="0"/>
-              <a:t> 2 code</a:t>
-            </a:r>
-          </a:p>
-          <a:p>
-            <a:pPr marL="457200" indent="-457200">
-              <a:buFontTx/>
-              <a:buChar char="-"/>
-            </a:pPr>
-            <a:r>
-              <a:rPr lang="en-US" dirty="0"/>
-              <a:t>https://quantum.cloud.ibm.com/docs/en/guides/qiskit-code-assistant</a:t>
-            </a:r>
-          </a:p>
-        </p:txBody>
-      </p:sp>
-      <p:cxnSp>
-        <p:nvCxnSpPr>
-          <p:cNvPr id="12" name="Straight Connector 11" descr="Vertical column divider">
-            <a:extLst>
-              <a:ext uri="{FF2B5EF4-FFF2-40B4-BE49-F238E27FC236}">
-                <a16:creationId xmlns:a16="http://schemas.microsoft.com/office/drawing/2014/main" id="{BC628E82-73DC-D874-316F-EF53FC92206C}"/>
-              </a:ext>
-              <a:ext uri="{C183D7F6-B498-43B3-948B-1728B52AA6E4}">
-                <adec:decorative xmlns:adec="http://schemas.microsoft.com/office/drawing/2017/decorative" val="0"/>
-              </a:ext>
-            </a:extLst>
-          </p:cNvPr>
-          <p:cNvCxnSpPr/>
-          <p:nvPr/>
-        </p:nvCxnSpPr>
-        <p:spPr bwMode="auto">
-          <a:xfrm>
-            <a:off x="18288000" y="569913"/>
-            <a:ext cx="0" cy="11431587"/>
-          </a:xfrm>
-          <a:prstGeom prst="line">
-            <a:avLst/>
-          </a:prstGeom>
-          <a:ln w="12700">
-            <a:solidFill>
-              <a:schemeClr val="tx1"/>
-            </a:solidFill>
-            <a:headEnd type="none" w="med" len="med"/>
-            <a:tailEnd type="none" w="med" len="med"/>
-          </a:ln>
-          <a:effectLst/>
-        </p:spPr>
-        <p:style>
-          <a:lnRef idx="1">
-            <a:schemeClr val="dk1"/>
-          </a:lnRef>
-          <a:fillRef idx="0">
-            <a:schemeClr val="dk1"/>
-          </a:fillRef>
-          <a:effectRef idx="0">
-            <a:schemeClr val="dk1"/>
-          </a:effectRef>
-          <a:fontRef idx="minor">
-            <a:schemeClr val="tx1"/>
-          </a:fontRef>
-        </p:style>
-      </p:cxnSp>
-      <p:sp>
-        <p:nvSpPr>
-          <p:cNvPr id="5" name="Text Placeholder 4">
-            <a:extLst>
-              <a:ext uri="{FF2B5EF4-FFF2-40B4-BE49-F238E27FC236}">
-                <a16:creationId xmlns:a16="http://schemas.microsoft.com/office/drawing/2014/main" id="{C820CC36-4760-4097-72F9-C8AC9926C4A8}"/>
-              </a:ext>
-            </a:extLst>
-          </p:cNvPr>
-          <p:cNvSpPr>
-            <a:spLocks noGrp="1"/>
-          </p:cNvSpPr>
-          <p:nvPr>
-            <p:ph type="body" sz="quarter" idx="17"/>
-          </p:nvPr>
-        </p:nvSpPr>
-        <p:spPr/>
-        <p:txBody>
-          <a:bodyPr/>
-          <a:lstStyle/>
-          <a:p>
-            <a:r>
-              <a:rPr lang="en-US" dirty="0">
-                <a:solidFill>
-                  <a:srgbClr val="8A3FFC"/>
-                </a:solidFill>
-              </a:rPr>
-              <a:t>AI Software Survey</a:t>
-            </a:r>
-          </a:p>
-          <a:p>
-            <a:endParaRPr lang="en-US" dirty="0"/>
-          </a:p>
-          <a:p>
-            <a:pPr marL="457200" indent="-457200">
-              <a:buFontTx/>
-              <a:buChar char="-"/>
-            </a:pPr>
-            <a:r>
-              <a:rPr lang="en-US" dirty="0"/>
-              <a:t>O’Reilly Tech Trends Report (from Jan 6 ‘25: based on ‘24, ‘23)</a:t>
-            </a:r>
-          </a:p>
-          <a:p>
-            <a:pPr marL="457200" indent="-457200">
-              <a:buFontTx/>
-              <a:buChar char="-"/>
-            </a:pPr>
-            <a:r>
-              <a:rPr lang="en-US" dirty="0"/>
-              <a:t>Look for TensorFlow </a:t>
-            </a:r>
-          </a:p>
-          <a:p>
-            <a:endParaRPr lang="en-US" dirty="0"/>
-          </a:p>
-          <a:p>
-            <a:pPr marL="457200" indent="-457200">
-              <a:buFontTx/>
-              <a:buChar char="-"/>
-            </a:pPr>
-            <a:r>
-              <a:rPr lang="en-US" dirty="0"/>
-              <a:t>https://www.oreilly.com/pub/pr/3465</a:t>
-            </a:r>
-          </a:p>
-          <a:p>
-            <a:endParaRPr lang="en-US" dirty="0"/>
-          </a:p>
-        </p:txBody>
-      </p:sp>
-      <p:cxnSp>
-        <p:nvCxnSpPr>
-          <p:cNvPr id="10" name="Straight Connector 9" descr="Horizontal row divider">
-            <a:extLst>
-              <a:ext uri="{FF2B5EF4-FFF2-40B4-BE49-F238E27FC236}">
-                <a16:creationId xmlns:a16="http://schemas.microsoft.com/office/drawing/2014/main" id="{273380DE-F433-958C-6706-072ACA2E1C63}"/>
-              </a:ext>
-              <a:ext uri="{C183D7F6-B498-43B3-948B-1728B52AA6E4}">
-                <adec:decorative xmlns:adec="http://schemas.microsoft.com/office/drawing/2017/decorative" val="0"/>
-              </a:ext>
-            </a:extLst>
-          </p:cNvPr>
-          <p:cNvCxnSpPr/>
-          <p:nvPr/>
-        </p:nvCxnSpPr>
-        <p:spPr bwMode="auto">
-          <a:xfrm>
-            <a:off x="12192000" y="6096000"/>
-            <a:ext cx="11622024" cy="0"/>
-          </a:xfrm>
-          <a:prstGeom prst="line">
-            <a:avLst/>
-          </a:prstGeom>
-          <a:ln w="12700">
-            <a:solidFill>
-              <a:schemeClr val="tx1"/>
-            </a:solidFill>
-            <a:headEnd type="none" w="med" len="med"/>
-            <a:tailEnd type="none" w="med" len="med"/>
-          </a:ln>
-          <a:effectLst/>
-        </p:spPr>
-        <p:style>
-          <a:lnRef idx="1">
-            <a:schemeClr val="dk1"/>
-          </a:lnRef>
-          <a:fillRef idx="0">
-            <a:schemeClr val="dk1"/>
-          </a:fillRef>
-          <a:effectRef idx="0">
-            <a:schemeClr val="dk1"/>
-          </a:effectRef>
-          <a:fontRef idx="minor">
-            <a:schemeClr val="tx1"/>
-          </a:fontRef>
-        </p:style>
-      </p:cxnSp>
-      <p:sp>
-        <p:nvSpPr>
-          <p:cNvPr id="6" name="Text Placeholder 5">
-            <a:extLst>
-              <a:ext uri="{FF2B5EF4-FFF2-40B4-BE49-F238E27FC236}">
-                <a16:creationId xmlns:a16="http://schemas.microsoft.com/office/drawing/2014/main" id="{33B2DAA9-CBE9-FB81-2F5D-B7601029E55D}"/>
-              </a:ext>
-            </a:extLst>
-          </p:cNvPr>
-          <p:cNvSpPr>
-            <a:spLocks noGrp="1"/>
-          </p:cNvSpPr>
-          <p:nvPr>
-            <p:ph type="body" sz="quarter" idx="18"/>
-          </p:nvPr>
-        </p:nvSpPr>
-        <p:spPr>
-          <a:xfrm>
-            <a:off x="12763500" y="6667499"/>
-            <a:ext cx="4953000" cy="5981699"/>
-          </a:xfrm>
-        </p:spPr>
-        <p:txBody>
-          <a:bodyPr/>
-          <a:lstStyle/>
-          <a:p>
-            <a:r>
-              <a:rPr lang="en-US" dirty="0">
-                <a:solidFill>
-                  <a:srgbClr val="8A3FFC"/>
-                </a:solidFill>
-              </a:rPr>
-              <a:t>Quantum Open-Source Software Survey</a:t>
-            </a:r>
-          </a:p>
-          <a:p>
-            <a:endParaRPr lang="en-US" dirty="0"/>
-          </a:p>
-          <a:p>
-            <a:pPr marL="457200" indent="-457200">
-              <a:buFontTx/>
-              <a:buChar char="-"/>
-            </a:pPr>
-            <a:r>
-              <a:rPr lang="en-US" dirty="0"/>
-              <a:t>See the Unitary Foundation’s annual survey </a:t>
-            </a:r>
-          </a:p>
-          <a:p>
-            <a:endParaRPr lang="en-US" b="1" dirty="0"/>
-          </a:p>
-          <a:p>
-            <a:r>
-              <a:rPr lang="en-US" b="1" dirty="0"/>
-              <a:t>https://unitaryfoundation.github.io/survey-2024/</a:t>
-            </a:r>
-          </a:p>
-          <a:p>
-            <a:pPr marL="457200" indent="-457200">
-              <a:buFontTx/>
-              <a:buChar char="-"/>
-            </a:pPr>
-            <a:endParaRPr lang="en-US" dirty="0"/>
-          </a:p>
-          <a:p>
-            <a:pPr marL="457200" indent="-457200">
-              <a:buFontTx/>
-              <a:buChar char="-"/>
-            </a:pPr>
-            <a:r>
-              <a:rPr lang="en-US" dirty="0"/>
-              <a:t>Look for TensorFlow Quantum in the results</a:t>
-            </a:r>
-          </a:p>
-          <a:p>
-            <a:pPr marL="457200" indent="-457200">
-              <a:buFontTx/>
-              <a:buChar char="-"/>
-            </a:pPr>
-            <a:r>
-              <a:rPr lang="en-US" dirty="0"/>
-              <a:t>Look for CUDA-Q</a:t>
-            </a:r>
-          </a:p>
-          <a:p>
-            <a:pPr marL="457200" indent="-457200">
-              <a:buFontTx/>
-              <a:buChar char="-"/>
-            </a:pPr>
-            <a:endParaRPr lang="en-US" dirty="0"/>
-          </a:p>
-        </p:txBody>
-      </p:sp>
-      <p:sp>
-        <p:nvSpPr>
-          <p:cNvPr id="7" name="Text Placeholder 6">
-            <a:extLst>
-              <a:ext uri="{FF2B5EF4-FFF2-40B4-BE49-F238E27FC236}">
-                <a16:creationId xmlns:a16="http://schemas.microsoft.com/office/drawing/2014/main" id="{FB5CD3D3-5184-CAB7-B8A5-7659AA0E5E37}"/>
-              </a:ext>
-            </a:extLst>
-          </p:cNvPr>
-          <p:cNvSpPr>
-            <a:spLocks noGrp="1"/>
-          </p:cNvSpPr>
-          <p:nvPr>
-            <p:ph type="body" sz="quarter" idx="19"/>
-          </p:nvPr>
-        </p:nvSpPr>
-        <p:spPr>
-          <a:xfrm>
-            <a:off x="18859500" y="6667499"/>
-            <a:ext cx="5280660" cy="6478587"/>
-          </a:xfrm>
-        </p:spPr>
-        <p:txBody>
-          <a:bodyPr/>
-          <a:lstStyle/>
-          <a:p>
-            <a:r>
-              <a:rPr lang="en-US" dirty="0">
-                <a:solidFill>
-                  <a:srgbClr val="8A3FFC"/>
-                </a:solidFill>
-              </a:rPr>
-              <a:t>AI + Q, Q + AI</a:t>
-            </a:r>
-          </a:p>
-          <a:p>
-            <a:r>
-              <a:rPr lang="en-US" dirty="0">
-                <a:solidFill>
-                  <a:srgbClr val="8A3FFC"/>
-                </a:solidFill>
-              </a:rPr>
-              <a:t> </a:t>
-            </a:r>
-            <a:endParaRPr lang="en-US" dirty="0"/>
-          </a:p>
-          <a:p>
-            <a:pPr marL="457200" indent="-457200">
-              <a:buFontTx/>
-              <a:buChar char="-"/>
-            </a:pPr>
-            <a:r>
-              <a:rPr lang="en-US" dirty="0"/>
-              <a:t>AI helping Quantum</a:t>
-            </a:r>
-          </a:p>
-          <a:p>
-            <a:pPr marL="457200" indent="-457200">
-              <a:buFontTx/>
-              <a:buChar char="-"/>
-            </a:pPr>
-            <a:r>
-              <a:rPr lang="en-US" dirty="0"/>
-              <a:t>Quantum helping AI</a:t>
-            </a:r>
-          </a:p>
-          <a:p>
-            <a:pPr marL="457200" indent="-457200">
-              <a:buFontTx/>
-              <a:buChar char="-"/>
-            </a:pPr>
-            <a:r>
-              <a:rPr lang="en-US" dirty="0"/>
-              <a:t>Conference Q+AI</a:t>
-            </a:r>
-          </a:p>
-          <a:p>
-            <a:pPr marL="457200" indent="-457200">
-              <a:buFontTx/>
-              <a:buChar char="-"/>
-            </a:pPr>
-            <a:r>
-              <a:rPr lang="en-US" dirty="0"/>
-              <a:t>Company: e.g. Sandbox AQ</a:t>
-            </a:r>
-          </a:p>
-          <a:p>
-            <a:pPr marL="457200" indent="-457200">
-              <a:buFontTx/>
-              <a:buChar char="-"/>
-            </a:pPr>
-            <a:endParaRPr lang="en-US" dirty="0"/>
-          </a:p>
-          <a:p>
-            <a:pPr marL="457200" indent="-457200">
-              <a:buFontTx/>
-              <a:buChar char="-"/>
-            </a:pPr>
-            <a:r>
-              <a:rPr lang="en-US" dirty="0"/>
-              <a:t>IEEE Quantum Week 2025, </a:t>
-            </a:r>
-            <a:r>
-              <a:rPr lang="en-US" i="1" dirty="0"/>
-              <a:t>can still register for on-demand content (~$200) </a:t>
-            </a:r>
-          </a:p>
-          <a:p>
-            <a:endParaRPr lang="en-US" dirty="0"/>
-          </a:p>
-          <a:p>
-            <a:pPr marL="457200" indent="-457200">
-              <a:buFontTx/>
-              <a:buChar char="-"/>
-            </a:pPr>
-            <a:r>
-              <a:rPr lang="en-US" dirty="0"/>
-              <a:t>https://web.cvent.com/event/3f8c3754-761c-4db5-a3f5-20003fcc785c/summary</a:t>
-            </a:r>
-          </a:p>
-          <a:p>
-            <a:endParaRPr lang="en-US" dirty="0"/>
-          </a:p>
-        </p:txBody>
-      </p:sp>
-      <p:sp>
-        <p:nvSpPr>
-          <p:cNvPr id="8" name="Footer Placeholder 7">
-            <a:extLst>
-              <a:ext uri="{FF2B5EF4-FFF2-40B4-BE49-F238E27FC236}">
-                <a16:creationId xmlns:a16="http://schemas.microsoft.com/office/drawing/2014/main" id="{BE085E42-FF5D-D2A4-81C1-C83A6A419B20}"/>
-              </a:ext>
-            </a:extLst>
-          </p:cNvPr>
-          <p:cNvSpPr>
-            <a:spLocks noGrp="1"/>
-          </p:cNvSpPr>
-          <p:nvPr>
-            <p:ph type="ftr" sz="quarter" idx="20"/>
-          </p:nvPr>
-        </p:nvSpPr>
-        <p:spPr>
-          <a:xfrm>
-            <a:off x="576072" y="12801600"/>
-            <a:ext cx="4956176" cy="381000"/>
-          </a:xfrm>
-        </p:spPr>
-        <p:txBody>
-          <a:bodyPr/>
-          <a:lstStyle/>
-          <a:p>
-            <a:r>
-              <a:rPr lang="en-US"/>
-              <a:t>Qiskit Fall Fest 2025</a:t>
-            </a:r>
-            <a:endParaRPr lang="en-US" dirty="0"/>
-          </a:p>
-        </p:txBody>
-      </p:sp>
-      <p:sp>
-        <p:nvSpPr>
-          <p:cNvPr id="14" name="TextBox 13">
-            <a:extLst>
-              <a:ext uri="{FF2B5EF4-FFF2-40B4-BE49-F238E27FC236}">
-                <a16:creationId xmlns:a16="http://schemas.microsoft.com/office/drawing/2014/main" id="{7CFCBCCB-5166-EF19-E01D-6149687A197F}"/>
-              </a:ext>
-            </a:extLst>
-          </p:cNvPr>
-          <p:cNvSpPr txBox="1"/>
-          <p:nvPr/>
-        </p:nvSpPr>
-        <p:spPr>
-          <a:xfrm>
-            <a:off x="26273760" y="12649200"/>
-            <a:ext cx="0" cy="0"/>
-          </a:xfrm>
-          <a:prstGeom prst="rect">
-            <a:avLst/>
-          </a:prstGeom>
-          <a:ln w="12700">
-            <a:miter lim="400000"/>
-          </a:ln>
-          <a:extLst>
-            <a:ext uri="{C572A759-6A51-4108-AA02-DFA0A04FC94B}">
-              <ma14:wrappingTextBoxFlag xmlns="" xmlns:m="http://schemas.openxmlformats.org/officeDocument/2006/math" xmlns:a14="http://schemas.microsoft.com/office/drawing/2010/main" xmlns:ma14="http://schemas.microsoft.com/office/mac/drawingml/2011/main" val="1"/>
-            </a:ext>
-          </a:extLst>
-        </p:spPr>
-        <p:txBody>
-          <a:bodyPr wrap="none" lIns="0" tIns="0" rIns="0" bIns="0" rtlCol="0">
-            <a:noAutofit/>
-          </a:bodyPr>
-          <a:lstStyle/>
-          <a:p>
-            <a:pPr marL="444465" indent="-446749" algn="l" defTabSz="2438400">
-              <a:spcBef>
-                <a:spcPts val="2900"/>
-              </a:spcBef>
-              <a:buSzPct val="100000"/>
-              <a:buFontTx/>
-              <a:buChar char="–"/>
-            </a:pPr>
-            <a:endParaRPr lang="en-US" kern="0" dirty="0">
-              <a:solidFill>
-                <a:srgbClr val="000000"/>
-              </a:solidFill>
-              <a:ea typeface="+mj-ea"/>
-              <a:cs typeface="+mj-cs"/>
-              <a:sym typeface="IBM Plex Sans Light"/>
-            </a:endParaRPr>
-          </a:p>
-        </p:txBody>
-      </p:sp>
-      <p:pic>
-        <p:nvPicPr>
-          <p:cNvPr id="16" name="Picture 15">
-            <a:extLst>
-              <a:ext uri="{FF2B5EF4-FFF2-40B4-BE49-F238E27FC236}">
-                <a16:creationId xmlns:a16="http://schemas.microsoft.com/office/drawing/2014/main" id="{63766459-86B1-A0B0-8A95-BAC810E734F8}"/>
-              </a:ext>
-            </a:extLst>
-          </p:cNvPr>
-          <p:cNvPicPr>
-            <a:picLocks noChangeAspect="1"/>
-          </p:cNvPicPr>
-          <p:nvPr/>
-        </p:nvPicPr>
-        <p:blipFill>
-          <a:blip r:embed="rId2">
-            <a:extLst>
-              <a:ext uri="{96DAC541-7B7A-43D3-8B79-37D633B846F1}">
-                <asvg:svgBlip xmlns:asvg="http://schemas.microsoft.com/office/drawing/2016/SVG/main" r:embed="rId3"/>
-              </a:ext>
-            </a:extLst>
-          </a:blip>
-          <a:srcRect/>
-          <a:stretch/>
-        </p:blipFill>
-        <p:spPr>
-          <a:xfrm>
-            <a:off x="574675" y="10109200"/>
-            <a:ext cx="1892300" cy="1892300"/>
-          </a:xfrm>
-          <a:prstGeom prst="rect">
-            <a:avLst/>
-          </a:prstGeom>
-        </p:spPr>
-      </p:pic>
-    </p:spTree>
-    <p:extLst>
-      <p:ext uri="{BB962C8B-B14F-4D97-AF65-F5344CB8AC3E}">
-        <p14:creationId xmlns:p14="http://schemas.microsoft.com/office/powerpoint/2010/main" val="1050914756"/>
       </p:ext>
     </p:extLst>
   </p:cSld>
@@ -37679,7 +39224,7 @@
         </a:ln>
         <a:extLst>
           <a:ext uri="{C572A759-6A51-4108-AA02-DFA0A04FC94B}">
-            <ma14:wrappingTextBoxFlag xmlns:r="http://schemas.openxmlformats.org/officeDocument/2006/relationships" xmlns:p="http://schemas.openxmlformats.org/presentationml/2006/main" xmlns="" xmlns:m="http://schemas.openxmlformats.org/officeDocument/2006/math" xmlns:a14="http://schemas.microsoft.com/office/drawing/2010/main" xmlns:ma14="http://schemas.microsoft.com/office/mac/drawingml/2011/main" val="1"/>
+            <ma14:wrappingTextBoxFlag xmlns:ma14="http://schemas.microsoft.com/office/mac/drawingml/2011/main" xmlns:a14="http://schemas.microsoft.com/office/drawing/2010/main" xmlns:m="http://schemas.openxmlformats.org/officeDocument/2006/math" xmlns="" xmlns:p="http://schemas.openxmlformats.org/presentationml/2006/main" xmlns:r="http://schemas.openxmlformats.org/officeDocument/2006/relationships" val="1"/>
           </a:ext>
         </a:extLst>
       </a:spPr>
@@ -38185,7 +39730,7 @@
         </a:ln>
         <a:extLst>
           <a:ext uri="{C572A759-6A51-4108-AA02-DFA0A04FC94B}">
-            <ma14:wrappingTextBoxFlag xmlns:ma14="http://schemas.microsoft.com/office/mac/drawingml/2011/main" xmlns:a14="http://schemas.microsoft.com/office/drawing/2010/main" xmlns:m="http://schemas.openxmlformats.org/officeDocument/2006/math" xmlns="" xmlns:p="http://schemas.openxmlformats.org/presentationml/2006/main" xmlns:r="http://schemas.openxmlformats.org/officeDocument/2006/relationships" val="1"/>
+            <ma14:wrappingTextBoxFlag xmlns:r="http://schemas.openxmlformats.org/officeDocument/2006/relationships" xmlns:p="http://schemas.openxmlformats.org/presentationml/2006/main" xmlns="" xmlns:m="http://schemas.openxmlformats.org/officeDocument/2006/math" xmlns:a14="http://schemas.microsoft.com/office/drawing/2010/main" xmlns:ma14="http://schemas.microsoft.com/office/mac/drawingml/2011/main" val="1"/>
           </a:ext>
         </a:extLst>
       </a:spPr>
@@ -38691,7 +40236,7 @@
         </a:ln>
         <a:extLst>
           <a:ext uri="{C572A759-6A51-4108-AA02-DFA0A04FC94B}">
-            <ma14:wrappingTextBoxFlag xmlns:ma14="http://schemas.microsoft.com/office/mac/drawingml/2011/main" xmlns:a14="http://schemas.microsoft.com/office/drawing/2010/main" xmlns:m="http://schemas.openxmlformats.org/officeDocument/2006/math" xmlns="" xmlns:p="http://schemas.openxmlformats.org/presentationml/2006/main" xmlns:r="http://schemas.openxmlformats.org/officeDocument/2006/relationships" val="1"/>
+            <ma14:wrappingTextBoxFlag xmlns:r="http://schemas.openxmlformats.org/officeDocument/2006/relationships" xmlns:p="http://schemas.openxmlformats.org/presentationml/2006/main" xmlns="" xmlns:m="http://schemas.openxmlformats.org/officeDocument/2006/math" xmlns:a14="http://schemas.microsoft.com/office/drawing/2010/main" xmlns:ma14="http://schemas.microsoft.com/office/mac/drawingml/2011/main" val="1"/>
           </a:ext>
         </a:extLst>
       </a:spPr>
